--- a/docs/content/05-teaching-resources/slides/core/02-problem-solving-strategies.pptx
+++ b/docs/content/05-teaching-resources/slides/core/02-problem-solving-strategies.pptx
@@ -9,11 +9,15 @@
     <p:sldId id="257" r:id="rId8"/>
     <p:sldId id="258" r:id="rId9"/>
     <p:sldId id="259" r:id="rId10"/>
-    <p:sldId id="260" r:id="rId12"/>
+    <p:sldId id="260" r:id="rId11"/>
     <p:sldId id="261" r:id="rId13"/>
     <p:sldId id="262" r:id="rId14"/>
     <p:sldId id="263" r:id="rId15"/>
     <p:sldId id="264" r:id="rId16"/>
+    <p:sldId id="265" r:id="rId17"/>
+    <p:sldId id="266" r:id="rId18"/>
+    <p:sldId id="267" r:id="rId19"/>
+    <p:sldId id="268" r:id="rId20"/>
   </p:sldIdLst>
   <p:sldSz cx="12191695" cy="6858000" type="screen4x3"/>
   <p:notesSz cx="6858000" cy="9144000"/>
@@ -510,7 +514,22 @@
           <a:lstStyle/>
           <a:p>
             <a:r>
-              <a:t>Five whys example: the upload crashes. Why? The file is too big. Why? No size check. Why? Validation was never specified. Why? Requirements missed non-functional limits.</a:t>
+              <a:t>Answers:</a:t>
+            </a:r>
+          </a:p>
+          <a:p>
+            <a:r>
+              <a:t>1. Top-down.</a:t>
+            </a:r>
+          </a:p>
+          <a:p>
+            <a:r>
+              <a:t>2. Separate testing, teamwork, reuse.</a:t>
+            </a:r>
+          </a:p>
+          <a:p>
+            <a:r>
+              <a:t>3. When reliable components already exist.</a:t>
             </a:r>
           </a:p>
         </p:txBody>
@@ -580,7 +599,7 @@
           <a:lstStyle/>
           <a:p>
             <a:r>
-              <a:t>Give students a few minutes to answer on mini whiteboards or paper, then reveal the answers on the next slide.</a:t>
+              <a:t>Five whys example: the upload crashes. Why? The file is too big. Why? No size check. Why? Validation was never specified. Why? Requirements missed non-functional limits.</a:t>
             </a:r>
           </a:p>
         </p:txBody>
@@ -650,7 +669,22 @@
           <a:lstStyle/>
           <a:p>
             <a:r>
-              <a:t>Talk through any answers the class found difficult.</a:t>
+              <a:t>Answers:</a:t>
+            </a:r>
+          </a:p>
+          <a:p>
+            <a:r>
+              <a:t>1. To find the root cause, not just the symptom.</a:t>
+            </a:r>
+          </a:p>
+          <a:p>
+            <a:r>
+              <a:t>2. Ways something could fail and their effects.</a:t>
+            </a:r>
+          </a:p>
+          <a:p>
+            <a:r>
+              <a:t>3. It's escalated.</a:t>
             </a:r>
           </a:p>
         </p:txBody>
@@ -676,6 +710,146 @@
 </file>
 
 <file path=ppt/notesSlides/notesSlide4.xml><?xml version="1.0" encoding="utf-8"?>
+<p:notes xmlns:a="http://schemas.openxmlformats.org/drawingml/2006/main" xmlns:p="http://schemas.openxmlformats.org/presentationml/2006/main" xmlns:r="http://schemas.openxmlformats.org/officeDocument/2006/relationships">
+  <p:cSld>
+    <p:spTree>
+      <p:nvGrpSpPr>
+        <p:cNvPr id="1" name=""/>
+        <p:cNvGrpSpPr/>
+        <p:nvPr/>
+      </p:nvGrpSpPr>
+      <p:grpSpPr>
+        <a:xfrm>
+          <a:off x="0" y="0"/>
+          <a:ext cx="0" cy="0"/>
+          <a:chOff x="0" y="0"/>
+          <a:chExt cx="0" cy="0"/>
+        </a:xfrm>
+      </p:grpSpPr>
+      <p:sp>
+        <p:nvSpPr>
+          <p:cNvPr id="2" name="Slide Image Placeholder 1"/>
+          <p:cNvSpPr>
+            <a:spLocks noGrp="1"/>
+          </p:cNvSpPr>
+          <p:nvPr>
+            <p:ph type="sldImg" idx="2"/>
+          </p:nvPr>
+        </p:nvSpPr>
+        <p:spPr/>
+      </p:sp>
+      <p:sp>
+        <p:nvSpPr>
+          <p:cNvPr id="3" name="Notes Placeholder 2"/>
+          <p:cNvSpPr>
+            <a:spLocks noGrp="1"/>
+          </p:cNvSpPr>
+          <p:nvPr>
+            <p:ph type="body" idx="3" sz="quarter"/>
+          </p:nvPr>
+        </p:nvSpPr>
+        <p:spPr/>
+        <p:txBody>
+          <a:bodyPr/>
+          <a:lstStyle/>
+          <a:p>
+            <a:r>
+              <a:t>Give students a few minutes to answer on mini whiteboards or paper, then reveal the answers on the next slide.</a:t>
+            </a:r>
+          </a:p>
+        </p:txBody>
+      </p:sp>
+      <p:sp>
+        <p:nvSpPr>
+          <p:cNvPr id="4" name="Slide Number Placeholder 3"/>
+          <p:cNvSpPr>
+            <a:spLocks noGrp="1"/>
+          </p:cNvSpPr>
+          <p:nvPr>
+            <p:ph type="sldNum" idx="5" sz="quarter"/>
+          </p:nvPr>
+        </p:nvSpPr>
+        <p:spPr/>
+      </p:sp>
+    </p:spTree>
+  </p:cSld>
+  <p:clrMapOvr>
+    <a:masterClrMapping/>
+  </p:clrMapOvr>
+</p:notes>
+</file>
+
+<file path=ppt/notesSlides/notesSlide5.xml><?xml version="1.0" encoding="utf-8"?>
+<p:notes xmlns:a="http://schemas.openxmlformats.org/drawingml/2006/main" xmlns:p="http://schemas.openxmlformats.org/presentationml/2006/main" xmlns:r="http://schemas.openxmlformats.org/officeDocument/2006/relationships">
+  <p:cSld>
+    <p:spTree>
+      <p:nvGrpSpPr>
+        <p:cNvPr id="1" name=""/>
+        <p:cNvGrpSpPr/>
+        <p:nvPr/>
+      </p:nvGrpSpPr>
+      <p:grpSpPr>
+        <a:xfrm>
+          <a:off x="0" y="0"/>
+          <a:ext cx="0" cy="0"/>
+          <a:chOff x="0" y="0"/>
+          <a:chExt cx="0" cy="0"/>
+        </a:xfrm>
+      </p:grpSpPr>
+      <p:sp>
+        <p:nvSpPr>
+          <p:cNvPr id="2" name="Slide Image Placeholder 1"/>
+          <p:cNvSpPr>
+            <a:spLocks noGrp="1"/>
+          </p:cNvSpPr>
+          <p:nvPr>
+            <p:ph type="sldImg" idx="2"/>
+          </p:nvPr>
+        </p:nvSpPr>
+        <p:spPr/>
+      </p:sp>
+      <p:sp>
+        <p:nvSpPr>
+          <p:cNvPr id="3" name="Notes Placeholder 2"/>
+          <p:cNvSpPr>
+            <a:spLocks noGrp="1"/>
+          </p:cNvSpPr>
+          <p:nvPr>
+            <p:ph type="body" idx="3" sz="quarter"/>
+          </p:nvPr>
+        </p:nvSpPr>
+        <p:spPr/>
+        <p:txBody>
+          <a:bodyPr/>
+          <a:lstStyle/>
+          <a:p>
+            <a:r>
+              <a:t>Talk through any answers the class found difficult.</a:t>
+            </a:r>
+          </a:p>
+        </p:txBody>
+      </p:sp>
+      <p:sp>
+        <p:nvSpPr>
+          <p:cNvPr id="4" name="Slide Number Placeholder 3"/>
+          <p:cNvSpPr>
+            <a:spLocks noGrp="1"/>
+          </p:cNvSpPr>
+          <p:nvPr>
+            <p:ph type="sldNum" idx="5" sz="quarter"/>
+          </p:nvPr>
+        </p:nvSpPr>
+        <p:spPr/>
+      </p:sp>
+    </p:spTree>
+  </p:cSld>
+  <p:clrMapOvr>
+    <a:masterClrMapping/>
+  </p:clrMapOvr>
+</p:notes>
+</file>
+
+<file path=ppt/notesSlides/notesSlide6.xml><?xml version="1.0" encoding="utf-8"?>
 <p:notes xmlns:a="http://schemas.openxmlformats.org/drawingml/2006/main" xmlns:p="http://schemas.openxmlformats.org/presentationml/2006/main" xmlns:r="http://schemas.openxmlformats.org/officeDocument/2006/relationships">
   <p:cSld>
     <p:spTree>
@@ -4045,6 +4219,2355 @@
 </p:sld>
 </file>
 
+<file path=ppt/slides/slide10.xml><?xml version="1.0" encoding="utf-8"?>
+<p:sld xmlns:a="http://schemas.openxmlformats.org/drawingml/2006/main" xmlns:p="http://schemas.openxmlformats.org/presentationml/2006/main" xmlns:r="http://schemas.openxmlformats.org/officeDocument/2006/relationships">
+  <p:cSld>
+    <p:bg>
+      <p:bgPr>
+        <a:solidFill>
+          <a:srgbClr val="FFFFFF"/>
+        </a:solidFill>
+        <a:effectLst/>
+      </p:bgPr>
+    </p:bg>
+    <p:spTree>
+      <p:nvGrpSpPr>
+        <p:cNvPr id="1" name=""/>
+        <p:cNvGrpSpPr/>
+        <p:nvPr/>
+      </p:nvGrpSpPr>
+      <p:grpSpPr/>
+      <p:sp>
+        <p:nvSpPr>
+          <p:cNvPr id="2" name="TextBox 1"/>
+          <p:cNvSpPr txBox="1"/>
+          <p:nvPr/>
+        </p:nvSpPr>
+        <p:spPr>
+          <a:xfrm>
+            <a:off x="548640" y="320040"/>
+            <a:ext cx="11094415" cy="274320"/>
+          </a:xfrm>
+          <a:prstGeom prst="rect">
+            <a:avLst/>
+          </a:prstGeom>
+          <a:noFill/>
+        </p:spPr>
+        <p:txBody>
+          <a:bodyPr wrap="square" anchor="t" lIns="0" rIns="0" tIns="0" bIns="0"/>
+          <a:lstStyle/>
+          <a:p>
+            <a:pPr algn="l"/>
+            <a:r>
+              <a:rPr sz="1100" b="1" i="0">
+                <a:solidFill>
+                  <a:srgbClr val="54595D"/>
+                </a:solidFill>
+                <a:latin typeface="Calibri"/>
+              </a:rPr>
+              <a:t>CORE COMPONENT  ·  Core Paper 1</a:t>
+            </a:r>
+          </a:p>
+        </p:txBody>
+      </p:sp>
+      <p:sp>
+        <p:nvSpPr>
+          <p:cNvPr id="3" name="TextBox 2"/>
+          <p:cNvSpPr txBox="1"/>
+          <p:nvPr/>
+        </p:nvSpPr>
+        <p:spPr>
+          <a:xfrm>
+            <a:off x="548640" y="566928"/>
+            <a:ext cx="11094415" cy="822960"/>
+          </a:xfrm>
+          <a:prstGeom prst="rect">
+            <a:avLst/>
+          </a:prstGeom>
+          <a:noFill/>
+        </p:spPr>
+        <p:txBody>
+          <a:bodyPr wrap="square" anchor="ctr" lIns="0" rIns="0" tIns="0" bIns="0"/>
+          <a:lstStyle/>
+          <a:p>
+            <a:pPr algn="l"/>
+            <a:r>
+              <a:rPr sz="3200" b="1" i="0">
+                <a:solidFill>
+                  <a:srgbClr val="03306E"/>
+                </a:solidFill>
+                <a:latin typeface="Cambria"/>
+              </a:rPr>
+              <a:t>Check your understanding</a:t>
+            </a:r>
+          </a:p>
+        </p:txBody>
+      </p:sp>
+      <p:sp>
+        <p:nvSpPr>
+          <p:cNvPr id="4" name="TextBox 3"/>
+          <p:cNvSpPr txBox="1"/>
+          <p:nvPr/>
+        </p:nvSpPr>
+        <p:spPr>
+          <a:xfrm>
+            <a:off x="548640" y="6446520"/>
+            <a:ext cx="8229600" cy="274320"/>
+          </a:xfrm>
+          <a:prstGeom prst="rect">
+            <a:avLst/>
+          </a:prstGeom>
+          <a:noFill/>
+        </p:spPr>
+        <p:txBody>
+          <a:bodyPr wrap="square" anchor="t" lIns="0" rIns="0" tIns="0" bIns="0"/>
+          <a:lstStyle/>
+          <a:p>
+            <a:pPr algn="l"/>
+            <a:r>
+              <a:rPr sz="1000" b="0" i="0">
+                <a:solidFill>
+                  <a:srgbClr val="54595D"/>
+                </a:solidFill>
+                <a:latin typeface="Calibri"/>
+              </a:rPr>
+              <a:t>Digital Software Development T Level  ·  Problem-Solving Strategies</a:t>
+            </a:r>
+          </a:p>
+        </p:txBody>
+      </p:sp>
+      <p:sp>
+        <p:nvSpPr>
+          <p:cNvPr id="5" name="TextBox 4"/>
+          <p:cNvSpPr txBox="1"/>
+          <p:nvPr/>
+        </p:nvSpPr>
+        <p:spPr>
+          <a:xfrm>
+            <a:off x="10728655" y="6446520"/>
+            <a:ext cx="914400" cy="274320"/>
+          </a:xfrm>
+          <a:prstGeom prst="rect">
+            <a:avLst/>
+          </a:prstGeom>
+          <a:noFill/>
+        </p:spPr>
+        <p:txBody>
+          <a:bodyPr wrap="square" anchor="t" lIns="0" rIns="0" tIns="0" bIns="0"/>
+          <a:lstStyle/>
+          <a:p>
+            <a:pPr algn="r"/>
+            <a:r>
+              <a:rPr sz="1000" b="0" i="0">
+                <a:solidFill>
+                  <a:srgbClr val="54595D"/>
+                </a:solidFill>
+                <a:latin typeface="Calibri"/>
+              </a:rPr>
+              <a:t>10</a:t>
+            </a:r>
+          </a:p>
+        </p:txBody>
+      </p:sp>
+      <p:sp>
+        <p:nvSpPr>
+          <p:cNvPr id="6" name="Oval 5"/>
+          <p:cNvSpPr/>
+          <p:nvPr/>
+        </p:nvSpPr>
+        <p:spPr>
+          <a:xfrm>
+            <a:off x="548640" y="1618488"/>
+            <a:ext cx="411480" cy="411480"/>
+          </a:xfrm>
+          <a:prstGeom prst="ellipse">
+            <a:avLst/>
+          </a:prstGeom>
+          <a:solidFill>
+            <a:srgbClr val="F2B705"/>
+          </a:solidFill>
+          <a:ln>
+            <a:noFill/>
+          </a:ln>
+          <a:effectLst/>
+        </p:spPr>
+        <p:style>
+          <a:lnRef idx="1">
+            <a:schemeClr val="accent1"/>
+          </a:lnRef>
+          <a:fillRef idx="3">
+            <a:schemeClr val="accent1"/>
+          </a:fillRef>
+          <a:effectRef idx="2">
+            <a:schemeClr val="accent1"/>
+          </a:effectRef>
+          <a:fontRef idx="minor">
+            <a:schemeClr val="lt1"/>
+          </a:fontRef>
+        </p:style>
+        <p:txBody>
+          <a:bodyPr rtlCol="0" anchor="ctr" lIns="0" rIns="0" tIns="0" bIns="0"/>
+          <a:lstStyle/>
+          <a:p>
+            <a:pPr algn="ctr"/>
+            <a:r>
+              <a:rPr sz="1400" b="1">
+                <a:solidFill>
+                  <a:srgbClr val="202122"/>
+                </a:solidFill>
+                <a:latin typeface="Calibri"/>
+              </a:rPr>
+              <a:t>1</a:t>
+            </a:r>
+          </a:p>
+        </p:txBody>
+      </p:sp>
+      <p:sp>
+        <p:nvSpPr>
+          <p:cNvPr id="7" name="TextBox 6"/>
+          <p:cNvSpPr txBox="1"/>
+          <p:nvPr/>
+        </p:nvSpPr>
+        <p:spPr>
+          <a:xfrm>
+            <a:off x="1234440" y="1600200"/>
+            <a:ext cx="10408615" cy="1030986"/>
+          </a:xfrm>
+          <a:prstGeom prst="rect">
+            <a:avLst/>
+          </a:prstGeom>
+          <a:noFill/>
+        </p:spPr>
+        <p:txBody>
+          <a:bodyPr wrap="square" anchor="t" lIns="0" rIns="0" tIns="0" bIns="0"/>
+          <a:lstStyle/>
+          <a:p>
+            <a:pPr algn="l"/>
+            <a:r>
+              <a:rPr sz="2200" b="0" i="0">
+                <a:solidFill>
+                  <a:srgbClr val="202122"/>
+                </a:solidFill>
+                <a:latin typeface="Calibri"/>
+              </a:rPr>
+              <a:t>Which approach builds a solution from small working components?</a:t>
+            </a:r>
+          </a:p>
+        </p:txBody>
+      </p:sp>
+      <p:sp>
+        <p:nvSpPr>
+          <p:cNvPr id="8" name="Oval 7"/>
+          <p:cNvSpPr/>
+          <p:nvPr/>
+        </p:nvSpPr>
+        <p:spPr>
+          <a:xfrm>
+            <a:off x="548640" y="2814066"/>
+            <a:ext cx="411480" cy="411480"/>
+          </a:xfrm>
+          <a:prstGeom prst="ellipse">
+            <a:avLst/>
+          </a:prstGeom>
+          <a:solidFill>
+            <a:srgbClr val="F2B705"/>
+          </a:solidFill>
+          <a:ln>
+            <a:noFill/>
+          </a:ln>
+          <a:effectLst/>
+        </p:spPr>
+        <p:style>
+          <a:lnRef idx="1">
+            <a:schemeClr val="accent1"/>
+          </a:lnRef>
+          <a:fillRef idx="3">
+            <a:schemeClr val="accent1"/>
+          </a:fillRef>
+          <a:effectRef idx="2">
+            <a:schemeClr val="accent1"/>
+          </a:effectRef>
+          <a:fontRef idx="minor">
+            <a:schemeClr val="lt1"/>
+          </a:fontRef>
+        </p:style>
+        <p:txBody>
+          <a:bodyPr rtlCol="0" anchor="ctr" lIns="0" rIns="0" tIns="0" bIns="0"/>
+          <a:lstStyle/>
+          <a:p>
+            <a:pPr algn="ctr"/>
+            <a:r>
+              <a:rPr sz="1400" b="1">
+                <a:solidFill>
+                  <a:srgbClr val="202122"/>
+                </a:solidFill>
+                <a:latin typeface="Calibri"/>
+              </a:rPr>
+              <a:t>2</a:t>
+            </a:r>
+          </a:p>
+        </p:txBody>
+      </p:sp>
+      <p:sp>
+        <p:nvSpPr>
+          <p:cNvPr id="9" name="TextBox 8"/>
+          <p:cNvSpPr txBox="1"/>
+          <p:nvPr/>
+        </p:nvSpPr>
+        <p:spPr>
+          <a:xfrm>
+            <a:off x="1234440" y="2795778"/>
+            <a:ext cx="10408615" cy="1030986"/>
+          </a:xfrm>
+          <a:prstGeom prst="rect">
+            <a:avLst/>
+          </a:prstGeom>
+          <a:noFill/>
+        </p:spPr>
+        <p:txBody>
+          <a:bodyPr wrap="square" anchor="t" lIns="0" rIns="0" tIns="0" bIns="0"/>
+          <a:lstStyle/>
+          <a:p>
+            <a:pPr algn="l"/>
+            <a:r>
+              <a:rPr sz="2200" b="0" i="0">
+                <a:solidFill>
+                  <a:srgbClr val="202122"/>
+                </a:solidFill>
+                <a:latin typeface="Calibri"/>
+              </a:rPr>
+              <a:t>What is the aim of the five whys?</a:t>
+            </a:r>
+          </a:p>
+        </p:txBody>
+      </p:sp>
+      <p:sp>
+        <p:nvSpPr>
+          <p:cNvPr id="10" name="Oval 9"/>
+          <p:cNvSpPr/>
+          <p:nvPr/>
+        </p:nvSpPr>
+        <p:spPr>
+          <a:xfrm>
+            <a:off x="548640" y="4009644"/>
+            <a:ext cx="411480" cy="411480"/>
+          </a:xfrm>
+          <a:prstGeom prst="ellipse">
+            <a:avLst/>
+          </a:prstGeom>
+          <a:solidFill>
+            <a:srgbClr val="F2B705"/>
+          </a:solidFill>
+          <a:ln>
+            <a:noFill/>
+          </a:ln>
+          <a:effectLst/>
+        </p:spPr>
+        <p:style>
+          <a:lnRef idx="1">
+            <a:schemeClr val="accent1"/>
+          </a:lnRef>
+          <a:fillRef idx="3">
+            <a:schemeClr val="accent1"/>
+          </a:fillRef>
+          <a:effectRef idx="2">
+            <a:schemeClr val="accent1"/>
+          </a:effectRef>
+          <a:fontRef idx="minor">
+            <a:schemeClr val="lt1"/>
+          </a:fontRef>
+        </p:style>
+        <p:txBody>
+          <a:bodyPr rtlCol="0" anchor="ctr" lIns="0" rIns="0" tIns="0" bIns="0"/>
+          <a:lstStyle/>
+          <a:p>
+            <a:pPr algn="ctr"/>
+            <a:r>
+              <a:rPr sz="1400" b="1">
+                <a:solidFill>
+                  <a:srgbClr val="202122"/>
+                </a:solidFill>
+                <a:latin typeface="Calibri"/>
+              </a:rPr>
+              <a:t>3</a:t>
+            </a:r>
+          </a:p>
+        </p:txBody>
+      </p:sp>
+      <p:sp>
+        <p:nvSpPr>
+          <p:cNvPr id="11" name="TextBox 10"/>
+          <p:cNvSpPr txBox="1"/>
+          <p:nvPr/>
+        </p:nvSpPr>
+        <p:spPr>
+          <a:xfrm>
+            <a:off x="1234440" y="3991356"/>
+            <a:ext cx="10408615" cy="1030986"/>
+          </a:xfrm>
+          <a:prstGeom prst="rect">
+            <a:avLst/>
+          </a:prstGeom>
+          <a:noFill/>
+        </p:spPr>
+        <p:txBody>
+          <a:bodyPr wrap="square" anchor="t" lIns="0" rIns="0" tIns="0" bIns="0"/>
+          <a:lstStyle/>
+          <a:p>
+            <a:pPr algn="l"/>
+            <a:r>
+              <a:rPr sz="2200" b="0" i="0">
+                <a:solidFill>
+                  <a:srgbClr val="202122"/>
+                </a:solidFill>
+                <a:latin typeface="Calibri"/>
+              </a:rPr>
+              <a:t>What does FMEA stand for?</a:t>
+            </a:r>
+          </a:p>
+        </p:txBody>
+      </p:sp>
+      <p:sp>
+        <p:nvSpPr>
+          <p:cNvPr id="12" name="Oval 11"/>
+          <p:cNvSpPr/>
+          <p:nvPr/>
+        </p:nvSpPr>
+        <p:spPr>
+          <a:xfrm>
+            <a:off x="548640" y="5205221"/>
+            <a:ext cx="411480" cy="411480"/>
+          </a:xfrm>
+          <a:prstGeom prst="ellipse">
+            <a:avLst/>
+          </a:prstGeom>
+          <a:solidFill>
+            <a:srgbClr val="F2B705"/>
+          </a:solidFill>
+          <a:ln>
+            <a:noFill/>
+          </a:ln>
+          <a:effectLst/>
+        </p:spPr>
+        <p:style>
+          <a:lnRef idx="1">
+            <a:schemeClr val="accent1"/>
+          </a:lnRef>
+          <a:fillRef idx="3">
+            <a:schemeClr val="accent1"/>
+          </a:fillRef>
+          <a:effectRef idx="2">
+            <a:schemeClr val="accent1"/>
+          </a:effectRef>
+          <a:fontRef idx="minor">
+            <a:schemeClr val="lt1"/>
+          </a:fontRef>
+        </p:style>
+        <p:txBody>
+          <a:bodyPr rtlCol="0" anchor="ctr" lIns="0" rIns="0" tIns="0" bIns="0"/>
+          <a:lstStyle/>
+          <a:p>
+            <a:pPr algn="ctr"/>
+            <a:r>
+              <a:rPr sz="1400" b="1">
+                <a:solidFill>
+                  <a:srgbClr val="202122"/>
+                </a:solidFill>
+                <a:latin typeface="Calibri"/>
+              </a:rPr>
+              <a:t>4</a:t>
+            </a:r>
+          </a:p>
+        </p:txBody>
+      </p:sp>
+      <p:sp>
+        <p:nvSpPr>
+          <p:cNvPr id="13" name="TextBox 12"/>
+          <p:cNvSpPr txBox="1"/>
+          <p:nvPr/>
+        </p:nvSpPr>
+        <p:spPr>
+          <a:xfrm>
+            <a:off x="1234440" y="5186933"/>
+            <a:ext cx="10408615" cy="1030986"/>
+          </a:xfrm>
+          <a:prstGeom prst="rect">
+            <a:avLst/>
+          </a:prstGeom>
+          <a:noFill/>
+        </p:spPr>
+        <p:txBody>
+          <a:bodyPr wrap="square" anchor="t" lIns="0" rIns="0" tIns="0" bIns="0"/>
+          <a:lstStyle/>
+          <a:p>
+            <a:pPr algn="l"/>
+            <a:r>
+              <a:rPr sz="2200" b="0" i="0">
+                <a:solidFill>
+                  <a:srgbClr val="202122"/>
+                </a:solidFill>
+                <a:latin typeface="Calibri"/>
+              </a:rPr>
+              <a:t>What is the last step of the problem-solving strategy?</a:t>
+            </a:r>
+          </a:p>
+        </p:txBody>
+      </p:sp>
+    </p:spTree>
+  </p:cSld>
+  <p:clrMapOvr>
+    <a:masterClrMapping/>
+  </p:clrMapOvr>
+</p:sld>
+</file>
+
+<file path=ppt/slides/slide11.xml><?xml version="1.0" encoding="utf-8"?>
+<p:sld xmlns:a="http://schemas.openxmlformats.org/drawingml/2006/main" xmlns:p="http://schemas.openxmlformats.org/presentationml/2006/main" xmlns:r="http://schemas.openxmlformats.org/officeDocument/2006/relationships">
+  <p:cSld>
+    <p:bg>
+      <p:bgPr>
+        <a:solidFill>
+          <a:srgbClr val="FFFFFF"/>
+        </a:solidFill>
+        <a:effectLst/>
+      </p:bgPr>
+    </p:bg>
+    <p:spTree>
+      <p:nvGrpSpPr>
+        <p:cNvPr id="1" name=""/>
+        <p:cNvGrpSpPr/>
+        <p:nvPr/>
+      </p:nvGrpSpPr>
+      <p:grpSpPr/>
+      <p:sp>
+        <p:nvSpPr>
+          <p:cNvPr id="2" name="TextBox 1"/>
+          <p:cNvSpPr txBox="1"/>
+          <p:nvPr/>
+        </p:nvSpPr>
+        <p:spPr>
+          <a:xfrm>
+            <a:off x="548640" y="320040"/>
+            <a:ext cx="11094415" cy="274320"/>
+          </a:xfrm>
+          <a:prstGeom prst="rect">
+            <a:avLst/>
+          </a:prstGeom>
+          <a:noFill/>
+        </p:spPr>
+        <p:txBody>
+          <a:bodyPr wrap="square" anchor="t" lIns="0" rIns="0" tIns="0" bIns="0"/>
+          <a:lstStyle/>
+          <a:p>
+            <a:pPr algn="l"/>
+            <a:r>
+              <a:rPr sz="1100" b="1" i="0">
+                <a:solidFill>
+                  <a:srgbClr val="54595D"/>
+                </a:solidFill>
+                <a:latin typeface="Calibri"/>
+              </a:rPr>
+              <a:t>CORE COMPONENT  ·  Core Paper 1</a:t>
+            </a:r>
+          </a:p>
+        </p:txBody>
+      </p:sp>
+      <p:sp>
+        <p:nvSpPr>
+          <p:cNvPr id="3" name="TextBox 2"/>
+          <p:cNvSpPr txBox="1"/>
+          <p:nvPr/>
+        </p:nvSpPr>
+        <p:spPr>
+          <a:xfrm>
+            <a:off x="548640" y="566928"/>
+            <a:ext cx="11094415" cy="822960"/>
+          </a:xfrm>
+          <a:prstGeom prst="rect">
+            <a:avLst/>
+          </a:prstGeom>
+          <a:noFill/>
+        </p:spPr>
+        <p:txBody>
+          <a:bodyPr wrap="square" anchor="ctr" lIns="0" rIns="0" tIns="0" bIns="0"/>
+          <a:lstStyle/>
+          <a:p>
+            <a:pPr algn="l"/>
+            <a:r>
+              <a:rPr sz="3200" b="1" i="0">
+                <a:solidFill>
+                  <a:srgbClr val="03306E"/>
+                </a:solidFill>
+                <a:latin typeface="Cambria"/>
+              </a:rPr>
+              <a:t>Answers</a:t>
+            </a:r>
+          </a:p>
+        </p:txBody>
+      </p:sp>
+      <p:sp>
+        <p:nvSpPr>
+          <p:cNvPr id="4" name="TextBox 3"/>
+          <p:cNvSpPr txBox="1"/>
+          <p:nvPr/>
+        </p:nvSpPr>
+        <p:spPr>
+          <a:xfrm>
+            <a:off x="548640" y="6446520"/>
+            <a:ext cx="8229600" cy="274320"/>
+          </a:xfrm>
+          <a:prstGeom prst="rect">
+            <a:avLst/>
+          </a:prstGeom>
+          <a:noFill/>
+        </p:spPr>
+        <p:txBody>
+          <a:bodyPr wrap="square" anchor="t" lIns="0" rIns="0" tIns="0" bIns="0"/>
+          <a:lstStyle/>
+          <a:p>
+            <a:pPr algn="l"/>
+            <a:r>
+              <a:rPr sz="1000" b="0" i="0">
+                <a:solidFill>
+                  <a:srgbClr val="54595D"/>
+                </a:solidFill>
+                <a:latin typeface="Calibri"/>
+              </a:rPr>
+              <a:t>Digital Software Development T Level  ·  Problem-Solving Strategies</a:t>
+            </a:r>
+          </a:p>
+        </p:txBody>
+      </p:sp>
+      <p:sp>
+        <p:nvSpPr>
+          <p:cNvPr id="5" name="TextBox 4"/>
+          <p:cNvSpPr txBox="1"/>
+          <p:nvPr/>
+        </p:nvSpPr>
+        <p:spPr>
+          <a:xfrm>
+            <a:off x="10728655" y="6446520"/>
+            <a:ext cx="914400" cy="274320"/>
+          </a:xfrm>
+          <a:prstGeom prst="rect">
+            <a:avLst/>
+          </a:prstGeom>
+          <a:noFill/>
+        </p:spPr>
+        <p:txBody>
+          <a:bodyPr wrap="square" anchor="t" lIns="0" rIns="0" tIns="0" bIns="0"/>
+          <a:lstStyle/>
+          <a:p>
+            <a:pPr algn="r"/>
+            <a:r>
+              <a:rPr sz="1000" b="0" i="0">
+                <a:solidFill>
+                  <a:srgbClr val="54595D"/>
+                </a:solidFill>
+                <a:latin typeface="Calibri"/>
+              </a:rPr>
+              <a:t>11</a:t>
+            </a:r>
+          </a:p>
+        </p:txBody>
+      </p:sp>
+      <p:sp>
+        <p:nvSpPr>
+          <p:cNvPr id="6" name="Oval 5"/>
+          <p:cNvSpPr/>
+          <p:nvPr/>
+        </p:nvSpPr>
+        <p:spPr>
+          <a:xfrm>
+            <a:off x="548640" y="1618488"/>
+            <a:ext cx="411480" cy="411480"/>
+          </a:xfrm>
+          <a:prstGeom prst="ellipse">
+            <a:avLst/>
+          </a:prstGeom>
+          <a:solidFill>
+            <a:srgbClr val="F2B705"/>
+          </a:solidFill>
+          <a:ln>
+            <a:noFill/>
+          </a:ln>
+          <a:effectLst/>
+        </p:spPr>
+        <p:style>
+          <a:lnRef idx="1">
+            <a:schemeClr val="accent1"/>
+          </a:lnRef>
+          <a:fillRef idx="3">
+            <a:schemeClr val="accent1"/>
+          </a:fillRef>
+          <a:effectRef idx="2">
+            <a:schemeClr val="accent1"/>
+          </a:effectRef>
+          <a:fontRef idx="minor">
+            <a:schemeClr val="lt1"/>
+          </a:fontRef>
+        </p:style>
+        <p:txBody>
+          <a:bodyPr rtlCol="0" anchor="ctr" lIns="0" rIns="0" tIns="0" bIns="0"/>
+          <a:lstStyle/>
+          <a:p>
+            <a:pPr algn="ctr"/>
+            <a:r>
+              <a:rPr sz="1400" b="1">
+                <a:solidFill>
+                  <a:srgbClr val="202122"/>
+                </a:solidFill>
+                <a:latin typeface="Calibri"/>
+              </a:rPr>
+              <a:t>1</a:t>
+            </a:r>
+          </a:p>
+        </p:txBody>
+      </p:sp>
+      <p:sp>
+        <p:nvSpPr>
+          <p:cNvPr id="7" name="TextBox 6"/>
+          <p:cNvSpPr txBox="1"/>
+          <p:nvPr/>
+        </p:nvSpPr>
+        <p:spPr>
+          <a:xfrm>
+            <a:off x="1234440" y="1600200"/>
+            <a:ext cx="10408615" cy="1030986"/>
+          </a:xfrm>
+          <a:prstGeom prst="rect">
+            <a:avLst/>
+          </a:prstGeom>
+          <a:noFill/>
+        </p:spPr>
+        <p:txBody>
+          <a:bodyPr wrap="square" anchor="t" lIns="0" rIns="0" tIns="0" bIns="0"/>
+          <a:lstStyle/>
+          <a:p>
+            <a:pPr algn="l"/>
+            <a:r>
+              <a:rPr sz="1800" b="0" i="0">
+                <a:solidFill>
+                  <a:srgbClr val="54595D"/>
+                </a:solidFill>
+                <a:latin typeface="Calibri"/>
+              </a:rPr>
+              <a:t>Which approach builds a solution from small working components?</a:t>
+            </a:r>
+          </a:p>
+          <a:p>
+            <a:r>
+              <a:rPr sz="1800" b="1">
+                <a:solidFill>
+                  <a:srgbClr val="03306E"/>
+                </a:solidFill>
+                <a:latin typeface="Calibri"/>
+              </a:rPr>
+              <a:t>Bottom-up.</a:t>
+            </a:r>
+          </a:p>
+        </p:txBody>
+      </p:sp>
+      <p:sp>
+        <p:nvSpPr>
+          <p:cNvPr id="8" name="Oval 7"/>
+          <p:cNvSpPr/>
+          <p:nvPr/>
+        </p:nvSpPr>
+        <p:spPr>
+          <a:xfrm>
+            <a:off x="548640" y="2814066"/>
+            <a:ext cx="411480" cy="411480"/>
+          </a:xfrm>
+          <a:prstGeom prst="ellipse">
+            <a:avLst/>
+          </a:prstGeom>
+          <a:solidFill>
+            <a:srgbClr val="F2B705"/>
+          </a:solidFill>
+          <a:ln>
+            <a:noFill/>
+          </a:ln>
+          <a:effectLst/>
+        </p:spPr>
+        <p:style>
+          <a:lnRef idx="1">
+            <a:schemeClr val="accent1"/>
+          </a:lnRef>
+          <a:fillRef idx="3">
+            <a:schemeClr val="accent1"/>
+          </a:fillRef>
+          <a:effectRef idx="2">
+            <a:schemeClr val="accent1"/>
+          </a:effectRef>
+          <a:fontRef idx="minor">
+            <a:schemeClr val="lt1"/>
+          </a:fontRef>
+        </p:style>
+        <p:txBody>
+          <a:bodyPr rtlCol="0" anchor="ctr" lIns="0" rIns="0" tIns="0" bIns="0"/>
+          <a:lstStyle/>
+          <a:p>
+            <a:pPr algn="ctr"/>
+            <a:r>
+              <a:rPr sz="1400" b="1">
+                <a:solidFill>
+                  <a:srgbClr val="202122"/>
+                </a:solidFill>
+                <a:latin typeface="Calibri"/>
+              </a:rPr>
+              <a:t>2</a:t>
+            </a:r>
+          </a:p>
+        </p:txBody>
+      </p:sp>
+      <p:sp>
+        <p:nvSpPr>
+          <p:cNvPr id="9" name="TextBox 8"/>
+          <p:cNvSpPr txBox="1"/>
+          <p:nvPr/>
+        </p:nvSpPr>
+        <p:spPr>
+          <a:xfrm>
+            <a:off x="1234440" y="2795778"/>
+            <a:ext cx="10408615" cy="1030986"/>
+          </a:xfrm>
+          <a:prstGeom prst="rect">
+            <a:avLst/>
+          </a:prstGeom>
+          <a:noFill/>
+        </p:spPr>
+        <p:txBody>
+          <a:bodyPr wrap="square" anchor="t" lIns="0" rIns="0" tIns="0" bIns="0"/>
+          <a:lstStyle/>
+          <a:p>
+            <a:pPr algn="l"/>
+            <a:r>
+              <a:rPr sz="1800" b="0" i="0">
+                <a:solidFill>
+                  <a:srgbClr val="54595D"/>
+                </a:solidFill>
+                <a:latin typeface="Calibri"/>
+              </a:rPr>
+              <a:t>What is the aim of the five whys?</a:t>
+            </a:r>
+          </a:p>
+          <a:p>
+            <a:r>
+              <a:rPr sz="1800" b="1">
+                <a:solidFill>
+                  <a:srgbClr val="03306E"/>
+                </a:solidFill>
+                <a:latin typeface="Calibri"/>
+              </a:rPr>
+              <a:t>To find the underlying root cause rather than the symptom.</a:t>
+            </a:r>
+          </a:p>
+        </p:txBody>
+      </p:sp>
+      <p:sp>
+        <p:nvSpPr>
+          <p:cNvPr id="10" name="Oval 9"/>
+          <p:cNvSpPr/>
+          <p:nvPr/>
+        </p:nvSpPr>
+        <p:spPr>
+          <a:xfrm>
+            <a:off x="548640" y="4009644"/>
+            <a:ext cx="411480" cy="411480"/>
+          </a:xfrm>
+          <a:prstGeom prst="ellipse">
+            <a:avLst/>
+          </a:prstGeom>
+          <a:solidFill>
+            <a:srgbClr val="F2B705"/>
+          </a:solidFill>
+          <a:ln>
+            <a:noFill/>
+          </a:ln>
+          <a:effectLst/>
+        </p:spPr>
+        <p:style>
+          <a:lnRef idx="1">
+            <a:schemeClr val="accent1"/>
+          </a:lnRef>
+          <a:fillRef idx="3">
+            <a:schemeClr val="accent1"/>
+          </a:fillRef>
+          <a:effectRef idx="2">
+            <a:schemeClr val="accent1"/>
+          </a:effectRef>
+          <a:fontRef idx="minor">
+            <a:schemeClr val="lt1"/>
+          </a:fontRef>
+        </p:style>
+        <p:txBody>
+          <a:bodyPr rtlCol="0" anchor="ctr" lIns="0" rIns="0" tIns="0" bIns="0"/>
+          <a:lstStyle/>
+          <a:p>
+            <a:pPr algn="ctr"/>
+            <a:r>
+              <a:rPr sz="1400" b="1">
+                <a:solidFill>
+                  <a:srgbClr val="202122"/>
+                </a:solidFill>
+                <a:latin typeface="Calibri"/>
+              </a:rPr>
+              <a:t>3</a:t>
+            </a:r>
+          </a:p>
+        </p:txBody>
+      </p:sp>
+      <p:sp>
+        <p:nvSpPr>
+          <p:cNvPr id="11" name="TextBox 10"/>
+          <p:cNvSpPr txBox="1"/>
+          <p:nvPr/>
+        </p:nvSpPr>
+        <p:spPr>
+          <a:xfrm>
+            <a:off x="1234440" y="3991356"/>
+            <a:ext cx="10408615" cy="1030986"/>
+          </a:xfrm>
+          <a:prstGeom prst="rect">
+            <a:avLst/>
+          </a:prstGeom>
+          <a:noFill/>
+        </p:spPr>
+        <p:txBody>
+          <a:bodyPr wrap="square" anchor="t" lIns="0" rIns="0" tIns="0" bIns="0"/>
+          <a:lstStyle/>
+          <a:p>
+            <a:pPr algn="l"/>
+            <a:r>
+              <a:rPr sz="1800" b="0" i="0">
+                <a:solidFill>
+                  <a:srgbClr val="54595D"/>
+                </a:solidFill>
+                <a:latin typeface="Calibri"/>
+              </a:rPr>
+              <a:t>What does FMEA stand for?</a:t>
+            </a:r>
+          </a:p>
+          <a:p>
+            <a:r>
+              <a:rPr sz="1800" b="1">
+                <a:solidFill>
+                  <a:srgbClr val="03306E"/>
+                </a:solidFill>
+                <a:latin typeface="Calibri"/>
+              </a:rPr>
+              <a:t>Failure Mode and Effects Analysis.</a:t>
+            </a:r>
+          </a:p>
+        </p:txBody>
+      </p:sp>
+      <p:sp>
+        <p:nvSpPr>
+          <p:cNvPr id="12" name="Oval 11"/>
+          <p:cNvSpPr/>
+          <p:nvPr/>
+        </p:nvSpPr>
+        <p:spPr>
+          <a:xfrm>
+            <a:off x="548640" y="5205221"/>
+            <a:ext cx="411480" cy="411480"/>
+          </a:xfrm>
+          <a:prstGeom prst="ellipse">
+            <a:avLst/>
+          </a:prstGeom>
+          <a:solidFill>
+            <a:srgbClr val="F2B705"/>
+          </a:solidFill>
+          <a:ln>
+            <a:noFill/>
+          </a:ln>
+          <a:effectLst/>
+        </p:spPr>
+        <p:style>
+          <a:lnRef idx="1">
+            <a:schemeClr val="accent1"/>
+          </a:lnRef>
+          <a:fillRef idx="3">
+            <a:schemeClr val="accent1"/>
+          </a:fillRef>
+          <a:effectRef idx="2">
+            <a:schemeClr val="accent1"/>
+          </a:effectRef>
+          <a:fontRef idx="minor">
+            <a:schemeClr val="lt1"/>
+          </a:fontRef>
+        </p:style>
+        <p:txBody>
+          <a:bodyPr rtlCol="0" anchor="ctr" lIns="0" rIns="0" tIns="0" bIns="0"/>
+          <a:lstStyle/>
+          <a:p>
+            <a:pPr algn="ctr"/>
+            <a:r>
+              <a:rPr sz="1400" b="1">
+                <a:solidFill>
+                  <a:srgbClr val="202122"/>
+                </a:solidFill>
+                <a:latin typeface="Calibri"/>
+              </a:rPr>
+              <a:t>4</a:t>
+            </a:r>
+          </a:p>
+        </p:txBody>
+      </p:sp>
+      <p:sp>
+        <p:nvSpPr>
+          <p:cNvPr id="13" name="TextBox 12"/>
+          <p:cNvSpPr txBox="1"/>
+          <p:nvPr/>
+        </p:nvSpPr>
+        <p:spPr>
+          <a:xfrm>
+            <a:off x="1234440" y="5186933"/>
+            <a:ext cx="10408615" cy="1030986"/>
+          </a:xfrm>
+          <a:prstGeom prst="rect">
+            <a:avLst/>
+          </a:prstGeom>
+          <a:noFill/>
+        </p:spPr>
+        <p:txBody>
+          <a:bodyPr wrap="square" anchor="t" lIns="0" rIns="0" tIns="0" bIns="0"/>
+          <a:lstStyle/>
+          <a:p>
+            <a:pPr algn="l"/>
+            <a:r>
+              <a:rPr sz="1800" b="0" i="0">
+                <a:solidFill>
+                  <a:srgbClr val="54595D"/>
+                </a:solidFill>
+                <a:latin typeface="Calibri"/>
+              </a:rPr>
+              <a:t>What is the last step of the problem-solving strategy?</a:t>
+            </a:r>
+          </a:p>
+          <a:p>
+            <a:r>
+              <a:rPr sz="1800" b="1">
+                <a:solidFill>
+                  <a:srgbClr val="03306E"/>
+                </a:solidFill>
+                <a:latin typeface="Calibri"/>
+              </a:rPr>
+              <a:t>Review the solution.</a:t>
+            </a:r>
+          </a:p>
+        </p:txBody>
+      </p:sp>
+    </p:spTree>
+  </p:cSld>
+  <p:clrMapOvr>
+    <a:masterClrMapping/>
+  </p:clrMapOvr>
+</p:sld>
+</file>
+
+<file path=ppt/slides/slide12.xml><?xml version="1.0" encoding="utf-8"?>
+<p:sld xmlns:a="http://schemas.openxmlformats.org/drawingml/2006/main" xmlns:p="http://schemas.openxmlformats.org/presentationml/2006/main" xmlns:r="http://schemas.openxmlformats.org/officeDocument/2006/relationships">
+  <p:cSld>
+    <p:bg>
+      <p:bgPr>
+        <a:solidFill>
+          <a:srgbClr val="FFFFFF"/>
+        </a:solidFill>
+        <a:effectLst/>
+      </p:bgPr>
+    </p:bg>
+    <p:spTree>
+      <p:nvGrpSpPr>
+        <p:cNvPr id="1" name=""/>
+        <p:cNvGrpSpPr/>
+        <p:nvPr/>
+      </p:nvGrpSpPr>
+      <p:grpSpPr/>
+      <p:sp>
+        <p:nvSpPr>
+          <p:cNvPr id="2" name="TextBox 1"/>
+          <p:cNvSpPr txBox="1"/>
+          <p:nvPr/>
+        </p:nvSpPr>
+        <p:spPr>
+          <a:xfrm>
+            <a:off x="548640" y="320040"/>
+            <a:ext cx="11094415" cy="274320"/>
+          </a:xfrm>
+          <a:prstGeom prst="rect">
+            <a:avLst/>
+          </a:prstGeom>
+          <a:noFill/>
+        </p:spPr>
+        <p:txBody>
+          <a:bodyPr wrap="square" anchor="t" lIns="0" rIns="0" tIns="0" bIns="0"/>
+          <a:lstStyle/>
+          <a:p>
+            <a:pPr algn="l"/>
+            <a:r>
+              <a:rPr sz="1100" b="1" i="0">
+                <a:solidFill>
+                  <a:srgbClr val="54595D"/>
+                </a:solidFill>
+                <a:latin typeface="Calibri"/>
+              </a:rPr>
+              <a:t>CORE COMPONENT  ·  Core Paper 1</a:t>
+            </a:r>
+          </a:p>
+        </p:txBody>
+      </p:sp>
+      <p:sp>
+        <p:nvSpPr>
+          <p:cNvPr id="3" name="TextBox 2"/>
+          <p:cNvSpPr txBox="1"/>
+          <p:nvPr/>
+        </p:nvSpPr>
+        <p:spPr>
+          <a:xfrm>
+            <a:off x="548640" y="566928"/>
+            <a:ext cx="11094415" cy="822960"/>
+          </a:xfrm>
+          <a:prstGeom prst="rect">
+            <a:avLst/>
+          </a:prstGeom>
+          <a:noFill/>
+        </p:spPr>
+        <p:txBody>
+          <a:bodyPr wrap="square" anchor="ctr" lIns="0" rIns="0" tIns="0" bIns="0"/>
+          <a:lstStyle/>
+          <a:p>
+            <a:pPr algn="l"/>
+            <a:r>
+              <a:rPr sz="3200" b="1" i="0">
+                <a:solidFill>
+                  <a:srgbClr val="03306E"/>
+                </a:solidFill>
+                <a:latin typeface="Cambria"/>
+              </a:rPr>
+              <a:t>Activity: Root cause a bug</a:t>
+            </a:r>
+          </a:p>
+        </p:txBody>
+      </p:sp>
+      <p:sp>
+        <p:nvSpPr>
+          <p:cNvPr id="4" name="TextBox 3"/>
+          <p:cNvSpPr txBox="1"/>
+          <p:nvPr/>
+        </p:nvSpPr>
+        <p:spPr>
+          <a:xfrm>
+            <a:off x="548640" y="6446520"/>
+            <a:ext cx="8229600" cy="274320"/>
+          </a:xfrm>
+          <a:prstGeom prst="rect">
+            <a:avLst/>
+          </a:prstGeom>
+          <a:noFill/>
+        </p:spPr>
+        <p:txBody>
+          <a:bodyPr wrap="square" anchor="t" lIns="0" rIns="0" tIns="0" bIns="0"/>
+          <a:lstStyle/>
+          <a:p>
+            <a:pPr algn="l"/>
+            <a:r>
+              <a:rPr sz="1000" b="0" i="0">
+                <a:solidFill>
+                  <a:srgbClr val="54595D"/>
+                </a:solidFill>
+                <a:latin typeface="Calibri"/>
+              </a:rPr>
+              <a:t>Digital Software Development T Level  ·  Problem-Solving Strategies</a:t>
+            </a:r>
+          </a:p>
+        </p:txBody>
+      </p:sp>
+      <p:sp>
+        <p:nvSpPr>
+          <p:cNvPr id="5" name="TextBox 4"/>
+          <p:cNvSpPr txBox="1"/>
+          <p:nvPr/>
+        </p:nvSpPr>
+        <p:spPr>
+          <a:xfrm>
+            <a:off x="10728655" y="6446520"/>
+            <a:ext cx="914400" cy="274320"/>
+          </a:xfrm>
+          <a:prstGeom prst="rect">
+            <a:avLst/>
+          </a:prstGeom>
+          <a:noFill/>
+        </p:spPr>
+        <p:txBody>
+          <a:bodyPr wrap="square" anchor="t" lIns="0" rIns="0" tIns="0" bIns="0"/>
+          <a:lstStyle/>
+          <a:p>
+            <a:pPr algn="r"/>
+            <a:r>
+              <a:rPr sz="1000" b="0" i="0">
+                <a:solidFill>
+                  <a:srgbClr val="54595D"/>
+                </a:solidFill>
+                <a:latin typeface="Calibri"/>
+              </a:rPr>
+              <a:t>12</a:t>
+            </a:r>
+          </a:p>
+        </p:txBody>
+      </p:sp>
+      <p:sp>
+        <p:nvSpPr>
+          <p:cNvPr id="6" name="Rounded Rectangle 5"/>
+          <p:cNvSpPr/>
+          <p:nvPr/>
+        </p:nvSpPr>
+        <p:spPr>
+          <a:xfrm>
+            <a:off x="548640" y="1508760"/>
+            <a:ext cx="2011680" cy="457200"/>
+          </a:xfrm>
+          <a:prstGeom prst="roundRect">
+            <a:avLst>
+              <a:gd name="adj" fmla="val 50000"/>
+            </a:avLst>
+          </a:prstGeom>
+          <a:solidFill>
+            <a:srgbClr val="F2B705"/>
+          </a:solidFill>
+          <a:ln>
+            <a:noFill/>
+          </a:ln>
+          <a:effectLst/>
+        </p:spPr>
+        <p:style>
+          <a:lnRef idx="1">
+            <a:schemeClr val="accent1"/>
+          </a:lnRef>
+          <a:fillRef idx="3">
+            <a:schemeClr val="accent1"/>
+          </a:fillRef>
+          <a:effectRef idx="2">
+            <a:schemeClr val="accent1"/>
+          </a:effectRef>
+          <a:fontRef idx="minor">
+            <a:schemeClr val="lt1"/>
+          </a:fontRef>
+        </p:style>
+        <p:txBody>
+          <a:bodyPr rtlCol="0" anchor="ctr"/>
+          <a:lstStyle/>
+          <a:p/>
+        </p:txBody>
+      </p:sp>
+      <p:sp>
+        <p:nvSpPr>
+          <p:cNvPr id="7" name="TextBox 6"/>
+          <p:cNvSpPr txBox="1"/>
+          <p:nvPr/>
+        </p:nvSpPr>
+        <p:spPr>
+          <a:xfrm>
+            <a:off x="548640" y="1508760"/>
+            <a:ext cx="2011680" cy="457200"/>
+          </a:xfrm>
+          <a:prstGeom prst="rect">
+            <a:avLst/>
+          </a:prstGeom>
+          <a:noFill/>
+        </p:spPr>
+        <p:txBody>
+          <a:bodyPr wrap="square" anchor="ctr" lIns="0" rIns="0" tIns="0" bIns="0"/>
+          <a:lstStyle/>
+          <a:p>
+            <a:pPr algn="ctr"/>
+            <a:r>
+              <a:rPr sz="1400" b="1" i="0">
+                <a:solidFill>
+                  <a:srgbClr val="202122"/>
+                </a:solidFill>
+                <a:latin typeface="Calibri"/>
+              </a:rPr>
+              <a:t>20 minutes</a:t>
+            </a:r>
+          </a:p>
+        </p:txBody>
+      </p:sp>
+      <p:sp>
+        <p:nvSpPr>
+          <p:cNvPr id="8" name="TextBox 7"/>
+          <p:cNvSpPr txBox="1"/>
+          <p:nvPr/>
+        </p:nvSpPr>
+        <p:spPr>
+          <a:xfrm>
+            <a:off x="2743200" y="1508760"/>
+            <a:ext cx="4754880" cy="457200"/>
+          </a:xfrm>
+          <a:prstGeom prst="rect">
+            <a:avLst/>
+          </a:prstGeom>
+          <a:noFill/>
+        </p:spPr>
+        <p:txBody>
+          <a:bodyPr wrap="square" anchor="ctr" lIns="0" rIns="0" tIns="0" bIns="0"/>
+          <a:lstStyle/>
+          <a:p>
+            <a:pPr algn="l"/>
+            <a:r>
+              <a:rPr sz="1400" b="0" i="1">
+                <a:solidFill>
+                  <a:srgbClr val="54595D"/>
+                </a:solidFill>
+                <a:latin typeface="Calibri"/>
+              </a:rPr>
+              <a:t>Small groups</a:t>
+            </a:r>
+          </a:p>
+        </p:txBody>
+      </p:sp>
+      <p:sp>
+        <p:nvSpPr>
+          <p:cNvPr id="9" name="Oval 8"/>
+          <p:cNvSpPr/>
+          <p:nvPr/>
+        </p:nvSpPr>
+        <p:spPr>
+          <a:xfrm>
+            <a:off x="548640" y="2482596"/>
+            <a:ext cx="384048" cy="384048"/>
+          </a:xfrm>
+          <a:prstGeom prst="ellipse">
+            <a:avLst/>
+          </a:prstGeom>
+          <a:solidFill>
+            <a:srgbClr val="0645AD"/>
+          </a:solidFill>
+          <a:ln>
+            <a:noFill/>
+          </a:ln>
+          <a:effectLst/>
+        </p:spPr>
+        <p:style>
+          <a:lnRef idx="1">
+            <a:schemeClr val="accent1"/>
+          </a:lnRef>
+          <a:fillRef idx="3">
+            <a:schemeClr val="accent1"/>
+          </a:fillRef>
+          <a:effectRef idx="2">
+            <a:schemeClr val="accent1"/>
+          </a:effectRef>
+          <a:fontRef idx="minor">
+            <a:schemeClr val="lt1"/>
+          </a:fontRef>
+        </p:style>
+        <p:txBody>
+          <a:bodyPr rtlCol="0" anchor="ctr" lIns="0" rIns="0" tIns="0" bIns="0"/>
+          <a:lstStyle/>
+          <a:p>
+            <a:pPr algn="ctr"/>
+            <a:r>
+              <a:rPr sz="1300" b="1">
+                <a:solidFill>
+                  <a:srgbClr val="FFFFFF"/>
+                </a:solidFill>
+                <a:latin typeface="Calibri"/>
+              </a:rPr>
+              <a:t>1</a:t>
+            </a:r>
+          </a:p>
+        </p:txBody>
+      </p:sp>
+      <p:sp>
+        <p:nvSpPr>
+          <p:cNvPr id="10" name="TextBox 9"/>
+          <p:cNvSpPr txBox="1"/>
+          <p:nvPr/>
+        </p:nvSpPr>
+        <p:spPr>
+          <a:xfrm>
+            <a:off x="1143000" y="2240280"/>
+            <a:ext cx="5943600" cy="868680"/>
+          </a:xfrm>
+          <a:prstGeom prst="rect">
+            <a:avLst/>
+          </a:prstGeom>
+          <a:noFill/>
+        </p:spPr>
+        <p:txBody>
+          <a:bodyPr wrap="square" anchor="ctr" lIns="0" rIns="0" tIns="0" bIns="0"/>
+          <a:lstStyle/>
+          <a:p>
+            <a:pPr algn="l"/>
+            <a:r>
+              <a:rPr sz="1700" b="0" i="0">
+                <a:solidFill>
+                  <a:srgbClr val="202122"/>
+                </a:solidFill>
+                <a:latin typeface="Calibri"/>
+              </a:rPr>
+              <a:t>Scenario: an online shop charges some customers twice.</a:t>
+            </a:r>
+          </a:p>
+        </p:txBody>
+      </p:sp>
+      <p:sp>
+        <p:nvSpPr>
+          <p:cNvPr id="11" name="Oval 10"/>
+          <p:cNvSpPr/>
+          <p:nvPr/>
+        </p:nvSpPr>
+        <p:spPr>
+          <a:xfrm>
+            <a:off x="548640" y="3461004"/>
+            <a:ext cx="384048" cy="384048"/>
+          </a:xfrm>
+          <a:prstGeom prst="ellipse">
+            <a:avLst/>
+          </a:prstGeom>
+          <a:solidFill>
+            <a:srgbClr val="0645AD"/>
+          </a:solidFill>
+          <a:ln>
+            <a:noFill/>
+          </a:ln>
+          <a:effectLst/>
+        </p:spPr>
+        <p:style>
+          <a:lnRef idx="1">
+            <a:schemeClr val="accent1"/>
+          </a:lnRef>
+          <a:fillRef idx="3">
+            <a:schemeClr val="accent1"/>
+          </a:fillRef>
+          <a:effectRef idx="2">
+            <a:schemeClr val="accent1"/>
+          </a:effectRef>
+          <a:fontRef idx="minor">
+            <a:schemeClr val="lt1"/>
+          </a:fontRef>
+        </p:style>
+        <p:txBody>
+          <a:bodyPr rtlCol="0" anchor="ctr" lIns="0" rIns="0" tIns="0" bIns="0"/>
+          <a:lstStyle/>
+          <a:p>
+            <a:pPr algn="ctr"/>
+            <a:r>
+              <a:rPr sz="1300" b="1">
+                <a:solidFill>
+                  <a:srgbClr val="FFFFFF"/>
+                </a:solidFill>
+                <a:latin typeface="Calibri"/>
+              </a:rPr>
+              <a:t>2</a:t>
+            </a:r>
+          </a:p>
+        </p:txBody>
+      </p:sp>
+      <p:sp>
+        <p:nvSpPr>
+          <p:cNvPr id="12" name="TextBox 11"/>
+          <p:cNvSpPr txBox="1"/>
+          <p:nvPr/>
+        </p:nvSpPr>
+        <p:spPr>
+          <a:xfrm>
+            <a:off x="1143000" y="3218688"/>
+            <a:ext cx="5943600" cy="868680"/>
+          </a:xfrm>
+          <a:prstGeom prst="rect">
+            <a:avLst/>
+          </a:prstGeom>
+          <a:noFill/>
+        </p:spPr>
+        <p:txBody>
+          <a:bodyPr wrap="square" anchor="ctr" lIns="0" rIns="0" tIns="0" bIns="0"/>
+          <a:lstStyle/>
+          <a:p>
+            <a:pPr algn="l"/>
+            <a:r>
+              <a:rPr sz="1700" b="0" i="0">
+                <a:solidFill>
+                  <a:srgbClr val="202122"/>
+                </a:solidFill>
+                <a:latin typeface="Calibri"/>
+              </a:rPr>
+              <a:t>Use the five whys to reach a believable root cause.</a:t>
+            </a:r>
+          </a:p>
+        </p:txBody>
+      </p:sp>
+      <p:sp>
+        <p:nvSpPr>
+          <p:cNvPr id="13" name="Oval 12"/>
+          <p:cNvSpPr/>
+          <p:nvPr/>
+        </p:nvSpPr>
+        <p:spPr>
+          <a:xfrm>
+            <a:off x="548640" y="4439412"/>
+            <a:ext cx="384048" cy="384048"/>
+          </a:xfrm>
+          <a:prstGeom prst="ellipse">
+            <a:avLst/>
+          </a:prstGeom>
+          <a:solidFill>
+            <a:srgbClr val="0645AD"/>
+          </a:solidFill>
+          <a:ln>
+            <a:noFill/>
+          </a:ln>
+          <a:effectLst/>
+        </p:spPr>
+        <p:style>
+          <a:lnRef idx="1">
+            <a:schemeClr val="accent1"/>
+          </a:lnRef>
+          <a:fillRef idx="3">
+            <a:schemeClr val="accent1"/>
+          </a:fillRef>
+          <a:effectRef idx="2">
+            <a:schemeClr val="accent1"/>
+          </a:effectRef>
+          <a:fontRef idx="minor">
+            <a:schemeClr val="lt1"/>
+          </a:fontRef>
+        </p:style>
+        <p:txBody>
+          <a:bodyPr rtlCol="0" anchor="ctr" lIns="0" rIns="0" tIns="0" bIns="0"/>
+          <a:lstStyle/>
+          <a:p>
+            <a:pPr algn="ctr"/>
+            <a:r>
+              <a:rPr sz="1300" b="1">
+                <a:solidFill>
+                  <a:srgbClr val="FFFFFF"/>
+                </a:solidFill>
+                <a:latin typeface="Calibri"/>
+              </a:rPr>
+              <a:t>3</a:t>
+            </a:r>
+          </a:p>
+        </p:txBody>
+      </p:sp>
+      <p:sp>
+        <p:nvSpPr>
+          <p:cNvPr id="14" name="TextBox 13"/>
+          <p:cNvSpPr txBox="1"/>
+          <p:nvPr/>
+        </p:nvSpPr>
+        <p:spPr>
+          <a:xfrm>
+            <a:off x="1143000" y="4197096"/>
+            <a:ext cx="5943600" cy="868680"/>
+          </a:xfrm>
+          <a:prstGeom prst="rect">
+            <a:avLst/>
+          </a:prstGeom>
+          <a:noFill/>
+        </p:spPr>
+        <p:txBody>
+          <a:bodyPr wrap="square" anchor="ctr" lIns="0" rIns="0" tIns="0" bIns="0"/>
+          <a:lstStyle/>
+          <a:p>
+            <a:pPr algn="l"/>
+            <a:r>
+              <a:rPr sz="1700" b="0" i="0">
+                <a:solidFill>
+                  <a:srgbClr val="202122"/>
+                </a:solidFill>
+                <a:latin typeface="Calibri"/>
+              </a:rPr>
+              <a:t>Decide whether to log, close or escalate it.</a:t>
+            </a:r>
+          </a:p>
+        </p:txBody>
+      </p:sp>
+      <p:sp>
+        <p:nvSpPr>
+          <p:cNvPr id="15" name="Oval 14"/>
+          <p:cNvSpPr/>
+          <p:nvPr/>
+        </p:nvSpPr>
+        <p:spPr>
+          <a:xfrm>
+            <a:off x="548640" y="5417820"/>
+            <a:ext cx="384048" cy="384048"/>
+          </a:xfrm>
+          <a:prstGeom prst="ellipse">
+            <a:avLst/>
+          </a:prstGeom>
+          <a:solidFill>
+            <a:srgbClr val="0645AD"/>
+          </a:solidFill>
+          <a:ln>
+            <a:noFill/>
+          </a:ln>
+          <a:effectLst/>
+        </p:spPr>
+        <p:style>
+          <a:lnRef idx="1">
+            <a:schemeClr val="accent1"/>
+          </a:lnRef>
+          <a:fillRef idx="3">
+            <a:schemeClr val="accent1"/>
+          </a:fillRef>
+          <a:effectRef idx="2">
+            <a:schemeClr val="accent1"/>
+          </a:effectRef>
+          <a:fontRef idx="minor">
+            <a:schemeClr val="lt1"/>
+          </a:fontRef>
+        </p:style>
+        <p:txBody>
+          <a:bodyPr rtlCol="0" anchor="ctr" lIns="0" rIns="0" tIns="0" bIns="0"/>
+          <a:lstStyle/>
+          <a:p>
+            <a:pPr algn="ctr"/>
+            <a:r>
+              <a:rPr sz="1300" b="1">
+                <a:solidFill>
+                  <a:srgbClr val="FFFFFF"/>
+                </a:solidFill>
+                <a:latin typeface="Calibri"/>
+              </a:rPr>
+              <a:t>4</a:t>
+            </a:r>
+          </a:p>
+        </p:txBody>
+      </p:sp>
+      <p:sp>
+        <p:nvSpPr>
+          <p:cNvPr id="16" name="TextBox 15"/>
+          <p:cNvSpPr txBox="1"/>
+          <p:nvPr/>
+        </p:nvSpPr>
+        <p:spPr>
+          <a:xfrm>
+            <a:off x="1143000" y="5175504"/>
+            <a:ext cx="5943600" cy="868680"/>
+          </a:xfrm>
+          <a:prstGeom prst="rect">
+            <a:avLst/>
+          </a:prstGeom>
+          <a:noFill/>
+        </p:spPr>
+        <p:txBody>
+          <a:bodyPr wrap="square" anchor="ctr" lIns="0" rIns="0" tIns="0" bIns="0"/>
+          <a:lstStyle/>
+          <a:p>
+            <a:pPr algn="l"/>
+            <a:r>
+              <a:rPr sz="1700" b="0" i="0">
+                <a:solidFill>
+                  <a:srgbClr val="202122"/>
+                </a:solidFill>
+                <a:latin typeface="Calibri"/>
+              </a:rPr>
+              <a:t>Plan the fix using the six-step strategy.</a:t>
+            </a:r>
+          </a:p>
+        </p:txBody>
+      </p:sp>
+      <p:sp>
+        <p:nvSpPr>
+          <p:cNvPr id="17" name="Rounded Rectangle 16"/>
+          <p:cNvSpPr/>
+          <p:nvPr/>
+        </p:nvSpPr>
+        <p:spPr>
+          <a:xfrm>
+            <a:off x="7772400" y="1508760"/>
+            <a:ext cx="3867912" cy="4572000"/>
+          </a:xfrm>
+          <a:prstGeom prst="roundRect">
+            <a:avLst>
+              <a:gd name="adj" fmla="val 8000"/>
+            </a:avLst>
+          </a:prstGeom>
+          <a:solidFill>
+            <a:srgbClr val="EAF3FF"/>
+          </a:solidFill>
+          <a:ln>
+            <a:noFill/>
+          </a:ln>
+          <a:effectLst/>
+        </p:spPr>
+        <p:style>
+          <a:lnRef idx="1">
+            <a:schemeClr val="accent1"/>
+          </a:lnRef>
+          <a:fillRef idx="3">
+            <a:schemeClr val="accent1"/>
+          </a:fillRef>
+          <a:effectRef idx="2">
+            <a:schemeClr val="accent1"/>
+          </a:effectRef>
+          <a:fontRef idx="minor">
+            <a:schemeClr val="lt1"/>
+          </a:fontRef>
+        </p:style>
+        <p:txBody>
+          <a:bodyPr rtlCol="0" anchor="ctr"/>
+          <a:lstStyle/>
+          <a:p/>
+        </p:txBody>
+      </p:sp>
+      <p:sp>
+        <p:nvSpPr>
+          <p:cNvPr id="18" name="TextBox 17"/>
+          <p:cNvSpPr txBox="1"/>
+          <p:nvPr/>
+        </p:nvSpPr>
+        <p:spPr>
+          <a:xfrm>
+            <a:off x="8046720" y="1737360"/>
+            <a:ext cx="3291840" cy="365760"/>
+          </a:xfrm>
+          <a:prstGeom prst="rect">
+            <a:avLst/>
+          </a:prstGeom>
+          <a:noFill/>
+        </p:spPr>
+        <p:txBody>
+          <a:bodyPr wrap="square" anchor="t" lIns="0" rIns="0" tIns="0" bIns="0"/>
+          <a:lstStyle/>
+          <a:p>
+            <a:pPr algn="l"/>
+            <a:r>
+              <a:rPr sz="1300" b="1" i="0">
+                <a:solidFill>
+                  <a:srgbClr val="0645AD"/>
+                </a:solidFill>
+                <a:latin typeface="Calibri"/>
+              </a:rPr>
+              <a:t>SUCCESS CRITERIA</a:t>
+            </a:r>
+          </a:p>
+        </p:txBody>
+      </p:sp>
+      <p:sp>
+        <p:nvSpPr>
+          <p:cNvPr id="19" name="TextBox 18"/>
+          <p:cNvSpPr txBox="1"/>
+          <p:nvPr/>
+        </p:nvSpPr>
+        <p:spPr>
+          <a:xfrm>
+            <a:off x="8046720" y="2240280"/>
+            <a:ext cx="3337560" cy="3657600"/>
+          </a:xfrm>
+          <a:prstGeom prst="rect">
+            <a:avLst/>
+          </a:prstGeom>
+          <a:noFill/>
+        </p:spPr>
+        <p:txBody>
+          <a:bodyPr wrap="square" lIns="0" rIns="0" tIns="0" bIns="0">
+            <a:spAutoFit/>
+          </a:bodyPr>
+          <a:lstStyle/>
+          <a:p>
+            <a:pPr marL="274320" indent="-274320">
+              <a:spcAft>
+                <a:spcPts val="810"/>
+              </a:spcAft>
+              <a:buClr>
+                <a:srgbClr val="0645AD"/>
+              </a:buClr>
+              <a:buFont typeface="Arial"/>
+              <a:buChar char="•"/>
+            </a:pPr>
+            <a:r>
+              <a:rPr sz="1800" b="0">
+                <a:solidFill>
+                  <a:srgbClr val="202122"/>
+                </a:solidFill>
+                <a:latin typeface="Calibri"/>
+              </a:rPr>
+              <a:t>Each 'why' follows from the last</a:t>
+            </a:r>
+          </a:p>
+          <a:p>
+            <a:pPr marL="274320" indent="-274320">
+              <a:spcAft>
+                <a:spcPts val="810"/>
+              </a:spcAft>
+              <a:buClr>
+                <a:srgbClr val="0645AD"/>
+              </a:buClr>
+              <a:buFont typeface="Arial"/>
+              <a:buChar char="•"/>
+            </a:pPr>
+            <a:r>
+              <a:rPr sz="1800" b="0">
+                <a:solidFill>
+                  <a:srgbClr val="202122"/>
+                </a:solidFill>
+                <a:latin typeface="Calibri"/>
+              </a:rPr>
+              <a:t>Root cause is a cause, not a symptom</a:t>
+            </a:r>
+          </a:p>
+          <a:p>
+            <a:pPr marL="274320" indent="-274320">
+              <a:spcAft>
+                <a:spcPts val="810"/>
+              </a:spcAft>
+              <a:buClr>
+                <a:srgbClr val="0645AD"/>
+              </a:buClr>
+              <a:buFont typeface="Arial"/>
+              <a:buChar char="•"/>
+            </a:pPr>
+            <a:r>
+              <a:rPr sz="1800" b="0">
+                <a:solidFill>
+                  <a:srgbClr val="202122"/>
+                </a:solidFill>
+                <a:latin typeface="Calibri"/>
+              </a:rPr>
+              <a:t>Plan covers testing and review</a:t>
+            </a:r>
+          </a:p>
+        </p:txBody>
+      </p:sp>
+    </p:spTree>
+  </p:cSld>
+  <p:clrMapOvr>
+    <a:masterClrMapping/>
+  </p:clrMapOvr>
+</p:sld>
+</file>
+
+<file path=ppt/slides/slide13.xml><?xml version="1.0" encoding="utf-8"?>
+<p:sld xmlns:a="http://schemas.openxmlformats.org/drawingml/2006/main" xmlns:p="http://schemas.openxmlformats.org/presentationml/2006/main" xmlns:r="http://schemas.openxmlformats.org/officeDocument/2006/relationships">
+  <p:cSld>
+    <p:bg>
+      <p:bgPr>
+        <a:solidFill>
+          <a:srgbClr val="03306E"/>
+        </a:solidFill>
+        <a:effectLst/>
+      </p:bgPr>
+    </p:bg>
+    <p:spTree>
+      <p:nvGrpSpPr>
+        <p:cNvPr id="1" name=""/>
+        <p:cNvGrpSpPr/>
+        <p:nvPr/>
+      </p:nvGrpSpPr>
+      <p:grpSpPr/>
+      <p:sp>
+        <p:nvSpPr>
+          <p:cNvPr id="2" name="TextBox 1"/>
+          <p:cNvSpPr txBox="1"/>
+          <p:nvPr/>
+        </p:nvSpPr>
+        <p:spPr>
+          <a:xfrm>
+            <a:off x="548640" y="320040"/>
+            <a:ext cx="11094415" cy="274320"/>
+          </a:xfrm>
+          <a:prstGeom prst="rect">
+            <a:avLst/>
+          </a:prstGeom>
+          <a:noFill/>
+        </p:spPr>
+        <p:txBody>
+          <a:bodyPr wrap="square" anchor="t" lIns="0" rIns="0" tIns="0" bIns="0"/>
+          <a:lstStyle/>
+          <a:p>
+            <a:pPr algn="l"/>
+            <a:r>
+              <a:rPr sz="1100" b="1" i="0">
+                <a:solidFill>
+                  <a:srgbClr val="A9C8F0"/>
+                </a:solidFill>
+                <a:latin typeface="Calibri"/>
+              </a:rPr>
+              <a:t>CORE COMPONENT  ·  Core Paper 1</a:t>
+            </a:r>
+          </a:p>
+        </p:txBody>
+      </p:sp>
+      <p:sp>
+        <p:nvSpPr>
+          <p:cNvPr id="3" name="TextBox 2"/>
+          <p:cNvSpPr txBox="1"/>
+          <p:nvPr/>
+        </p:nvSpPr>
+        <p:spPr>
+          <a:xfrm>
+            <a:off x="548640" y="566928"/>
+            <a:ext cx="11094415" cy="822960"/>
+          </a:xfrm>
+          <a:prstGeom prst="rect">
+            <a:avLst/>
+          </a:prstGeom>
+          <a:noFill/>
+        </p:spPr>
+        <p:txBody>
+          <a:bodyPr wrap="square" anchor="ctr" lIns="0" rIns="0" tIns="0" bIns="0"/>
+          <a:lstStyle/>
+          <a:p>
+            <a:pPr algn="l"/>
+            <a:r>
+              <a:rPr sz="3200" b="1" i="0">
+                <a:solidFill>
+                  <a:srgbClr val="FFFFFF"/>
+                </a:solidFill>
+                <a:latin typeface="Cambria"/>
+              </a:rPr>
+              <a:t>Exit ticket</a:t>
+            </a:r>
+          </a:p>
+        </p:txBody>
+      </p:sp>
+      <p:sp>
+        <p:nvSpPr>
+          <p:cNvPr id="4" name="Oval 3"/>
+          <p:cNvSpPr/>
+          <p:nvPr/>
+        </p:nvSpPr>
+        <p:spPr>
+          <a:xfrm>
+            <a:off x="548640" y="1737360"/>
+            <a:ext cx="502920" cy="502920"/>
+          </a:xfrm>
+          <a:prstGeom prst="ellipse">
+            <a:avLst/>
+          </a:prstGeom>
+          <a:solidFill>
+            <a:srgbClr val="F2B705"/>
+          </a:solidFill>
+          <a:ln>
+            <a:noFill/>
+          </a:ln>
+          <a:effectLst/>
+        </p:spPr>
+        <p:style>
+          <a:lnRef idx="1">
+            <a:schemeClr val="accent1"/>
+          </a:lnRef>
+          <a:fillRef idx="3">
+            <a:schemeClr val="accent1"/>
+          </a:fillRef>
+          <a:effectRef idx="2">
+            <a:schemeClr val="accent1"/>
+          </a:effectRef>
+          <a:fontRef idx="minor">
+            <a:schemeClr val="lt1"/>
+          </a:fontRef>
+        </p:style>
+        <p:txBody>
+          <a:bodyPr rtlCol="0" anchor="ctr" lIns="0" rIns="0" tIns="0" bIns="0"/>
+          <a:lstStyle/>
+          <a:p>
+            <a:pPr algn="ctr"/>
+            <a:r>
+              <a:rPr sz="1700" b="1">
+                <a:solidFill>
+                  <a:srgbClr val="202122"/>
+                </a:solidFill>
+                <a:latin typeface="Calibri"/>
+              </a:rPr>
+              <a:t>1</a:t>
+            </a:r>
+          </a:p>
+        </p:txBody>
+      </p:sp>
+      <p:sp>
+        <p:nvSpPr>
+          <p:cNvPr id="5" name="TextBox 4"/>
+          <p:cNvSpPr txBox="1"/>
+          <p:nvPr/>
+        </p:nvSpPr>
+        <p:spPr>
+          <a:xfrm>
+            <a:off x="1325880" y="1645920"/>
+            <a:ext cx="6583680" cy="822960"/>
+          </a:xfrm>
+          <a:prstGeom prst="rect">
+            <a:avLst/>
+          </a:prstGeom>
+          <a:noFill/>
+        </p:spPr>
+        <p:txBody>
+          <a:bodyPr wrap="square" anchor="ctr" lIns="0" rIns="0" tIns="0" bIns="0"/>
+          <a:lstStyle/>
+          <a:p>
+            <a:pPr algn="l"/>
+            <a:r>
+              <a:rPr sz="2000" b="0" i="0">
+                <a:solidFill>
+                  <a:srgbClr val="FFFFFF"/>
+                </a:solidFill>
+                <a:latin typeface="Calibri"/>
+              </a:rPr>
+              <a:t>When would you choose bottom-up over top-down?</a:t>
+            </a:r>
+          </a:p>
+        </p:txBody>
+      </p:sp>
+      <p:sp>
+        <p:nvSpPr>
+          <p:cNvPr id="6" name="Oval 5"/>
+          <p:cNvSpPr/>
+          <p:nvPr/>
+        </p:nvSpPr>
+        <p:spPr>
+          <a:xfrm>
+            <a:off x="548640" y="2697480"/>
+            <a:ext cx="502920" cy="502920"/>
+          </a:xfrm>
+          <a:prstGeom prst="ellipse">
+            <a:avLst/>
+          </a:prstGeom>
+          <a:solidFill>
+            <a:srgbClr val="F2B705"/>
+          </a:solidFill>
+          <a:ln>
+            <a:noFill/>
+          </a:ln>
+          <a:effectLst/>
+        </p:spPr>
+        <p:style>
+          <a:lnRef idx="1">
+            <a:schemeClr val="accent1"/>
+          </a:lnRef>
+          <a:fillRef idx="3">
+            <a:schemeClr val="accent1"/>
+          </a:fillRef>
+          <a:effectRef idx="2">
+            <a:schemeClr val="accent1"/>
+          </a:effectRef>
+          <a:fontRef idx="minor">
+            <a:schemeClr val="lt1"/>
+          </a:fontRef>
+        </p:style>
+        <p:txBody>
+          <a:bodyPr rtlCol="0" anchor="ctr" lIns="0" rIns="0" tIns="0" bIns="0"/>
+          <a:lstStyle/>
+          <a:p>
+            <a:pPr algn="ctr"/>
+            <a:r>
+              <a:rPr sz="1700" b="1">
+                <a:solidFill>
+                  <a:srgbClr val="202122"/>
+                </a:solidFill>
+                <a:latin typeface="Calibri"/>
+              </a:rPr>
+              <a:t>2</a:t>
+            </a:r>
+          </a:p>
+        </p:txBody>
+      </p:sp>
+      <p:sp>
+        <p:nvSpPr>
+          <p:cNvPr id="7" name="TextBox 6"/>
+          <p:cNvSpPr txBox="1"/>
+          <p:nvPr/>
+        </p:nvSpPr>
+        <p:spPr>
+          <a:xfrm>
+            <a:off x="1325880" y="2606040"/>
+            <a:ext cx="6583680" cy="822960"/>
+          </a:xfrm>
+          <a:prstGeom prst="rect">
+            <a:avLst/>
+          </a:prstGeom>
+          <a:noFill/>
+        </p:spPr>
+        <p:txBody>
+          <a:bodyPr wrap="square" anchor="ctr" lIns="0" rIns="0" tIns="0" bIns="0"/>
+          <a:lstStyle/>
+          <a:p>
+            <a:pPr algn="l"/>
+            <a:r>
+              <a:rPr sz="2000" b="0" i="0">
+                <a:solidFill>
+                  <a:srgbClr val="FFFFFF"/>
+                </a:solidFill>
+                <a:latin typeface="Calibri"/>
+              </a:rPr>
+              <a:t>Why does fixing a symptom not solve the problem?</a:t>
+            </a:r>
+          </a:p>
+        </p:txBody>
+      </p:sp>
+      <p:sp>
+        <p:nvSpPr>
+          <p:cNvPr id="8" name="Oval 7"/>
+          <p:cNvSpPr/>
+          <p:nvPr/>
+        </p:nvSpPr>
+        <p:spPr>
+          <a:xfrm>
+            <a:off x="548640" y="3657600"/>
+            <a:ext cx="502920" cy="502920"/>
+          </a:xfrm>
+          <a:prstGeom prst="ellipse">
+            <a:avLst/>
+          </a:prstGeom>
+          <a:solidFill>
+            <a:srgbClr val="F2B705"/>
+          </a:solidFill>
+          <a:ln>
+            <a:noFill/>
+          </a:ln>
+          <a:effectLst/>
+        </p:spPr>
+        <p:style>
+          <a:lnRef idx="1">
+            <a:schemeClr val="accent1"/>
+          </a:lnRef>
+          <a:fillRef idx="3">
+            <a:schemeClr val="accent1"/>
+          </a:fillRef>
+          <a:effectRef idx="2">
+            <a:schemeClr val="accent1"/>
+          </a:effectRef>
+          <a:fontRef idx="minor">
+            <a:schemeClr val="lt1"/>
+          </a:fontRef>
+        </p:style>
+        <p:txBody>
+          <a:bodyPr rtlCol="0" anchor="ctr" lIns="0" rIns="0" tIns="0" bIns="0"/>
+          <a:lstStyle/>
+          <a:p>
+            <a:pPr algn="ctr"/>
+            <a:r>
+              <a:rPr sz="1700" b="1">
+                <a:solidFill>
+                  <a:srgbClr val="202122"/>
+                </a:solidFill>
+                <a:latin typeface="Calibri"/>
+              </a:rPr>
+              <a:t>3</a:t>
+            </a:r>
+          </a:p>
+        </p:txBody>
+      </p:sp>
+      <p:sp>
+        <p:nvSpPr>
+          <p:cNvPr id="9" name="TextBox 8"/>
+          <p:cNvSpPr txBox="1"/>
+          <p:nvPr/>
+        </p:nvSpPr>
+        <p:spPr>
+          <a:xfrm>
+            <a:off x="1325880" y="3566160"/>
+            <a:ext cx="6583680" cy="822960"/>
+          </a:xfrm>
+          <a:prstGeom prst="rect">
+            <a:avLst/>
+          </a:prstGeom>
+          <a:noFill/>
+        </p:spPr>
+        <p:txBody>
+          <a:bodyPr wrap="square" anchor="ctr" lIns="0" rIns="0" tIns="0" bIns="0"/>
+          <a:lstStyle/>
+          <a:p>
+            <a:pPr algn="l"/>
+            <a:r>
+              <a:rPr sz="2000" b="0" i="0">
+                <a:solidFill>
+                  <a:srgbClr val="FFFFFF"/>
+                </a:solidFill>
+                <a:latin typeface="Calibri"/>
+              </a:rPr>
+              <a:t>Why must a fix be reviewed?</a:t>
+            </a:r>
+          </a:p>
+        </p:txBody>
+      </p:sp>
+      <p:sp>
+        <p:nvSpPr>
+          <p:cNvPr id="10" name="Rounded Rectangle 9"/>
+          <p:cNvSpPr/>
+          <p:nvPr/>
+        </p:nvSpPr>
+        <p:spPr>
+          <a:xfrm>
+            <a:off x="8229600" y="1645920"/>
+            <a:ext cx="3410712" cy="2926080"/>
+          </a:xfrm>
+          <a:prstGeom prst="roundRect">
+            <a:avLst>
+              <a:gd name="adj" fmla="val 8000"/>
+            </a:avLst>
+          </a:prstGeom>
+          <a:solidFill>
+            <a:srgbClr val="0645AD"/>
+          </a:solidFill>
+          <a:ln>
+            <a:noFill/>
+          </a:ln>
+          <a:effectLst/>
+        </p:spPr>
+        <p:style>
+          <a:lnRef idx="1">
+            <a:schemeClr val="accent1"/>
+          </a:lnRef>
+          <a:fillRef idx="3">
+            <a:schemeClr val="accent1"/>
+          </a:fillRef>
+          <a:effectRef idx="2">
+            <a:schemeClr val="accent1"/>
+          </a:effectRef>
+          <a:fontRef idx="minor">
+            <a:schemeClr val="lt1"/>
+          </a:fontRef>
+        </p:style>
+        <p:txBody>
+          <a:bodyPr rtlCol="0" anchor="ctr"/>
+          <a:lstStyle/>
+          <a:p/>
+        </p:txBody>
+      </p:sp>
+      <p:sp>
+        <p:nvSpPr>
+          <p:cNvPr id="11" name="TextBox 10"/>
+          <p:cNvSpPr txBox="1"/>
+          <p:nvPr/>
+        </p:nvSpPr>
+        <p:spPr>
+          <a:xfrm>
+            <a:off x="8503920" y="1874519"/>
+            <a:ext cx="2926080" cy="365760"/>
+          </a:xfrm>
+          <a:prstGeom prst="rect">
+            <a:avLst/>
+          </a:prstGeom>
+          <a:noFill/>
+        </p:spPr>
+        <p:txBody>
+          <a:bodyPr wrap="square" anchor="t" lIns="0" rIns="0" tIns="0" bIns="0"/>
+          <a:lstStyle/>
+          <a:p>
+            <a:pPr algn="l"/>
+            <a:r>
+              <a:rPr sz="1300" b="1" i="0">
+                <a:solidFill>
+                  <a:srgbClr val="A9C8F0"/>
+                </a:solidFill>
+                <a:latin typeface="Calibri"/>
+              </a:rPr>
+              <a:t>REVISE THIS TOPIC</a:t>
+            </a:r>
+          </a:p>
+        </p:txBody>
+      </p:sp>
+      <p:sp>
+        <p:nvSpPr>
+          <p:cNvPr id="12" name="TextBox 11"/>
+          <p:cNvSpPr txBox="1"/>
+          <p:nvPr/>
+        </p:nvSpPr>
+        <p:spPr>
+          <a:xfrm>
+            <a:off x="8503920" y="2286000"/>
+            <a:ext cx="2926080" cy="548640"/>
+          </a:xfrm>
+          <a:prstGeom prst="rect">
+            <a:avLst/>
+          </a:prstGeom>
+          <a:noFill/>
+        </p:spPr>
+        <p:txBody>
+          <a:bodyPr wrap="square" anchor="t" lIns="0" rIns="0" tIns="0" bIns="0"/>
+          <a:lstStyle/>
+          <a:p>
+            <a:pPr algn="l"/>
+            <a:r>
+              <a:rPr sz="1400" b="0" i="0">
+                <a:solidFill>
+                  <a:srgbClr val="FFFFFF"/>
+                </a:solidFill>
+                <a:latin typeface="Calibri"/>
+              </a:rPr>
+              <a:t>Revision notes for this lesson are on the study wiki:</a:t>
+            </a:r>
+          </a:p>
+        </p:txBody>
+      </p:sp>
+      <p:sp>
+        <p:nvSpPr>
+          <p:cNvPr id="13" name="TextBox 12"/>
+          <p:cNvSpPr txBox="1"/>
+          <p:nvPr/>
+        </p:nvSpPr>
+        <p:spPr>
+          <a:xfrm>
+            <a:off x="8503920" y="2926080"/>
+            <a:ext cx="2926080" cy="1463040"/>
+          </a:xfrm>
+          <a:prstGeom prst="rect">
+            <a:avLst/>
+          </a:prstGeom>
+          <a:noFill/>
+        </p:spPr>
+        <p:txBody>
+          <a:bodyPr wrap="square" anchor="t" lIns="0" rIns="0" tIns="0" bIns="0"/>
+          <a:lstStyle/>
+          <a:p>
+            <a:pPr algn="l"/>
+            <a:r>
+              <a:rPr sz="2000" b="1" i="0">
+                <a:solidFill>
+                  <a:srgbClr val="FFFFFF"/>
+                </a:solidFill>
+                <a:latin typeface="Cambria"/>
+              </a:rPr>
+              <a:t>Core Paper 1: Problem Solving, Programming, Emerging Issues and Legislation</a:t>
+            </a:r>
+          </a:p>
+        </p:txBody>
+      </p:sp>
+      <p:sp>
+        <p:nvSpPr>
+          <p:cNvPr id="14" name="TextBox 13"/>
+          <p:cNvSpPr txBox="1"/>
+          <p:nvPr/>
+        </p:nvSpPr>
+        <p:spPr>
+          <a:xfrm>
+            <a:off x="548640" y="5669280"/>
+            <a:ext cx="11094415" cy="548640"/>
+          </a:xfrm>
+          <a:prstGeom prst="rect">
+            <a:avLst/>
+          </a:prstGeom>
+          <a:noFill/>
+        </p:spPr>
+        <p:txBody>
+          <a:bodyPr wrap="square" anchor="t" lIns="0" rIns="0" tIns="0" bIns="0"/>
+          <a:lstStyle/>
+          <a:p>
+            <a:pPr algn="l"/>
+            <a:r>
+              <a:rPr sz="1200" b="0" i="0">
+                <a:solidFill>
+                  <a:srgbClr val="A9C8F0"/>
+                </a:solidFill>
+                <a:latin typeface="Calibri"/>
+              </a:rPr>
+              <a:t>https://lana6478.github.io/T-level-Digital-Software-Development/#/01-core-component/01-core-paper-1.md</a:t>
+            </a:r>
+          </a:p>
+        </p:txBody>
+      </p:sp>
+    </p:spTree>
+  </p:cSld>
+  <p:clrMapOvr>
+    <a:masterClrMapping/>
+  </p:clrMapOvr>
+</p:sld>
+</file>
+
 <file path=ppt/slides/slide2.xml><?xml version="1.0" encoding="utf-8"?>
 <p:sld xmlns:a="http://schemas.openxmlformats.org/drawingml/2006/main" xmlns:p="http://schemas.openxmlformats.org/presentationml/2006/main" xmlns:r="http://schemas.openxmlformats.org/officeDocument/2006/relationships">
   <p:cSld>
@@ -4756,22 +7279,120 @@
       </p:sp>
       <p:sp>
         <p:nvSpPr>
-          <p:cNvPr id="6" name="Rounded Rectangle 5"/>
+          <p:cNvPr id="6" name="TextBox 5"/>
+          <p:cNvSpPr txBox="1"/>
+          <p:nvPr/>
+        </p:nvSpPr>
+        <p:spPr>
+          <a:xfrm>
+            <a:off x="548640" y="1554480"/>
+            <a:ext cx="6720840" cy="4617720"/>
+          </a:xfrm>
+          <a:prstGeom prst="rect">
+            <a:avLst/>
+          </a:prstGeom>
+          <a:noFill/>
+        </p:spPr>
+        <p:txBody>
+          <a:bodyPr wrap="square" lIns="0" rIns="0" tIns="0" bIns="0">
+            <a:spAutoFit/>
+          </a:bodyPr>
+          <a:lstStyle/>
+          <a:p>
+            <a:pPr>
+              <a:spcAft>
+                <a:spcPts val="1320"/>
+              </a:spcAft>
+            </a:pPr>
+            <a:r>
+              <a:rPr sz="2200" b="1">
+                <a:solidFill>
+                  <a:srgbClr val="202122"/>
+                </a:solidFill>
+                <a:latin typeface="Calibri"/>
+              </a:rPr>
+              <a:t>Top-down:</a:t>
+            </a:r>
+            <a:r>
+              <a:rPr sz="2200" b="0">
+                <a:solidFill>
+                  <a:srgbClr val="202122"/>
+                </a:solidFill>
+                <a:latin typeface="Calibri"/>
+              </a:rPr>
+              <a:t> start with the whole problem and break it into smaller sub-problems until each is easy to code. It gives a clear structure.</a:t>
+            </a:r>
+          </a:p>
+          <a:p>
+            <a:pPr>
+              <a:spcAft>
+                <a:spcPts val="1320"/>
+              </a:spcAft>
+            </a:pPr>
+            <a:r>
+              <a:rPr sz="2200" b="1">
+                <a:solidFill>
+                  <a:srgbClr val="202122"/>
+                </a:solidFill>
+                <a:latin typeface="Calibri"/>
+              </a:rPr>
+              <a:t>Bottom-up:</a:t>
+            </a:r>
+            <a:r>
+              <a:rPr sz="2200" b="0">
+                <a:solidFill>
+                  <a:srgbClr val="202122"/>
+                </a:solidFill>
+                <a:latin typeface="Calibri"/>
+              </a:rPr>
+              <a:t> start with small, working pieces, such as functions or libraries you already have, and combine them. It's quick when good components exist.</a:t>
+            </a:r>
+          </a:p>
+          <a:p>
+            <a:pPr>
+              <a:spcAft>
+                <a:spcPts val="1320"/>
+              </a:spcAft>
+            </a:pPr>
+            <a:r>
+              <a:rPr sz="2200" b="1">
+                <a:solidFill>
+                  <a:srgbClr val="202122"/>
+                </a:solidFill>
+                <a:latin typeface="Calibri"/>
+              </a:rPr>
+              <a:t>Modularisation:</a:t>
+            </a:r>
+            <a:r>
+              <a:rPr sz="2200" b="0">
+                <a:solidFill>
+                  <a:srgbClr val="202122"/>
+                </a:solidFill>
+                <a:latin typeface="Calibri"/>
+              </a:rPr>
+              <a:t> split the program into self-contained modules, each with a clear job, inputs and outputs. Modules can be written and tested separately, shared across a team and reused in other projects.</a:t>
+            </a:r>
+          </a:p>
+        </p:txBody>
+      </p:sp>
+      <p:sp>
+        <p:nvSpPr>
+          <p:cNvPr id="7" name="Rounded Rectangle 6"/>
           <p:cNvSpPr/>
           <p:nvPr/>
         </p:nvSpPr>
         <p:spPr>
           <a:xfrm>
-            <a:off x="548640" y="1600200"/>
-            <a:ext cx="3515258" cy="4572000"/>
+            <a:off x="7772400" y="1554480"/>
+            <a:ext cx="3867912" cy="4526280"/>
           </a:xfrm>
           <a:prstGeom prst="roundRect">
             <a:avLst>
-              <a:gd name="adj" fmla="val 6000"/>
+              <a:gd name="adj" fmla="val 8000"/>
             </a:avLst>
           </a:prstGeom>
           <a:solidFill>
-            <a:srgbClr val="EAF3FF"/>
+            <a:srgbClr val="03306E"/>
           </a:solidFill>
           <a:ln>
             <a:noFill/>
@@ -4800,14 +7421,14 @@
       </p:sp>
       <p:sp>
         <p:nvSpPr>
-          <p:cNvPr id="7" name="Oval 6"/>
+          <p:cNvPr id="8" name="Oval 7"/>
           <p:cNvSpPr/>
           <p:nvPr/>
         </p:nvSpPr>
         <p:spPr>
           <a:xfrm>
-            <a:off x="777240" y="1828800"/>
-            <a:ext cx="457200" cy="457200"/>
+            <a:off x="8046720" y="1828800"/>
+            <a:ext cx="548640" cy="548640"/>
           </a:xfrm>
           <a:prstGeom prst="ellipse">
             <a:avLst/>
@@ -4840,46 +7461,13 @@
           <a:p>
             <a:pPr algn="ctr"/>
             <a:r>
-              <a:rPr sz="1500" b="1">
+              <a:rPr sz="1300" b="1">
                 <a:solidFill>
                   <a:srgbClr val="202122"/>
                 </a:solidFill>
                 <a:latin typeface="Calibri"/>
               </a:rPr>
-              <a:t>1</a:t>
-            </a:r>
-          </a:p>
-        </p:txBody>
-      </p:sp>
-      <p:sp>
-        <p:nvSpPr>
-          <p:cNvPr id="8" name="TextBox 7"/>
-          <p:cNvSpPr txBox="1"/>
-          <p:nvPr/>
-        </p:nvSpPr>
-        <p:spPr>
-          <a:xfrm>
-            <a:off x="1371600" y="1801368"/>
-            <a:ext cx="2509418" cy="512064"/>
-          </a:xfrm>
-          <a:prstGeom prst="rect">
-            <a:avLst/>
-          </a:prstGeom>
-          <a:noFill/>
-        </p:spPr>
-        <p:txBody>
-          <a:bodyPr wrap="square" anchor="ctr" lIns="0" rIns="0" tIns="0" bIns="0"/>
-          <a:lstStyle/>
-          <a:p>
-            <a:pPr algn="l"/>
-            <a:r>
-              <a:rPr sz="1900" b="1" i="0">
-                <a:solidFill>
-                  <a:srgbClr val="03306E"/>
-                </a:solidFill>
-                <a:latin typeface="Calibri"/>
-              </a:rPr>
-              <a:t>Top-down</a:t>
+              <a:t>e.g.</a:t>
             </a:r>
           </a:p>
         </p:txBody>
@@ -4892,8 +7480,8 @@
         </p:nvSpPr>
         <p:spPr>
           <a:xfrm>
-            <a:off x="777240" y="2468880"/>
-            <a:ext cx="3058058" cy="3566160"/>
+            <a:off x="8046720" y="2560320"/>
+            <a:ext cx="3291840" cy="365760"/>
           </a:xfrm>
           <a:prstGeom prst="rect">
             <a:avLst/>
@@ -4906,124 +7494,27 @@
           <a:p>
             <a:pPr algn="l"/>
             <a:r>
-              <a:rPr sz="2000" b="0" i="0">
-                <a:solidFill>
-                  <a:srgbClr val="202122"/>
-                </a:solidFill>
-                <a:latin typeface="Calibri"/>
-              </a:rPr>
-              <a:t>Start with the whole problem and break it into smaller parts. Good when the brief is clear.</a:t>
-            </a:r>
-          </a:p>
-        </p:txBody>
-      </p:sp>
-      <p:sp>
-        <p:nvSpPr>
-          <p:cNvPr id="10" name="Rounded Rectangle 9"/>
-          <p:cNvSpPr/>
-          <p:nvPr/>
-        </p:nvSpPr>
-        <p:spPr>
-          <a:xfrm>
-            <a:off x="4338218" y="1600200"/>
-            <a:ext cx="3515258" cy="4572000"/>
-          </a:xfrm>
-          <a:prstGeom prst="roundRect">
-            <a:avLst>
-              <a:gd name="adj" fmla="val 6000"/>
-            </a:avLst>
-          </a:prstGeom>
-          <a:solidFill>
-            <a:srgbClr val="EAF3FF"/>
-          </a:solidFill>
-          <a:ln>
-            <a:noFill/>
-          </a:ln>
-          <a:effectLst/>
-        </p:spPr>
-        <p:style>
-          <a:lnRef idx="1">
-            <a:schemeClr val="accent1"/>
-          </a:lnRef>
-          <a:fillRef idx="3">
-            <a:schemeClr val="accent1"/>
-          </a:fillRef>
-          <a:effectRef idx="2">
-            <a:schemeClr val="accent1"/>
-          </a:effectRef>
-          <a:fontRef idx="minor">
-            <a:schemeClr val="lt1"/>
-          </a:fontRef>
-        </p:style>
-        <p:txBody>
-          <a:bodyPr rtlCol="0" anchor="ctr"/>
-          <a:lstStyle/>
-          <a:p/>
-        </p:txBody>
-      </p:sp>
-      <p:sp>
-        <p:nvSpPr>
-          <p:cNvPr id="11" name="Oval 10"/>
-          <p:cNvSpPr/>
-          <p:nvPr/>
-        </p:nvSpPr>
-        <p:spPr>
-          <a:xfrm>
-            <a:off x="4566818" y="1828800"/>
-            <a:ext cx="457200" cy="457200"/>
-          </a:xfrm>
-          <a:prstGeom prst="ellipse">
-            <a:avLst/>
-          </a:prstGeom>
-          <a:solidFill>
-            <a:srgbClr val="F2B705"/>
-          </a:solidFill>
-          <a:ln>
-            <a:noFill/>
-          </a:ln>
-          <a:effectLst/>
-        </p:spPr>
-        <p:style>
-          <a:lnRef idx="1">
-            <a:schemeClr val="accent1"/>
-          </a:lnRef>
-          <a:fillRef idx="3">
-            <a:schemeClr val="accent1"/>
-          </a:fillRef>
-          <a:effectRef idx="2">
-            <a:schemeClr val="accent1"/>
-          </a:effectRef>
-          <a:fontRef idx="minor">
-            <a:schemeClr val="lt1"/>
-          </a:fontRef>
-        </p:style>
-        <p:txBody>
-          <a:bodyPr rtlCol="0" anchor="ctr" lIns="0" rIns="0" tIns="0" bIns="0"/>
-          <a:lstStyle/>
-          <a:p>
-            <a:pPr algn="ctr"/>
-            <a:r>
-              <a:rPr sz="1500" b="1">
-                <a:solidFill>
-                  <a:srgbClr val="202122"/>
-                </a:solidFill>
-                <a:latin typeface="Calibri"/>
-              </a:rPr>
-              <a:t>2</a:t>
-            </a:r>
-          </a:p>
-        </p:txBody>
-      </p:sp>
-      <p:sp>
-        <p:nvSpPr>
-          <p:cNvPr id="12" name="TextBox 11"/>
+              <a:rPr sz="1300" b="1" i="0">
+                <a:solidFill>
+                  <a:srgbClr val="A9C8F0"/>
+                </a:solidFill>
+                <a:latin typeface="Calibri"/>
+              </a:rPr>
+              <a:t>EXAMPLE</a:t>
+            </a:r>
+          </a:p>
+        </p:txBody>
+      </p:sp>
+      <p:sp>
+        <p:nvSpPr>
+          <p:cNvPr id="10" name="TextBox 9"/>
           <p:cNvSpPr txBox="1"/>
           <p:nvPr/>
         </p:nvSpPr>
         <p:spPr>
           <a:xfrm>
-            <a:off x="5161178" y="1801368"/>
-            <a:ext cx="2509418" cy="512064"/>
+            <a:off x="8046720" y="2971800"/>
+            <a:ext cx="3291840" cy="2971800"/>
           </a:xfrm>
           <a:prstGeom prst="rect">
             <a:avLst/>
@@ -5031,214 +7522,18 @@
           <a:noFill/>
         </p:spPr>
         <p:txBody>
-          <a:bodyPr wrap="square" anchor="ctr" lIns="0" rIns="0" tIns="0" bIns="0"/>
+          <a:bodyPr wrap="square" anchor="t" lIns="0" rIns="0" tIns="0" bIns="0"/>
           <a:lstStyle/>
           <a:p>
             <a:pPr algn="l"/>
             <a:r>
-              <a:rPr sz="1900" b="1" i="0">
-                <a:solidFill>
-                  <a:srgbClr val="03306E"/>
-                </a:solidFill>
-                <a:latin typeface="Calibri"/>
-              </a:rPr>
-              <a:t>Bottom-up</a:t>
-            </a:r>
-          </a:p>
-        </p:txBody>
-      </p:sp>
-      <p:sp>
-        <p:nvSpPr>
-          <p:cNvPr id="13" name="TextBox 12"/>
-          <p:cNvSpPr txBox="1"/>
-          <p:nvPr/>
-        </p:nvSpPr>
-        <p:spPr>
-          <a:xfrm>
-            <a:off x="4566818" y="2468880"/>
-            <a:ext cx="3058058" cy="3566160"/>
-          </a:xfrm>
-          <a:prstGeom prst="rect">
-            <a:avLst/>
-          </a:prstGeom>
-          <a:noFill/>
-        </p:spPr>
-        <p:txBody>
-          <a:bodyPr wrap="square" anchor="t" lIns="0" rIns="0" tIns="0" bIns="0"/>
-          <a:lstStyle/>
-          <a:p>
-            <a:pPr algn="l"/>
-            <a:r>
-              <a:rPr sz="2000" b="0" i="0">
-                <a:solidFill>
-                  <a:srgbClr val="202122"/>
-                </a:solidFill>
-                <a:latin typeface="Calibri"/>
-              </a:rPr>
-              <a:t>Start with small, working components and combine them. Good when reliable parts exist.</a:t>
-            </a:r>
-          </a:p>
-        </p:txBody>
-      </p:sp>
-      <p:sp>
-        <p:nvSpPr>
-          <p:cNvPr id="14" name="Rounded Rectangle 13"/>
-          <p:cNvSpPr/>
-          <p:nvPr/>
-        </p:nvSpPr>
-        <p:spPr>
-          <a:xfrm>
-            <a:off x="8127796" y="1600200"/>
-            <a:ext cx="3515258" cy="4572000"/>
-          </a:xfrm>
-          <a:prstGeom prst="roundRect">
-            <a:avLst>
-              <a:gd name="adj" fmla="val 6000"/>
-            </a:avLst>
-          </a:prstGeom>
-          <a:solidFill>
-            <a:srgbClr val="EAF3FF"/>
-          </a:solidFill>
-          <a:ln>
-            <a:noFill/>
-          </a:ln>
-          <a:effectLst/>
-        </p:spPr>
-        <p:style>
-          <a:lnRef idx="1">
-            <a:schemeClr val="accent1"/>
-          </a:lnRef>
-          <a:fillRef idx="3">
-            <a:schemeClr val="accent1"/>
-          </a:fillRef>
-          <a:effectRef idx="2">
-            <a:schemeClr val="accent1"/>
-          </a:effectRef>
-          <a:fontRef idx="minor">
-            <a:schemeClr val="lt1"/>
-          </a:fontRef>
-        </p:style>
-        <p:txBody>
-          <a:bodyPr rtlCol="0" anchor="ctr"/>
-          <a:lstStyle/>
-          <a:p/>
-        </p:txBody>
-      </p:sp>
-      <p:sp>
-        <p:nvSpPr>
-          <p:cNvPr id="15" name="Oval 14"/>
-          <p:cNvSpPr/>
-          <p:nvPr/>
-        </p:nvSpPr>
-        <p:spPr>
-          <a:xfrm>
-            <a:off x="8356396" y="1828800"/>
-            <a:ext cx="457200" cy="457200"/>
-          </a:xfrm>
-          <a:prstGeom prst="ellipse">
-            <a:avLst/>
-          </a:prstGeom>
-          <a:solidFill>
-            <a:srgbClr val="F2B705"/>
-          </a:solidFill>
-          <a:ln>
-            <a:noFill/>
-          </a:ln>
-          <a:effectLst/>
-        </p:spPr>
-        <p:style>
-          <a:lnRef idx="1">
-            <a:schemeClr val="accent1"/>
-          </a:lnRef>
-          <a:fillRef idx="3">
-            <a:schemeClr val="accent1"/>
-          </a:fillRef>
-          <a:effectRef idx="2">
-            <a:schemeClr val="accent1"/>
-          </a:effectRef>
-          <a:fontRef idx="minor">
-            <a:schemeClr val="lt1"/>
-          </a:fontRef>
-        </p:style>
-        <p:txBody>
-          <a:bodyPr rtlCol="0" anchor="ctr" lIns="0" rIns="0" tIns="0" bIns="0"/>
-          <a:lstStyle/>
-          <a:p>
-            <a:pPr algn="ctr"/>
-            <a:r>
-              <a:rPr sz="1500" b="1">
-                <a:solidFill>
-                  <a:srgbClr val="202122"/>
-                </a:solidFill>
-                <a:latin typeface="Calibri"/>
-              </a:rPr>
-              <a:t>3</a:t>
-            </a:r>
-          </a:p>
-        </p:txBody>
-      </p:sp>
-      <p:sp>
-        <p:nvSpPr>
-          <p:cNvPr id="16" name="TextBox 15"/>
-          <p:cNvSpPr txBox="1"/>
-          <p:nvPr/>
-        </p:nvSpPr>
-        <p:spPr>
-          <a:xfrm>
-            <a:off x="8950756" y="1801368"/>
-            <a:ext cx="2509418" cy="512064"/>
-          </a:xfrm>
-          <a:prstGeom prst="rect">
-            <a:avLst/>
-          </a:prstGeom>
-          <a:noFill/>
-        </p:spPr>
-        <p:txBody>
-          <a:bodyPr wrap="square" anchor="ctr" lIns="0" rIns="0" tIns="0" bIns="0"/>
-          <a:lstStyle/>
-          <a:p>
-            <a:pPr algn="l"/>
-            <a:r>
-              <a:rPr sz="1900" b="1" i="0">
-                <a:solidFill>
-                  <a:srgbClr val="03306E"/>
-                </a:solidFill>
-                <a:latin typeface="Calibri"/>
-              </a:rPr>
-              <a:t>Modularisation</a:t>
-            </a:r>
-          </a:p>
-        </p:txBody>
-      </p:sp>
-      <p:sp>
-        <p:nvSpPr>
-          <p:cNvPr id="17" name="TextBox 16"/>
-          <p:cNvSpPr txBox="1"/>
-          <p:nvPr/>
-        </p:nvSpPr>
-        <p:spPr>
-          <a:xfrm>
-            <a:off x="8356396" y="2468880"/>
-            <a:ext cx="3058058" cy="3566160"/>
-          </a:xfrm>
-          <a:prstGeom prst="rect">
-            <a:avLst/>
-          </a:prstGeom>
-          <a:noFill/>
-        </p:spPr>
-        <p:txBody>
-          <a:bodyPr wrap="square" anchor="t" lIns="0" rIns="0" tIns="0" bIns="0"/>
-          <a:lstStyle/>
-          <a:p>
-            <a:pPr algn="l"/>
-            <a:r>
-              <a:rPr sz="2000" b="0" i="0">
-                <a:solidFill>
-                  <a:srgbClr val="202122"/>
-                </a:solidFill>
-                <a:latin typeface="Calibri"/>
-              </a:rPr>
-              <a:t>Split the solution into self-contained modules that can be built, tested and reused separately.</a:t>
+              <a:rPr sz="1900" b="0" i="0">
+                <a:solidFill>
+                  <a:srgbClr val="FFFFFF"/>
+                </a:solidFill>
+                <a:latin typeface="Cambria"/>
+              </a:rPr>
+              <a:t>A school app is designed top-down (timetable, homework, messages), built from modules, and reuses an existing login module bottom-up.</a:t>
             </a:r>
           </a:p>
         </p:txBody>
@@ -5330,7 +7625,7 @@
                 </a:solidFill>
                 <a:latin typeface="Cambria"/>
               </a:rPr>
-              <a:t>Root cause analysis</a:t>
+              <a:t>Three approaches</a:t>
             </a:r>
           </a:p>
         </p:txBody>
@@ -5410,7 +7705,7 @@
         <p:spPr>
           <a:xfrm>
             <a:off x="548640" y="1600200"/>
-            <a:ext cx="5410047" cy="2148840"/>
+            <a:ext cx="3515258" cy="4572000"/>
           </a:xfrm>
           <a:prstGeom prst="roundRect">
             <a:avLst>
@@ -5507,7 +7802,7 @@
         <p:spPr>
           <a:xfrm>
             <a:off x="1371600" y="1801368"/>
-            <a:ext cx="4404207" cy="512064"/>
+            <a:ext cx="2509418" cy="512064"/>
           </a:xfrm>
           <a:prstGeom prst="rect">
             <a:avLst/>
@@ -5526,7 +7821,7 @@
                 </a:solidFill>
                 <a:latin typeface="Calibri"/>
               </a:rPr>
-              <a:t>Five whys</a:t>
+              <a:t>Top-down</a:t>
             </a:r>
           </a:p>
         </p:txBody>
@@ -5540,7 +7835,7 @@
         <p:spPr>
           <a:xfrm>
             <a:off x="777240" y="2468880"/>
-            <a:ext cx="4952847" cy="1143000"/>
+            <a:ext cx="3058058" cy="3566160"/>
           </a:xfrm>
           <a:prstGeom prst="rect">
             <a:avLst/>
@@ -5559,7 +7854,7 @@
                 </a:solidFill>
                 <a:latin typeface="Calibri"/>
               </a:rPr>
-              <a:t>Keep asking 'why?' until you reach the underlying cause, not just the symptom.</a:t>
+              <a:t>Start with the whole problem and break it into smaller parts. Good when the brief is clear.</a:t>
             </a:r>
           </a:p>
         </p:txBody>
@@ -5572,8 +7867,8 @@
         </p:nvSpPr>
         <p:spPr>
           <a:xfrm>
-            <a:off x="6233007" y="1600200"/>
-            <a:ext cx="5410047" cy="2148840"/>
+            <a:off x="4338218" y="1600200"/>
+            <a:ext cx="3515258" cy="4572000"/>
           </a:xfrm>
           <a:prstGeom prst="roundRect">
             <a:avLst>
@@ -5616,7 +7911,7 @@
         </p:nvSpPr>
         <p:spPr>
           <a:xfrm>
-            <a:off x="6461607" y="1828800"/>
+            <a:off x="4566818" y="1828800"/>
             <a:ext cx="457200" cy="457200"/>
           </a:xfrm>
           <a:prstGeom prst="ellipse">
@@ -5669,8 +7964,8 @@
         </p:nvSpPr>
         <p:spPr>
           <a:xfrm>
-            <a:off x="7055967" y="1801368"/>
-            <a:ext cx="4404207" cy="512064"/>
+            <a:off x="5161178" y="1801368"/>
+            <a:ext cx="2509418" cy="512064"/>
           </a:xfrm>
           <a:prstGeom prst="rect">
             <a:avLst/>
@@ -5689,7 +7984,7 @@
                 </a:solidFill>
                 <a:latin typeface="Calibri"/>
               </a:rPr>
-              <a:t>FMEA</a:t>
+              <a:t>Bottom-up</a:t>
             </a:r>
           </a:p>
         </p:txBody>
@@ -5702,8 +7997,8 @@
         </p:nvSpPr>
         <p:spPr>
           <a:xfrm>
-            <a:off x="6461607" y="2468880"/>
-            <a:ext cx="4952847" cy="1143000"/>
+            <a:off x="4566818" y="2468880"/>
+            <a:ext cx="3058058" cy="3566160"/>
           </a:xfrm>
           <a:prstGeom prst="rect">
             <a:avLst/>
@@ -5722,7 +8017,7 @@
                 </a:solidFill>
                 <a:latin typeface="Calibri"/>
               </a:rPr>
-              <a:t>Failure Mode and Effects Analysis lists every way a component could fail and the effect of each.</a:t>
+              <a:t>Start with small, working components and combine them. Good when reliable parts exist.</a:t>
             </a:r>
           </a:p>
         </p:txBody>
@@ -5735,8 +8030,8 @@
         </p:nvSpPr>
         <p:spPr>
           <a:xfrm>
-            <a:off x="548640" y="4023360"/>
-            <a:ext cx="5410047" cy="2148840"/>
+            <a:off x="8127796" y="1600200"/>
+            <a:ext cx="3515258" cy="4572000"/>
           </a:xfrm>
           <a:prstGeom prst="roundRect">
             <a:avLst>
@@ -5779,7 +8074,7 @@
         </p:nvSpPr>
         <p:spPr>
           <a:xfrm>
-            <a:off x="777240" y="4251960"/>
+            <a:off x="8356396" y="1828800"/>
             <a:ext cx="457200" cy="457200"/>
           </a:xfrm>
           <a:prstGeom prst="ellipse">
@@ -5832,8 +8127,8 @@
         </p:nvSpPr>
         <p:spPr>
           <a:xfrm>
-            <a:off x="1371600" y="4224528"/>
-            <a:ext cx="4404207" cy="512064"/>
+            <a:off x="8950756" y="1801368"/>
+            <a:ext cx="2509418" cy="512064"/>
           </a:xfrm>
           <a:prstGeom prst="rect">
             <a:avLst/>
@@ -5852,7 +8147,7 @@
                 </a:solidFill>
                 <a:latin typeface="Calibri"/>
               </a:rPr>
-              <a:t>Event tree analysis</a:t>
+              <a:t>Modularisation</a:t>
             </a:r>
           </a:p>
         </p:txBody>
@@ -5865,8 +8160,8 @@
         </p:nvSpPr>
         <p:spPr>
           <a:xfrm>
-            <a:off x="777240" y="4892040"/>
-            <a:ext cx="4952847" cy="1143000"/>
+            <a:off x="8356396" y="2468880"/>
+            <a:ext cx="3058058" cy="3566160"/>
           </a:xfrm>
           <a:prstGeom prst="rect">
             <a:avLst/>
@@ -5885,170 +8180,7 @@
                 </a:solidFill>
                 <a:latin typeface="Calibri"/>
               </a:rPr>
-              <a:t>Starts from one event and maps every outcome that could follow.</a:t>
-            </a:r>
-          </a:p>
-        </p:txBody>
-      </p:sp>
-      <p:sp>
-        <p:nvSpPr>
-          <p:cNvPr id="18" name="Rounded Rectangle 17"/>
-          <p:cNvSpPr/>
-          <p:nvPr/>
-        </p:nvSpPr>
-        <p:spPr>
-          <a:xfrm>
-            <a:off x="6233007" y="4023360"/>
-            <a:ext cx="5410047" cy="2148840"/>
-          </a:xfrm>
-          <a:prstGeom prst="roundRect">
-            <a:avLst>
-              <a:gd name="adj" fmla="val 6000"/>
-            </a:avLst>
-          </a:prstGeom>
-          <a:solidFill>
-            <a:srgbClr val="EAF3FF"/>
-          </a:solidFill>
-          <a:ln>
-            <a:noFill/>
-          </a:ln>
-          <a:effectLst/>
-        </p:spPr>
-        <p:style>
-          <a:lnRef idx="1">
-            <a:schemeClr val="accent1"/>
-          </a:lnRef>
-          <a:fillRef idx="3">
-            <a:schemeClr val="accent1"/>
-          </a:fillRef>
-          <a:effectRef idx="2">
-            <a:schemeClr val="accent1"/>
-          </a:effectRef>
-          <a:fontRef idx="minor">
-            <a:schemeClr val="lt1"/>
-          </a:fontRef>
-        </p:style>
-        <p:txBody>
-          <a:bodyPr rtlCol="0" anchor="ctr"/>
-          <a:lstStyle/>
-          <a:p/>
-        </p:txBody>
-      </p:sp>
-      <p:sp>
-        <p:nvSpPr>
-          <p:cNvPr id="19" name="Oval 18"/>
-          <p:cNvSpPr/>
-          <p:nvPr/>
-        </p:nvSpPr>
-        <p:spPr>
-          <a:xfrm>
-            <a:off x="6461607" y="4251960"/>
-            <a:ext cx="457200" cy="457200"/>
-          </a:xfrm>
-          <a:prstGeom prst="ellipse">
-            <a:avLst/>
-          </a:prstGeom>
-          <a:solidFill>
-            <a:srgbClr val="F2B705"/>
-          </a:solidFill>
-          <a:ln>
-            <a:noFill/>
-          </a:ln>
-          <a:effectLst/>
-        </p:spPr>
-        <p:style>
-          <a:lnRef idx="1">
-            <a:schemeClr val="accent1"/>
-          </a:lnRef>
-          <a:fillRef idx="3">
-            <a:schemeClr val="accent1"/>
-          </a:fillRef>
-          <a:effectRef idx="2">
-            <a:schemeClr val="accent1"/>
-          </a:effectRef>
-          <a:fontRef idx="minor">
-            <a:schemeClr val="lt1"/>
-          </a:fontRef>
-        </p:style>
-        <p:txBody>
-          <a:bodyPr rtlCol="0" anchor="ctr" lIns="0" rIns="0" tIns="0" bIns="0"/>
-          <a:lstStyle/>
-          <a:p>
-            <a:pPr algn="ctr"/>
-            <a:r>
-              <a:rPr sz="1500" b="1">
-                <a:solidFill>
-                  <a:srgbClr val="202122"/>
-                </a:solidFill>
-                <a:latin typeface="Calibri"/>
-              </a:rPr>
-              <a:t>4</a:t>
-            </a:r>
-          </a:p>
-        </p:txBody>
-      </p:sp>
-      <p:sp>
-        <p:nvSpPr>
-          <p:cNvPr id="20" name="TextBox 19"/>
-          <p:cNvSpPr txBox="1"/>
-          <p:nvPr/>
-        </p:nvSpPr>
-        <p:spPr>
-          <a:xfrm>
-            <a:off x="7055967" y="4224528"/>
-            <a:ext cx="4404207" cy="512064"/>
-          </a:xfrm>
-          <a:prstGeom prst="rect">
-            <a:avLst/>
-          </a:prstGeom>
-          <a:noFill/>
-        </p:spPr>
-        <p:txBody>
-          <a:bodyPr wrap="square" anchor="ctr" lIns="0" rIns="0" tIns="0" bIns="0"/>
-          <a:lstStyle/>
-          <a:p>
-            <a:pPr algn="l"/>
-            <a:r>
-              <a:rPr sz="1900" b="1" i="0">
-                <a:solidFill>
-                  <a:srgbClr val="03306E"/>
-                </a:solidFill>
-                <a:latin typeface="Calibri"/>
-              </a:rPr>
-              <a:t>Then act</a:t>
-            </a:r>
-          </a:p>
-        </p:txBody>
-      </p:sp>
-      <p:sp>
-        <p:nvSpPr>
-          <p:cNvPr id="21" name="TextBox 20"/>
-          <p:cNvSpPr txBox="1"/>
-          <p:nvPr/>
-        </p:nvSpPr>
-        <p:spPr>
-          <a:xfrm>
-            <a:off x="6461607" y="4892040"/>
-            <a:ext cx="4952847" cy="1143000"/>
-          </a:xfrm>
-          <a:prstGeom prst="rect">
-            <a:avLst/>
-          </a:prstGeom>
-          <a:noFill/>
-        </p:spPr>
-        <p:txBody>
-          <a:bodyPr wrap="square" anchor="t" lIns="0" rIns="0" tIns="0" bIns="0"/>
-          <a:lstStyle/>
-          <a:p>
-            <a:pPr algn="l"/>
-            <a:r>
-              <a:rPr sz="2000" b="0" i="0">
-                <a:solidFill>
-                  <a:srgbClr val="202122"/>
-                </a:solidFill>
-                <a:latin typeface="Calibri"/>
-              </a:rPr>
-              <a:t>Log it, close it, or escalate it to a manager, specialist or third party.</a:t>
+              <a:t>Split the solution into self-contained modules that can be built, tested and reused separately.</a:t>
             </a:r>
           </a:p>
         </p:txBody>
@@ -6140,7 +8272,7 @@
                 </a:solidFill>
                 <a:latin typeface="Cambria"/>
               </a:rPr>
-              <a:t>The high-level problem-solving strategy</a:t>
+              <a:t>Quick check: Three approaches</a:t>
             </a:r>
           </a:p>
         </p:txBody>
@@ -6213,56 +8345,14 @@
       </p:sp>
       <p:sp>
         <p:nvSpPr>
-          <p:cNvPr id="6" name="Rectangle 5"/>
+          <p:cNvPr id="6" name="Oval 5"/>
           <p:cNvSpPr/>
           <p:nvPr/>
         </p:nvSpPr>
         <p:spPr>
           <a:xfrm>
-            <a:off x="1416024" y="2686812"/>
-            <a:ext cx="9359646" cy="36576"/>
-          </a:xfrm>
-          <a:prstGeom prst="rect">
-            <a:avLst/>
-          </a:prstGeom>
-          <a:solidFill>
-            <a:srgbClr val="A9C8F0"/>
-          </a:solidFill>
-          <a:ln>
-            <a:noFill/>
-          </a:ln>
-          <a:effectLst/>
-        </p:spPr>
-        <p:style>
-          <a:lnRef idx="1">
-            <a:schemeClr val="accent1"/>
-          </a:lnRef>
-          <a:fillRef idx="3">
-            <a:schemeClr val="accent1"/>
-          </a:fillRef>
-          <a:effectRef idx="2">
-            <a:schemeClr val="accent1"/>
-          </a:effectRef>
-          <a:fontRef idx="minor">
-            <a:schemeClr val="lt1"/>
-          </a:fontRef>
-        </p:style>
-        <p:txBody>
-          <a:bodyPr rtlCol="0" anchor="ctr"/>
-          <a:lstStyle/>
-          <a:p/>
-        </p:txBody>
-      </p:sp>
-      <p:sp>
-        <p:nvSpPr>
-          <p:cNvPr id="7" name="Oval 6"/>
-          <p:cNvSpPr/>
-          <p:nvPr/>
-        </p:nvSpPr>
-        <p:spPr>
-          <a:xfrm>
-            <a:off x="1095984" y="2385060"/>
-            <a:ext cx="640080" cy="640080"/>
+            <a:off x="548640" y="1691640"/>
+            <a:ext cx="502920" cy="502920"/>
           </a:xfrm>
           <a:prstGeom prst="ellipse">
             <a:avLst/>
@@ -6295,7 +8385,7 @@
           <a:p>
             <a:pPr algn="ctr"/>
             <a:r>
-              <a:rPr sz="2000" b="1">
+              <a:rPr sz="1600" b="1">
                 <a:solidFill>
                   <a:srgbClr val="202122"/>
                 </a:solidFill>
@@ -6308,14 +8398,14 @@
       </p:sp>
       <p:sp>
         <p:nvSpPr>
-          <p:cNvPr id="8" name="TextBox 7"/>
+          <p:cNvPr id="7" name="TextBox 6"/>
           <p:cNvSpPr txBox="1"/>
           <p:nvPr/>
         </p:nvSpPr>
         <p:spPr>
           <a:xfrm>
-            <a:off x="548640" y="3162300"/>
-            <a:ext cx="1734769" cy="731520"/>
+            <a:off x="1371600" y="1645920"/>
+            <a:ext cx="10271455" cy="1188720"/>
           </a:xfrm>
           <a:prstGeom prst="rect">
             <a:avLst/>
@@ -6326,106 +8416,29 @@
           <a:bodyPr wrap="square" anchor="t" lIns="0" rIns="0" tIns="0" bIns="0"/>
           <a:lstStyle/>
           <a:p>
-            <a:pPr algn="ctr"/>
-            <a:r>
-              <a:rPr sz="1700" b="1" i="0">
-                <a:solidFill>
-                  <a:srgbClr val="03306E"/>
-                </a:solidFill>
-                <a:latin typeface="Calibri"/>
-              </a:rPr>
-              <a:t>Define</a:t>
-            </a:r>
-          </a:p>
-        </p:txBody>
-      </p:sp>
-      <p:sp>
-        <p:nvSpPr>
-          <p:cNvPr id="9" name="Rounded Rectangle 8"/>
+            <a:pPr algn="l"/>
+            <a:r>
+              <a:rPr sz="2400" b="0" i="0">
+                <a:solidFill>
+                  <a:srgbClr val="202122"/>
+                </a:solidFill>
+                <a:latin typeface="Calibri"/>
+              </a:rPr>
+              <a:t>Which approach starts with the whole problem?</a:t>
+            </a:r>
+          </a:p>
+        </p:txBody>
+      </p:sp>
+      <p:sp>
+        <p:nvSpPr>
+          <p:cNvPr id="8" name="Oval 7"/>
           <p:cNvSpPr/>
           <p:nvPr/>
         </p:nvSpPr>
         <p:spPr>
           <a:xfrm>
-            <a:off x="548640" y="3939540"/>
-            <a:ext cx="1734769" cy="1447800"/>
-          </a:xfrm>
-          <a:prstGeom prst="roundRect">
-            <a:avLst>
-              <a:gd name="adj" fmla="val 6000"/>
-            </a:avLst>
-          </a:prstGeom>
-          <a:solidFill>
-            <a:srgbClr val="EAF3FF"/>
-          </a:solidFill>
-          <a:ln>
-            <a:noFill/>
-          </a:ln>
-          <a:effectLst/>
-        </p:spPr>
-        <p:style>
-          <a:lnRef idx="1">
-            <a:schemeClr val="accent1"/>
-          </a:lnRef>
-          <a:fillRef idx="3">
-            <a:schemeClr val="accent1"/>
-          </a:fillRef>
-          <a:effectRef idx="2">
-            <a:schemeClr val="accent1"/>
-          </a:effectRef>
-          <a:fontRef idx="minor">
-            <a:schemeClr val="lt1"/>
-          </a:fontRef>
-        </p:style>
-        <p:txBody>
-          <a:bodyPr rtlCol="0" anchor="ctr"/>
-          <a:lstStyle/>
-          <a:p/>
-        </p:txBody>
-      </p:sp>
-      <p:sp>
-        <p:nvSpPr>
-          <p:cNvPr id="10" name="TextBox 9"/>
-          <p:cNvSpPr txBox="1"/>
-          <p:nvPr/>
-        </p:nvSpPr>
-        <p:spPr>
-          <a:xfrm>
-            <a:off x="685800" y="4076700"/>
-            <a:ext cx="1460449" cy="1173480"/>
-          </a:xfrm>
-          <a:prstGeom prst="rect">
-            <a:avLst/>
-          </a:prstGeom>
-          <a:noFill/>
-        </p:spPr>
-        <p:txBody>
-          <a:bodyPr wrap="square" anchor="t" lIns="0" rIns="0" tIns="0" bIns="0"/>
-          <a:lstStyle/>
-          <a:p>
-            <a:pPr algn="l"/>
-            <a:r>
-              <a:rPr sz="1700" b="0" i="0">
-                <a:solidFill>
-                  <a:srgbClr val="202122"/>
-                </a:solidFill>
-                <a:latin typeface="Calibri"/>
-              </a:rPr>
-              <a:t>State exactly what the problem is.</a:t>
-            </a:r>
-          </a:p>
-        </p:txBody>
-      </p:sp>
-      <p:sp>
-        <p:nvSpPr>
-          <p:cNvPr id="11" name="Oval 10"/>
-          <p:cNvSpPr/>
-          <p:nvPr/>
-        </p:nvSpPr>
-        <p:spPr>
-          <a:xfrm>
-            <a:off x="2967913" y="2385060"/>
-            <a:ext cx="640080" cy="640080"/>
+            <a:off x="548640" y="3108960"/>
+            <a:ext cx="502920" cy="502920"/>
           </a:xfrm>
           <a:prstGeom prst="ellipse">
             <a:avLst/>
@@ -6458,7 +8471,7 @@
           <a:p>
             <a:pPr algn="ctr"/>
             <a:r>
-              <a:rPr sz="2000" b="1">
+              <a:rPr sz="1600" b="1">
                 <a:solidFill>
                   <a:srgbClr val="202122"/>
                 </a:solidFill>
@@ -6471,14 +8484,14 @@
       </p:sp>
       <p:sp>
         <p:nvSpPr>
-          <p:cNvPr id="12" name="TextBox 11"/>
+          <p:cNvPr id="9" name="TextBox 8"/>
           <p:cNvSpPr txBox="1"/>
           <p:nvPr/>
         </p:nvSpPr>
         <p:spPr>
           <a:xfrm>
-            <a:off x="2420569" y="3162300"/>
-            <a:ext cx="1734769" cy="731520"/>
+            <a:off x="1371600" y="3063240"/>
+            <a:ext cx="10271455" cy="1188720"/>
           </a:xfrm>
           <a:prstGeom prst="rect">
             <a:avLst/>
@@ -6489,106 +8502,29 @@
           <a:bodyPr wrap="square" anchor="t" lIns="0" rIns="0" tIns="0" bIns="0"/>
           <a:lstStyle/>
           <a:p>
-            <a:pPr algn="ctr"/>
-            <a:r>
-              <a:rPr sz="1700" b="1" i="0">
-                <a:solidFill>
-                  <a:srgbClr val="03306E"/>
-                </a:solidFill>
-                <a:latin typeface="Calibri"/>
-              </a:rPr>
-              <a:t>Gather</a:t>
-            </a:r>
-          </a:p>
-        </p:txBody>
-      </p:sp>
-      <p:sp>
-        <p:nvSpPr>
-          <p:cNvPr id="13" name="Rounded Rectangle 12"/>
+            <a:pPr algn="l"/>
+            <a:r>
+              <a:rPr sz="2400" b="0" i="0">
+                <a:solidFill>
+                  <a:srgbClr val="202122"/>
+                </a:solidFill>
+                <a:latin typeface="Calibri"/>
+              </a:rPr>
+              <a:t>Give two benefits of modularisation.</a:t>
+            </a:r>
+          </a:p>
+        </p:txBody>
+      </p:sp>
+      <p:sp>
+        <p:nvSpPr>
+          <p:cNvPr id="10" name="Oval 9"/>
           <p:cNvSpPr/>
           <p:nvPr/>
         </p:nvSpPr>
         <p:spPr>
           <a:xfrm>
-            <a:off x="2420569" y="3939540"/>
-            <a:ext cx="1734769" cy="1447800"/>
-          </a:xfrm>
-          <a:prstGeom prst="roundRect">
-            <a:avLst>
-              <a:gd name="adj" fmla="val 6000"/>
-            </a:avLst>
-          </a:prstGeom>
-          <a:solidFill>
-            <a:srgbClr val="EAF3FF"/>
-          </a:solidFill>
-          <a:ln>
-            <a:noFill/>
-          </a:ln>
-          <a:effectLst/>
-        </p:spPr>
-        <p:style>
-          <a:lnRef idx="1">
-            <a:schemeClr val="accent1"/>
-          </a:lnRef>
-          <a:fillRef idx="3">
-            <a:schemeClr val="accent1"/>
-          </a:fillRef>
-          <a:effectRef idx="2">
-            <a:schemeClr val="accent1"/>
-          </a:effectRef>
-          <a:fontRef idx="minor">
-            <a:schemeClr val="lt1"/>
-          </a:fontRef>
-        </p:style>
-        <p:txBody>
-          <a:bodyPr rtlCol="0" anchor="ctr"/>
-          <a:lstStyle/>
-          <a:p/>
-        </p:txBody>
-      </p:sp>
-      <p:sp>
-        <p:nvSpPr>
-          <p:cNvPr id="14" name="TextBox 13"/>
-          <p:cNvSpPr txBox="1"/>
-          <p:nvPr/>
-        </p:nvSpPr>
-        <p:spPr>
-          <a:xfrm>
-            <a:off x="2557729" y="4076700"/>
-            <a:ext cx="1460449" cy="1173480"/>
-          </a:xfrm>
-          <a:prstGeom prst="rect">
-            <a:avLst/>
-          </a:prstGeom>
-          <a:noFill/>
-        </p:spPr>
-        <p:txBody>
-          <a:bodyPr wrap="square" anchor="t" lIns="0" rIns="0" tIns="0" bIns="0"/>
-          <a:lstStyle/>
-          <a:p>
-            <a:pPr algn="l"/>
-            <a:r>
-              <a:rPr sz="1700" b="0" i="0">
-                <a:solidFill>
-                  <a:srgbClr val="202122"/>
-                </a:solidFill>
-                <a:latin typeface="Calibri"/>
-              </a:rPr>
-              <a:t>Collect information, error logs, user reports.</a:t>
-            </a:r>
-          </a:p>
-        </p:txBody>
-      </p:sp>
-      <p:sp>
-        <p:nvSpPr>
-          <p:cNvPr id="15" name="Oval 14"/>
-          <p:cNvSpPr/>
-          <p:nvPr/>
-        </p:nvSpPr>
-        <p:spPr>
-          <a:xfrm>
-            <a:off x="4839843" y="2385060"/>
-            <a:ext cx="640080" cy="640080"/>
+            <a:off x="548640" y="4526280"/>
+            <a:ext cx="502920" cy="502920"/>
           </a:xfrm>
           <a:prstGeom prst="ellipse">
             <a:avLst/>
@@ -6621,7 +8557,7 @@
           <a:p>
             <a:pPr algn="ctr"/>
             <a:r>
-              <a:rPr sz="2000" b="1">
+              <a:rPr sz="1600" b="1">
                 <a:solidFill>
                   <a:srgbClr val="202122"/>
                 </a:solidFill>
@@ -6634,14 +8570,14 @@
       </p:sp>
       <p:sp>
         <p:nvSpPr>
-          <p:cNvPr id="16" name="TextBox 15"/>
+          <p:cNvPr id="11" name="TextBox 10"/>
           <p:cNvSpPr txBox="1"/>
           <p:nvPr/>
         </p:nvSpPr>
         <p:spPr>
           <a:xfrm>
-            <a:off x="4292498" y="3162300"/>
-            <a:ext cx="1734769" cy="731520"/>
+            <a:off x="1371600" y="4480560"/>
+            <a:ext cx="10271455" cy="1188720"/>
           </a:xfrm>
           <a:prstGeom prst="rect">
             <a:avLst/>
@@ -6652,73 +8588,29 @@
           <a:bodyPr wrap="square" anchor="t" lIns="0" rIns="0" tIns="0" bIns="0"/>
           <a:lstStyle/>
           <a:p>
-            <a:pPr algn="ctr"/>
-            <a:r>
-              <a:rPr sz="1700" b="1" i="0">
-                <a:solidFill>
-                  <a:srgbClr val="03306E"/>
-                </a:solidFill>
-                <a:latin typeface="Calibri"/>
-              </a:rPr>
-              <a:t>Analyse</a:t>
-            </a:r>
-          </a:p>
-        </p:txBody>
-      </p:sp>
-      <p:sp>
-        <p:nvSpPr>
-          <p:cNvPr id="17" name="Rounded Rectangle 16"/>
-          <p:cNvSpPr/>
-          <p:nvPr/>
-        </p:nvSpPr>
-        <p:spPr>
-          <a:xfrm>
-            <a:off x="4292498" y="3939540"/>
-            <a:ext cx="1734769" cy="1447800"/>
-          </a:xfrm>
-          <a:prstGeom prst="roundRect">
-            <a:avLst>
-              <a:gd name="adj" fmla="val 6000"/>
-            </a:avLst>
-          </a:prstGeom>
-          <a:solidFill>
-            <a:srgbClr val="EAF3FF"/>
-          </a:solidFill>
-          <a:ln>
-            <a:noFill/>
-          </a:ln>
-          <a:effectLst/>
-        </p:spPr>
-        <p:style>
-          <a:lnRef idx="1">
-            <a:schemeClr val="accent1"/>
-          </a:lnRef>
-          <a:fillRef idx="3">
-            <a:schemeClr val="accent1"/>
-          </a:fillRef>
-          <a:effectRef idx="2">
-            <a:schemeClr val="accent1"/>
-          </a:effectRef>
-          <a:fontRef idx="minor">
-            <a:schemeClr val="lt1"/>
-          </a:fontRef>
-        </p:style>
-        <p:txBody>
-          <a:bodyPr rtlCol="0" anchor="ctr"/>
-          <a:lstStyle/>
-          <a:p/>
-        </p:txBody>
-      </p:sp>
-      <p:sp>
-        <p:nvSpPr>
-          <p:cNvPr id="18" name="TextBox 17"/>
+            <a:pPr algn="l"/>
+            <a:r>
+              <a:rPr sz="2400" b="0" i="0">
+                <a:solidFill>
+                  <a:srgbClr val="202122"/>
+                </a:solidFill>
+                <a:latin typeface="Calibri"/>
+              </a:rPr>
+              <a:t>When is bottom-up useful?</a:t>
+            </a:r>
+          </a:p>
+        </p:txBody>
+      </p:sp>
+      <p:sp>
+        <p:nvSpPr>
+          <p:cNvPr id="12" name="TextBox 11"/>
           <p:cNvSpPr txBox="1"/>
           <p:nvPr/>
         </p:nvSpPr>
         <p:spPr>
           <a:xfrm>
-            <a:off x="4429658" y="4076700"/>
-            <a:ext cx="1460449" cy="1173480"/>
+            <a:off x="548640" y="5852160"/>
+            <a:ext cx="11094415" cy="365760"/>
           </a:xfrm>
           <a:prstGeom prst="rect">
             <a:avLst/>
@@ -6731,502 +8623,13 @@
           <a:p>
             <a:pPr algn="l"/>
             <a:r>
-              <a:rPr sz="1700" b="0" i="0">
-                <a:solidFill>
-                  <a:srgbClr val="202122"/>
-                </a:solidFill>
-                <a:latin typeface="Calibri"/>
-              </a:rPr>
-              <a:t>Look for the cause and patterns.</a:t>
-            </a:r>
-          </a:p>
-        </p:txBody>
-      </p:sp>
-      <p:sp>
-        <p:nvSpPr>
-          <p:cNvPr id="19" name="Oval 18"/>
-          <p:cNvSpPr/>
-          <p:nvPr/>
-        </p:nvSpPr>
-        <p:spPr>
-          <a:xfrm>
-            <a:off x="6711772" y="2385060"/>
-            <a:ext cx="640080" cy="640080"/>
-          </a:xfrm>
-          <a:prstGeom prst="ellipse">
-            <a:avLst/>
-          </a:prstGeom>
-          <a:solidFill>
-            <a:srgbClr val="F2B705"/>
-          </a:solidFill>
-          <a:ln>
-            <a:noFill/>
-          </a:ln>
-          <a:effectLst/>
-        </p:spPr>
-        <p:style>
-          <a:lnRef idx="1">
-            <a:schemeClr val="accent1"/>
-          </a:lnRef>
-          <a:fillRef idx="3">
-            <a:schemeClr val="accent1"/>
-          </a:fillRef>
-          <a:effectRef idx="2">
-            <a:schemeClr val="accent1"/>
-          </a:effectRef>
-          <a:fontRef idx="minor">
-            <a:schemeClr val="lt1"/>
-          </a:fontRef>
-        </p:style>
-        <p:txBody>
-          <a:bodyPr rtlCol="0" anchor="ctr" lIns="0" rIns="0" tIns="0" bIns="0"/>
-          <a:lstStyle/>
-          <a:p>
-            <a:pPr algn="ctr"/>
-            <a:r>
-              <a:rPr sz="2000" b="1">
-                <a:solidFill>
-                  <a:srgbClr val="202122"/>
-                </a:solidFill>
-                <a:latin typeface="Calibri"/>
-              </a:rPr>
-              <a:t>4</a:t>
-            </a:r>
-          </a:p>
-        </p:txBody>
-      </p:sp>
-      <p:sp>
-        <p:nvSpPr>
-          <p:cNvPr id="20" name="TextBox 19"/>
-          <p:cNvSpPr txBox="1"/>
-          <p:nvPr/>
-        </p:nvSpPr>
-        <p:spPr>
-          <a:xfrm>
-            <a:off x="6164427" y="3162300"/>
-            <a:ext cx="1734769" cy="731520"/>
-          </a:xfrm>
-          <a:prstGeom prst="rect">
-            <a:avLst/>
-          </a:prstGeom>
-          <a:noFill/>
-        </p:spPr>
-        <p:txBody>
-          <a:bodyPr wrap="square" anchor="t" lIns="0" rIns="0" tIns="0" bIns="0"/>
-          <a:lstStyle/>
-          <a:p>
-            <a:pPr algn="ctr"/>
-            <a:r>
-              <a:rPr sz="1700" b="1" i="0">
-                <a:solidFill>
-                  <a:srgbClr val="03306E"/>
-                </a:solidFill>
-                <a:latin typeface="Calibri"/>
-              </a:rPr>
-              <a:t>Plan</a:t>
-            </a:r>
-          </a:p>
-        </p:txBody>
-      </p:sp>
-      <p:sp>
-        <p:nvSpPr>
-          <p:cNvPr id="21" name="Rounded Rectangle 20"/>
-          <p:cNvSpPr/>
-          <p:nvPr/>
-        </p:nvSpPr>
-        <p:spPr>
-          <a:xfrm>
-            <a:off x="6164427" y="3939540"/>
-            <a:ext cx="1734769" cy="1447800"/>
-          </a:xfrm>
-          <a:prstGeom prst="roundRect">
-            <a:avLst>
-              <a:gd name="adj" fmla="val 6000"/>
-            </a:avLst>
-          </a:prstGeom>
-          <a:solidFill>
-            <a:srgbClr val="EAF3FF"/>
-          </a:solidFill>
-          <a:ln>
-            <a:noFill/>
-          </a:ln>
-          <a:effectLst/>
-        </p:spPr>
-        <p:style>
-          <a:lnRef idx="1">
-            <a:schemeClr val="accent1"/>
-          </a:lnRef>
-          <a:fillRef idx="3">
-            <a:schemeClr val="accent1"/>
-          </a:fillRef>
-          <a:effectRef idx="2">
-            <a:schemeClr val="accent1"/>
-          </a:effectRef>
-          <a:fontRef idx="minor">
-            <a:schemeClr val="lt1"/>
-          </a:fontRef>
-        </p:style>
-        <p:txBody>
-          <a:bodyPr rtlCol="0" anchor="ctr"/>
-          <a:lstStyle/>
-          <a:p/>
-        </p:txBody>
-      </p:sp>
-      <p:sp>
-        <p:nvSpPr>
-          <p:cNvPr id="22" name="TextBox 21"/>
-          <p:cNvSpPr txBox="1"/>
-          <p:nvPr/>
-        </p:nvSpPr>
-        <p:spPr>
-          <a:xfrm>
-            <a:off x="6301587" y="4076700"/>
-            <a:ext cx="1460449" cy="1173480"/>
-          </a:xfrm>
-          <a:prstGeom prst="rect">
-            <a:avLst/>
-          </a:prstGeom>
-          <a:noFill/>
-        </p:spPr>
-        <p:txBody>
-          <a:bodyPr wrap="square" anchor="t" lIns="0" rIns="0" tIns="0" bIns="0"/>
-          <a:lstStyle/>
-          <a:p>
-            <a:pPr algn="l"/>
-            <a:r>
-              <a:rPr sz="1700" b="0" i="0">
-                <a:solidFill>
-                  <a:srgbClr val="202122"/>
-                </a:solidFill>
-                <a:latin typeface="Calibri"/>
-              </a:rPr>
-              <a:t>Decide on a plan of action.</a:t>
-            </a:r>
-          </a:p>
-        </p:txBody>
-      </p:sp>
-      <p:sp>
-        <p:nvSpPr>
-          <p:cNvPr id="23" name="Oval 22"/>
-          <p:cNvSpPr/>
-          <p:nvPr/>
-        </p:nvSpPr>
-        <p:spPr>
-          <a:xfrm>
-            <a:off x="8583701" y="2385060"/>
-            <a:ext cx="640080" cy="640080"/>
-          </a:xfrm>
-          <a:prstGeom prst="ellipse">
-            <a:avLst/>
-          </a:prstGeom>
-          <a:solidFill>
-            <a:srgbClr val="F2B705"/>
-          </a:solidFill>
-          <a:ln>
-            <a:noFill/>
-          </a:ln>
-          <a:effectLst/>
-        </p:spPr>
-        <p:style>
-          <a:lnRef idx="1">
-            <a:schemeClr val="accent1"/>
-          </a:lnRef>
-          <a:fillRef idx="3">
-            <a:schemeClr val="accent1"/>
-          </a:fillRef>
-          <a:effectRef idx="2">
-            <a:schemeClr val="accent1"/>
-          </a:effectRef>
-          <a:fontRef idx="minor">
-            <a:schemeClr val="lt1"/>
-          </a:fontRef>
-        </p:style>
-        <p:txBody>
-          <a:bodyPr rtlCol="0" anchor="ctr" lIns="0" rIns="0" tIns="0" bIns="0"/>
-          <a:lstStyle/>
-          <a:p>
-            <a:pPr algn="ctr"/>
-            <a:r>
-              <a:rPr sz="2000" b="1">
-                <a:solidFill>
-                  <a:srgbClr val="202122"/>
-                </a:solidFill>
-                <a:latin typeface="Calibri"/>
-              </a:rPr>
-              <a:t>5</a:t>
-            </a:r>
-          </a:p>
-        </p:txBody>
-      </p:sp>
-      <p:sp>
-        <p:nvSpPr>
-          <p:cNvPr id="24" name="TextBox 23"/>
-          <p:cNvSpPr txBox="1"/>
-          <p:nvPr/>
-        </p:nvSpPr>
-        <p:spPr>
-          <a:xfrm>
-            <a:off x="8036356" y="3162300"/>
-            <a:ext cx="1734769" cy="731520"/>
-          </a:xfrm>
-          <a:prstGeom prst="rect">
-            <a:avLst/>
-          </a:prstGeom>
-          <a:noFill/>
-        </p:spPr>
-        <p:txBody>
-          <a:bodyPr wrap="square" anchor="t" lIns="0" rIns="0" tIns="0" bIns="0"/>
-          <a:lstStyle/>
-          <a:p>
-            <a:pPr algn="ctr"/>
-            <a:r>
-              <a:rPr sz="1700" b="1" i="0">
-                <a:solidFill>
-                  <a:srgbClr val="03306E"/>
-                </a:solidFill>
-                <a:latin typeface="Calibri"/>
-              </a:rPr>
-              <a:t>Implement</a:t>
-            </a:r>
-          </a:p>
-        </p:txBody>
-      </p:sp>
-      <p:sp>
-        <p:nvSpPr>
-          <p:cNvPr id="25" name="Rounded Rectangle 24"/>
-          <p:cNvSpPr/>
-          <p:nvPr/>
-        </p:nvSpPr>
-        <p:spPr>
-          <a:xfrm>
-            <a:off x="8036356" y="3939540"/>
-            <a:ext cx="1734769" cy="1447800"/>
-          </a:xfrm>
-          <a:prstGeom prst="roundRect">
-            <a:avLst>
-              <a:gd name="adj" fmla="val 6000"/>
-            </a:avLst>
-          </a:prstGeom>
-          <a:solidFill>
-            <a:srgbClr val="EAF3FF"/>
-          </a:solidFill>
-          <a:ln>
-            <a:noFill/>
-          </a:ln>
-          <a:effectLst/>
-        </p:spPr>
-        <p:style>
-          <a:lnRef idx="1">
-            <a:schemeClr val="accent1"/>
-          </a:lnRef>
-          <a:fillRef idx="3">
-            <a:schemeClr val="accent1"/>
-          </a:fillRef>
-          <a:effectRef idx="2">
-            <a:schemeClr val="accent1"/>
-          </a:effectRef>
-          <a:fontRef idx="minor">
-            <a:schemeClr val="lt1"/>
-          </a:fontRef>
-        </p:style>
-        <p:txBody>
-          <a:bodyPr rtlCol="0" anchor="ctr"/>
-          <a:lstStyle/>
-          <a:p/>
-        </p:txBody>
-      </p:sp>
-      <p:sp>
-        <p:nvSpPr>
-          <p:cNvPr id="26" name="TextBox 25"/>
-          <p:cNvSpPr txBox="1"/>
-          <p:nvPr/>
-        </p:nvSpPr>
-        <p:spPr>
-          <a:xfrm>
-            <a:off x="8173516" y="4076700"/>
-            <a:ext cx="1460449" cy="1173480"/>
-          </a:xfrm>
-          <a:prstGeom prst="rect">
-            <a:avLst/>
-          </a:prstGeom>
-          <a:noFill/>
-        </p:spPr>
-        <p:txBody>
-          <a:bodyPr wrap="square" anchor="t" lIns="0" rIns="0" tIns="0" bIns="0"/>
-          <a:lstStyle/>
-          <a:p>
-            <a:pPr algn="l"/>
-            <a:r>
-              <a:rPr sz="1700" b="0" i="0">
-                <a:solidFill>
-                  <a:srgbClr val="202122"/>
-                </a:solidFill>
-                <a:latin typeface="Calibri"/>
-              </a:rPr>
-              <a:t>Write and apply the fix.</a:t>
-            </a:r>
-          </a:p>
-        </p:txBody>
-      </p:sp>
-      <p:sp>
-        <p:nvSpPr>
-          <p:cNvPr id="27" name="Oval 26"/>
-          <p:cNvSpPr/>
-          <p:nvPr/>
-        </p:nvSpPr>
-        <p:spPr>
-          <a:xfrm>
-            <a:off x="10455630" y="2385060"/>
-            <a:ext cx="640080" cy="640080"/>
-          </a:xfrm>
-          <a:prstGeom prst="ellipse">
-            <a:avLst/>
-          </a:prstGeom>
-          <a:solidFill>
-            <a:srgbClr val="F2B705"/>
-          </a:solidFill>
-          <a:ln>
-            <a:noFill/>
-          </a:ln>
-          <a:effectLst/>
-        </p:spPr>
-        <p:style>
-          <a:lnRef idx="1">
-            <a:schemeClr val="accent1"/>
-          </a:lnRef>
-          <a:fillRef idx="3">
-            <a:schemeClr val="accent1"/>
-          </a:fillRef>
-          <a:effectRef idx="2">
-            <a:schemeClr val="accent1"/>
-          </a:effectRef>
-          <a:fontRef idx="minor">
-            <a:schemeClr val="lt1"/>
-          </a:fontRef>
-        </p:style>
-        <p:txBody>
-          <a:bodyPr rtlCol="0" anchor="ctr" lIns="0" rIns="0" tIns="0" bIns="0"/>
-          <a:lstStyle/>
-          <a:p>
-            <a:pPr algn="ctr"/>
-            <a:r>
-              <a:rPr sz="2000" b="1">
-                <a:solidFill>
-                  <a:srgbClr val="202122"/>
-                </a:solidFill>
-                <a:latin typeface="Calibri"/>
-              </a:rPr>
-              <a:t>6</a:t>
-            </a:r>
-          </a:p>
-        </p:txBody>
-      </p:sp>
-      <p:sp>
-        <p:nvSpPr>
-          <p:cNvPr id="28" name="TextBox 27"/>
-          <p:cNvSpPr txBox="1"/>
-          <p:nvPr/>
-        </p:nvSpPr>
-        <p:spPr>
-          <a:xfrm>
-            <a:off x="9908286" y="3162300"/>
-            <a:ext cx="1734769" cy="731520"/>
-          </a:xfrm>
-          <a:prstGeom prst="rect">
-            <a:avLst/>
-          </a:prstGeom>
-          <a:noFill/>
-        </p:spPr>
-        <p:txBody>
-          <a:bodyPr wrap="square" anchor="t" lIns="0" rIns="0" tIns="0" bIns="0"/>
-          <a:lstStyle/>
-          <a:p>
-            <a:pPr algn="ctr"/>
-            <a:r>
-              <a:rPr sz="1700" b="1" i="0">
-                <a:solidFill>
-                  <a:srgbClr val="03306E"/>
-                </a:solidFill>
-                <a:latin typeface="Calibri"/>
-              </a:rPr>
-              <a:t>Review</a:t>
-            </a:r>
-          </a:p>
-        </p:txBody>
-      </p:sp>
-      <p:sp>
-        <p:nvSpPr>
-          <p:cNvPr id="29" name="Rounded Rectangle 28"/>
-          <p:cNvSpPr/>
-          <p:nvPr/>
-        </p:nvSpPr>
-        <p:spPr>
-          <a:xfrm>
-            <a:off x="9908286" y="3939540"/>
-            <a:ext cx="1734769" cy="1447800"/>
-          </a:xfrm>
-          <a:prstGeom prst="roundRect">
-            <a:avLst>
-              <a:gd name="adj" fmla="val 6000"/>
-            </a:avLst>
-          </a:prstGeom>
-          <a:solidFill>
-            <a:srgbClr val="EAF3FF"/>
-          </a:solidFill>
-          <a:ln>
-            <a:noFill/>
-          </a:ln>
-          <a:effectLst/>
-        </p:spPr>
-        <p:style>
-          <a:lnRef idx="1">
-            <a:schemeClr val="accent1"/>
-          </a:lnRef>
-          <a:fillRef idx="3">
-            <a:schemeClr val="accent1"/>
-          </a:fillRef>
-          <a:effectRef idx="2">
-            <a:schemeClr val="accent1"/>
-          </a:effectRef>
-          <a:fontRef idx="minor">
-            <a:schemeClr val="lt1"/>
-          </a:fontRef>
-        </p:style>
-        <p:txBody>
-          <a:bodyPr rtlCol="0" anchor="ctr"/>
-          <a:lstStyle/>
-          <a:p/>
-        </p:txBody>
-      </p:sp>
-      <p:sp>
-        <p:nvSpPr>
-          <p:cNvPr id="30" name="TextBox 29"/>
-          <p:cNvSpPr txBox="1"/>
-          <p:nvPr/>
-        </p:nvSpPr>
-        <p:spPr>
-          <a:xfrm>
-            <a:off x="10045446" y="4076700"/>
-            <a:ext cx="1460449" cy="1173480"/>
-          </a:xfrm>
-          <a:prstGeom prst="rect">
-            <a:avLst/>
-          </a:prstGeom>
-          <a:noFill/>
-        </p:spPr>
-        <p:txBody>
-          <a:bodyPr wrap="square" anchor="t" lIns="0" rIns="0" tIns="0" bIns="0"/>
-          <a:lstStyle/>
-          <a:p>
-            <a:pPr algn="l"/>
-            <a:r>
-              <a:rPr sz="1700" b="0" i="0">
-                <a:solidFill>
-                  <a:srgbClr val="202122"/>
-                </a:solidFill>
-                <a:latin typeface="Calibri"/>
-              </a:rPr>
-              <a:t>Test that it works and nothing else broke.</a:t>
+              <a:rPr sz="1300" b="0" i="1">
+                <a:solidFill>
+                  <a:srgbClr val="54595D"/>
+                </a:solidFill>
+                <a:latin typeface="Calibri"/>
+              </a:rPr>
+              <a:t>Answer on mini whiteboards or in your book. Answers are in the speaker notes.</a:t>
             </a:r>
           </a:p>
         </p:txBody>
@@ -7318,7 +8721,7 @@
                 </a:solidFill>
                 <a:latin typeface="Cambria"/>
               </a:rPr>
-              <a:t>Check your understanding</a:t>
+              <a:t>Root cause analysis</a:t>
             </a:r>
           </a:p>
         </p:txBody>
@@ -7391,14 +8794,179 @@
       </p:sp>
       <p:sp>
         <p:nvSpPr>
-          <p:cNvPr id="6" name="Oval 5"/>
+          <p:cNvPr id="6" name="TextBox 5"/>
+          <p:cNvSpPr txBox="1"/>
+          <p:nvPr/>
+        </p:nvSpPr>
+        <p:spPr>
+          <a:xfrm>
+            <a:off x="548640" y="1554480"/>
+            <a:ext cx="6720840" cy="4617720"/>
+          </a:xfrm>
+          <a:prstGeom prst="rect">
+            <a:avLst/>
+          </a:prstGeom>
+          <a:noFill/>
+        </p:spPr>
+        <p:txBody>
+          <a:bodyPr wrap="square" lIns="0" rIns="0" tIns="0" bIns="0">
+            <a:spAutoFit/>
+          </a:bodyPr>
+          <a:lstStyle/>
+          <a:p>
+            <a:pPr>
+              <a:spcAft>
+                <a:spcPts val="1320"/>
+              </a:spcAft>
+            </a:pPr>
+            <a:r>
+              <a:rPr sz="2200" b="0">
+                <a:solidFill>
+                  <a:srgbClr val="202122"/>
+                </a:solidFill>
+                <a:latin typeface="Calibri"/>
+              </a:rPr>
+              <a:t>Fixing a symptom lets a bug come back. Root cause analysis finds why it happened.</a:t>
+            </a:r>
+          </a:p>
+          <a:p>
+            <a:pPr>
+              <a:spcAft>
+                <a:spcPts val="1320"/>
+              </a:spcAft>
+            </a:pPr>
+            <a:r>
+              <a:rPr sz="2200" b="1">
+                <a:solidFill>
+                  <a:srgbClr val="202122"/>
+                </a:solidFill>
+                <a:latin typeface="Calibri"/>
+              </a:rPr>
+              <a:t>Five whys:</a:t>
+            </a:r>
+            <a:r>
+              <a:rPr sz="2200" b="0">
+                <a:solidFill>
+                  <a:srgbClr val="202122"/>
+                </a:solidFill>
+                <a:latin typeface="Calibri"/>
+              </a:rPr>
+              <a:t> keep asking 'why?' until you reach a cause you can fix.</a:t>
+            </a:r>
+          </a:p>
+          <a:p>
+            <a:pPr>
+              <a:spcAft>
+                <a:spcPts val="1320"/>
+              </a:spcAft>
+            </a:pPr>
+            <a:r>
+              <a:rPr sz="2200" b="0">
+                <a:solidFill>
+                  <a:srgbClr val="202122"/>
+                </a:solidFill>
+                <a:latin typeface="Calibri"/>
+              </a:rPr>
+              <a:t>FMEA (Failure Mode and Effects Analysis): list every way part of the system could fail and the effect, then tackle the most serious.</a:t>
+            </a:r>
+          </a:p>
+          <a:p>
+            <a:pPr>
+              <a:spcAft>
+                <a:spcPts val="1320"/>
+              </a:spcAft>
+            </a:pPr>
+            <a:r>
+              <a:rPr sz="2200" b="1">
+                <a:solidFill>
+                  <a:srgbClr val="202122"/>
+                </a:solidFill>
+                <a:latin typeface="Calibri"/>
+              </a:rPr>
+              <a:t>Event tree analysis:</a:t>
+            </a:r>
+            <a:r>
+              <a:rPr sz="2200" b="0">
+                <a:solidFill>
+                  <a:srgbClr val="202122"/>
+                </a:solidFill>
+                <a:latin typeface="Calibri"/>
+              </a:rPr>
+              <a:t> start from one event and map every outcome.</a:t>
+            </a:r>
+          </a:p>
+          <a:p>
+            <a:pPr>
+              <a:spcAft>
+                <a:spcPts val="1320"/>
+              </a:spcAft>
+            </a:pPr>
+            <a:r>
+              <a:rPr sz="2200" b="0">
+                <a:solidFill>
+                  <a:srgbClr val="202122"/>
+                </a:solidFill>
+                <a:latin typeface="Calibri"/>
+              </a:rPr>
+              <a:t>Once found, the cause is logged, closed if fixed, or escalated to someone who can fix it.</a:t>
+            </a:r>
+          </a:p>
+        </p:txBody>
+      </p:sp>
+      <p:sp>
+        <p:nvSpPr>
+          <p:cNvPr id="7" name="Rounded Rectangle 6"/>
           <p:cNvSpPr/>
           <p:nvPr/>
         </p:nvSpPr>
         <p:spPr>
           <a:xfrm>
-            <a:off x="548640" y="1618488"/>
-            <a:ext cx="411480" cy="411480"/>
+            <a:off x="7772400" y="1554480"/>
+            <a:ext cx="3867912" cy="4526280"/>
+          </a:xfrm>
+          <a:prstGeom prst="roundRect">
+            <a:avLst>
+              <a:gd name="adj" fmla="val 8000"/>
+            </a:avLst>
+          </a:prstGeom>
+          <a:solidFill>
+            <a:srgbClr val="03306E"/>
+          </a:solidFill>
+          <a:ln>
+            <a:noFill/>
+          </a:ln>
+          <a:effectLst/>
+        </p:spPr>
+        <p:style>
+          <a:lnRef idx="1">
+            <a:schemeClr val="accent1"/>
+          </a:lnRef>
+          <a:fillRef idx="3">
+            <a:schemeClr val="accent1"/>
+          </a:fillRef>
+          <a:effectRef idx="2">
+            <a:schemeClr val="accent1"/>
+          </a:effectRef>
+          <a:fontRef idx="minor">
+            <a:schemeClr val="lt1"/>
+          </a:fontRef>
+        </p:style>
+        <p:txBody>
+          <a:bodyPr rtlCol="0" anchor="ctr"/>
+          <a:lstStyle/>
+          <a:p/>
+        </p:txBody>
+      </p:sp>
+      <p:sp>
+        <p:nvSpPr>
+          <p:cNvPr id="8" name="Oval 7"/>
+          <p:cNvSpPr/>
+          <p:nvPr/>
+        </p:nvSpPr>
+        <p:spPr>
+          <a:xfrm>
+            <a:off x="8046720" y="1828800"/>
+            <a:ext cx="548640" cy="548640"/>
           </a:xfrm>
           <a:prstGeom prst="ellipse">
             <a:avLst/>
@@ -7431,99 +8999,13 @@
           <a:p>
             <a:pPr algn="ctr"/>
             <a:r>
-              <a:rPr sz="1400" b="1">
+              <a:rPr sz="1300" b="1">
                 <a:solidFill>
                   <a:srgbClr val="202122"/>
                 </a:solidFill>
                 <a:latin typeface="Calibri"/>
               </a:rPr>
-              <a:t>1</a:t>
-            </a:r>
-          </a:p>
-        </p:txBody>
-      </p:sp>
-      <p:sp>
-        <p:nvSpPr>
-          <p:cNvPr id="7" name="TextBox 6"/>
-          <p:cNvSpPr txBox="1"/>
-          <p:nvPr/>
-        </p:nvSpPr>
-        <p:spPr>
-          <a:xfrm>
-            <a:off x="1234440" y="1600200"/>
-            <a:ext cx="10408615" cy="1030986"/>
-          </a:xfrm>
-          <a:prstGeom prst="rect">
-            <a:avLst/>
-          </a:prstGeom>
-          <a:noFill/>
-        </p:spPr>
-        <p:txBody>
-          <a:bodyPr wrap="square" anchor="t" lIns="0" rIns="0" tIns="0" bIns="0"/>
-          <a:lstStyle/>
-          <a:p>
-            <a:pPr algn="l"/>
-            <a:r>
-              <a:rPr sz="2200" b="0" i="0">
-                <a:solidFill>
-                  <a:srgbClr val="202122"/>
-                </a:solidFill>
-                <a:latin typeface="Calibri"/>
-              </a:rPr>
-              <a:t>Which approach builds a solution from small working components?</a:t>
-            </a:r>
-          </a:p>
-        </p:txBody>
-      </p:sp>
-      <p:sp>
-        <p:nvSpPr>
-          <p:cNvPr id="8" name="Oval 7"/>
-          <p:cNvSpPr/>
-          <p:nvPr/>
-        </p:nvSpPr>
-        <p:spPr>
-          <a:xfrm>
-            <a:off x="548640" y="2814066"/>
-            <a:ext cx="411480" cy="411480"/>
-          </a:xfrm>
-          <a:prstGeom prst="ellipse">
-            <a:avLst/>
-          </a:prstGeom>
-          <a:solidFill>
-            <a:srgbClr val="F2B705"/>
-          </a:solidFill>
-          <a:ln>
-            <a:noFill/>
-          </a:ln>
-          <a:effectLst/>
-        </p:spPr>
-        <p:style>
-          <a:lnRef idx="1">
-            <a:schemeClr val="accent1"/>
-          </a:lnRef>
-          <a:fillRef idx="3">
-            <a:schemeClr val="accent1"/>
-          </a:fillRef>
-          <a:effectRef idx="2">
-            <a:schemeClr val="accent1"/>
-          </a:effectRef>
-          <a:fontRef idx="minor">
-            <a:schemeClr val="lt1"/>
-          </a:fontRef>
-        </p:style>
-        <p:txBody>
-          <a:bodyPr rtlCol="0" anchor="ctr" lIns="0" rIns="0" tIns="0" bIns="0"/>
-          <a:lstStyle/>
-          <a:p>
-            <a:pPr algn="ctr"/>
-            <a:r>
-              <a:rPr sz="1400" b="1">
-                <a:solidFill>
-                  <a:srgbClr val="202122"/>
-                </a:solidFill>
-                <a:latin typeface="Calibri"/>
-              </a:rPr>
-              <a:t>2</a:t>
+              <a:t>e.g.</a:t>
             </a:r>
           </a:p>
         </p:txBody>
@@ -7536,8 +9018,8 @@
         </p:nvSpPr>
         <p:spPr>
           <a:xfrm>
-            <a:off x="1234440" y="2795778"/>
-            <a:ext cx="10408615" cy="1030986"/>
+            <a:off x="8046720" y="2560320"/>
+            <a:ext cx="3291840" cy="365760"/>
           </a:xfrm>
           <a:prstGeom prst="rect">
             <a:avLst/>
@@ -7550,80 +9032,27 @@
           <a:p>
             <a:pPr algn="l"/>
             <a:r>
-              <a:rPr sz="2200" b="0" i="0">
-                <a:solidFill>
-                  <a:srgbClr val="202122"/>
-                </a:solidFill>
-                <a:latin typeface="Calibri"/>
-              </a:rPr>
-              <a:t>What is the aim of the five whys?</a:t>
-            </a:r>
-          </a:p>
-        </p:txBody>
-      </p:sp>
-      <p:sp>
-        <p:nvSpPr>
-          <p:cNvPr id="10" name="Oval 9"/>
-          <p:cNvSpPr/>
-          <p:nvPr/>
-        </p:nvSpPr>
-        <p:spPr>
-          <a:xfrm>
-            <a:off x="548640" y="4009644"/>
-            <a:ext cx="411480" cy="411480"/>
-          </a:xfrm>
-          <a:prstGeom prst="ellipse">
-            <a:avLst/>
-          </a:prstGeom>
-          <a:solidFill>
-            <a:srgbClr val="F2B705"/>
-          </a:solidFill>
-          <a:ln>
-            <a:noFill/>
-          </a:ln>
-          <a:effectLst/>
-        </p:spPr>
-        <p:style>
-          <a:lnRef idx="1">
-            <a:schemeClr val="accent1"/>
-          </a:lnRef>
-          <a:fillRef idx="3">
-            <a:schemeClr val="accent1"/>
-          </a:fillRef>
-          <a:effectRef idx="2">
-            <a:schemeClr val="accent1"/>
-          </a:effectRef>
-          <a:fontRef idx="minor">
-            <a:schemeClr val="lt1"/>
-          </a:fontRef>
-        </p:style>
-        <p:txBody>
-          <a:bodyPr rtlCol="0" anchor="ctr" lIns="0" rIns="0" tIns="0" bIns="0"/>
-          <a:lstStyle/>
-          <a:p>
-            <a:pPr algn="ctr"/>
-            <a:r>
-              <a:rPr sz="1400" b="1">
-                <a:solidFill>
-                  <a:srgbClr val="202122"/>
-                </a:solidFill>
-                <a:latin typeface="Calibri"/>
-              </a:rPr>
-              <a:t>3</a:t>
-            </a:r>
-          </a:p>
-        </p:txBody>
-      </p:sp>
-      <p:sp>
-        <p:nvSpPr>
-          <p:cNvPr id="11" name="TextBox 10"/>
+              <a:rPr sz="1300" b="1" i="0">
+                <a:solidFill>
+                  <a:srgbClr val="A9C8F0"/>
+                </a:solidFill>
+                <a:latin typeface="Calibri"/>
+              </a:rPr>
+              <a:t>EXAMPLE</a:t>
+            </a:r>
+          </a:p>
+        </p:txBody>
+      </p:sp>
+      <p:sp>
+        <p:nvSpPr>
+          <p:cNvPr id="10" name="TextBox 9"/>
           <p:cNvSpPr txBox="1"/>
           <p:nvPr/>
         </p:nvSpPr>
         <p:spPr>
           <a:xfrm>
-            <a:off x="1234440" y="3991356"/>
-            <a:ext cx="10408615" cy="1030986"/>
+            <a:off x="8046720" y="2971800"/>
+            <a:ext cx="3291840" cy="2971800"/>
           </a:xfrm>
           <a:prstGeom prst="rect">
             <a:avLst/>
@@ -7636,99 +9065,13 @@
           <a:p>
             <a:pPr algn="l"/>
             <a:r>
-              <a:rPr sz="2200" b="0" i="0">
-                <a:solidFill>
-                  <a:srgbClr val="202122"/>
-                </a:solidFill>
-                <a:latin typeface="Calibri"/>
-              </a:rPr>
-              <a:t>What does FMEA stand for?</a:t>
-            </a:r>
-          </a:p>
-        </p:txBody>
-      </p:sp>
-      <p:sp>
-        <p:nvSpPr>
-          <p:cNvPr id="12" name="Oval 11"/>
-          <p:cNvSpPr/>
-          <p:nvPr/>
-        </p:nvSpPr>
-        <p:spPr>
-          <a:xfrm>
-            <a:off x="548640" y="5205221"/>
-            <a:ext cx="411480" cy="411480"/>
-          </a:xfrm>
-          <a:prstGeom prst="ellipse">
-            <a:avLst/>
-          </a:prstGeom>
-          <a:solidFill>
-            <a:srgbClr val="F2B705"/>
-          </a:solidFill>
-          <a:ln>
-            <a:noFill/>
-          </a:ln>
-          <a:effectLst/>
-        </p:spPr>
-        <p:style>
-          <a:lnRef idx="1">
-            <a:schemeClr val="accent1"/>
-          </a:lnRef>
-          <a:fillRef idx="3">
-            <a:schemeClr val="accent1"/>
-          </a:fillRef>
-          <a:effectRef idx="2">
-            <a:schemeClr val="accent1"/>
-          </a:effectRef>
-          <a:fontRef idx="minor">
-            <a:schemeClr val="lt1"/>
-          </a:fontRef>
-        </p:style>
-        <p:txBody>
-          <a:bodyPr rtlCol="0" anchor="ctr" lIns="0" rIns="0" tIns="0" bIns="0"/>
-          <a:lstStyle/>
-          <a:p>
-            <a:pPr algn="ctr"/>
-            <a:r>
-              <a:rPr sz="1400" b="1">
-                <a:solidFill>
-                  <a:srgbClr val="202122"/>
-                </a:solidFill>
-                <a:latin typeface="Calibri"/>
-              </a:rPr>
-              <a:t>4</a:t>
-            </a:r>
-          </a:p>
-        </p:txBody>
-      </p:sp>
-      <p:sp>
-        <p:nvSpPr>
-          <p:cNvPr id="13" name="TextBox 12"/>
-          <p:cNvSpPr txBox="1"/>
-          <p:nvPr/>
-        </p:nvSpPr>
-        <p:spPr>
-          <a:xfrm>
-            <a:off x="1234440" y="5186933"/>
-            <a:ext cx="10408615" cy="1030986"/>
-          </a:xfrm>
-          <a:prstGeom prst="rect">
-            <a:avLst/>
-          </a:prstGeom>
-          <a:noFill/>
-        </p:spPr>
-        <p:txBody>
-          <a:bodyPr wrap="square" anchor="t" lIns="0" rIns="0" tIns="0" bIns="0"/>
-          <a:lstStyle/>
-          <a:p>
-            <a:pPr algn="l"/>
-            <a:r>
-              <a:rPr sz="2200" b="0" i="0">
-                <a:solidFill>
-                  <a:srgbClr val="202122"/>
-                </a:solidFill>
-                <a:latin typeface="Calibri"/>
-              </a:rPr>
-              <a:t>What is the last step of the problem-solving strategy?</a:t>
+              <a:rPr sz="1900" b="0" i="0">
+                <a:solidFill>
+                  <a:srgbClr val="FFFFFF"/>
+                </a:solidFill>
+                <a:latin typeface="Cambria"/>
+              </a:rPr>
+              <a:t>Users are charged twice. Why? The pay button can be clicked twice. Why? It isn't disabled after the first click. Why? The requirement was never written. Fix: disable the button and add the requirement.</a:t>
             </a:r>
           </a:p>
         </p:txBody>
@@ -7820,7 +9163,7 @@
                 </a:solidFill>
                 <a:latin typeface="Cambria"/>
               </a:rPr>
-              <a:t>Answers</a:t>
+              <a:t>Root cause analysis</a:t>
             </a:r>
           </a:p>
         </p:txBody>
@@ -7893,14 +9236,58 @@
       </p:sp>
       <p:sp>
         <p:nvSpPr>
-          <p:cNvPr id="6" name="Oval 5"/>
+          <p:cNvPr id="6" name="Rounded Rectangle 5"/>
           <p:cNvSpPr/>
           <p:nvPr/>
         </p:nvSpPr>
         <p:spPr>
           <a:xfrm>
-            <a:off x="548640" y="1618488"/>
-            <a:ext cx="411480" cy="411480"/>
+            <a:off x="548640" y="1600200"/>
+            <a:ext cx="5410047" cy="2148840"/>
+          </a:xfrm>
+          <a:prstGeom prst="roundRect">
+            <a:avLst>
+              <a:gd name="adj" fmla="val 6000"/>
+            </a:avLst>
+          </a:prstGeom>
+          <a:solidFill>
+            <a:srgbClr val="EAF3FF"/>
+          </a:solidFill>
+          <a:ln>
+            <a:noFill/>
+          </a:ln>
+          <a:effectLst/>
+        </p:spPr>
+        <p:style>
+          <a:lnRef idx="1">
+            <a:schemeClr val="accent1"/>
+          </a:lnRef>
+          <a:fillRef idx="3">
+            <a:schemeClr val="accent1"/>
+          </a:fillRef>
+          <a:effectRef idx="2">
+            <a:schemeClr val="accent1"/>
+          </a:effectRef>
+          <a:fontRef idx="minor">
+            <a:schemeClr val="lt1"/>
+          </a:fontRef>
+        </p:style>
+        <p:txBody>
+          <a:bodyPr rtlCol="0" anchor="ctr"/>
+          <a:lstStyle/>
+          <a:p/>
+        </p:txBody>
+      </p:sp>
+      <p:sp>
+        <p:nvSpPr>
+          <p:cNvPr id="7" name="Oval 6"/>
+          <p:cNvSpPr/>
+          <p:nvPr/>
+        </p:nvSpPr>
+        <p:spPr>
+          <a:xfrm>
+            <a:off x="777240" y="1828800"/>
+            <a:ext cx="457200" cy="457200"/>
           </a:xfrm>
           <a:prstGeom prst="ellipse">
             <a:avLst/>
@@ -7933,7 +9320,7 @@
           <a:p>
             <a:pPr algn="ctr"/>
             <a:r>
-              <a:rPr sz="1400" b="1">
+              <a:rPr sz="1500" b="1">
                 <a:solidFill>
                   <a:srgbClr val="202122"/>
                 </a:solidFill>
@@ -7946,14 +9333,14 @@
       </p:sp>
       <p:sp>
         <p:nvSpPr>
-          <p:cNvPr id="7" name="TextBox 6"/>
+          <p:cNvPr id="8" name="TextBox 7"/>
           <p:cNvSpPr txBox="1"/>
           <p:nvPr/>
         </p:nvSpPr>
         <p:spPr>
           <a:xfrm>
-            <a:off x="1234440" y="1600200"/>
-            <a:ext cx="10408615" cy="1030986"/>
+            <a:off x="1371600" y="1801368"/>
+            <a:ext cx="4404207" cy="512064"/>
           </a:xfrm>
           <a:prstGeom prst="rect">
             <a:avLst/>
@@ -7961,43 +9348,109 @@
           <a:noFill/>
         </p:spPr>
         <p:txBody>
+          <a:bodyPr wrap="square" anchor="ctr" lIns="0" rIns="0" tIns="0" bIns="0"/>
+          <a:lstStyle/>
+          <a:p>
+            <a:pPr algn="l"/>
+            <a:r>
+              <a:rPr sz="1900" b="1" i="0">
+                <a:solidFill>
+                  <a:srgbClr val="03306E"/>
+                </a:solidFill>
+                <a:latin typeface="Calibri"/>
+              </a:rPr>
+              <a:t>Five whys</a:t>
+            </a:r>
+          </a:p>
+        </p:txBody>
+      </p:sp>
+      <p:sp>
+        <p:nvSpPr>
+          <p:cNvPr id="9" name="TextBox 8"/>
+          <p:cNvSpPr txBox="1"/>
+          <p:nvPr/>
+        </p:nvSpPr>
+        <p:spPr>
+          <a:xfrm>
+            <a:off x="777240" y="2468880"/>
+            <a:ext cx="4952847" cy="1143000"/>
+          </a:xfrm>
+          <a:prstGeom prst="rect">
+            <a:avLst/>
+          </a:prstGeom>
+          <a:noFill/>
+        </p:spPr>
+        <p:txBody>
           <a:bodyPr wrap="square" anchor="t" lIns="0" rIns="0" tIns="0" bIns="0"/>
           <a:lstStyle/>
           <a:p>
             <a:pPr algn="l"/>
             <a:r>
-              <a:rPr sz="1800" b="0" i="0">
-                <a:solidFill>
-                  <a:srgbClr val="54595D"/>
-                </a:solidFill>
-                <a:latin typeface="Calibri"/>
-              </a:rPr>
-              <a:t>Which approach builds a solution from small working components?</a:t>
-            </a:r>
-          </a:p>
-          <a:p>
-            <a:r>
-              <a:rPr sz="1800" b="1">
-                <a:solidFill>
-                  <a:srgbClr val="03306E"/>
-                </a:solidFill>
-                <a:latin typeface="Calibri"/>
-              </a:rPr>
-              <a:t>Bottom-up.</a:t>
-            </a:r>
-          </a:p>
-        </p:txBody>
-      </p:sp>
-      <p:sp>
-        <p:nvSpPr>
-          <p:cNvPr id="8" name="Oval 7"/>
+              <a:rPr sz="2000" b="0" i="0">
+                <a:solidFill>
+                  <a:srgbClr val="202122"/>
+                </a:solidFill>
+                <a:latin typeface="Calibri"/>
+              </a:rPr>
+              <a:t>Keep asking 'why?' until you reach the underlying cause, not just the symptom.</a:t>
+            </a:r>
+          </a:p>
+        </p:txBody>
+      </p:sp>
+      <p:sp>
+        <p:nvSpPr>
+          <p:cNvPr id="10" name="Rounded Rectangle 9"/>
           <p:cNvSpPr/>
           <p:nvPr/>
         </p:nvSpPr>
         <p:spPr>
           <a:xfrm>
-            <a:off x="548640" y="2814066"/>
-            <a:ext cx="411480" cy="411480"/>
+            <a:off x="6233007" y="1600200"/>
+            <a:ext cx="5410047" cy="2148840"/>
+          </a:xfrm>
+          <a:prstGeom prst="roundRect">
+            <a:avLst>
+              <a:gd name="adj" fmla="val 6000"/>
+            </a:avLst>
+          </a:prstGeom>
+          <a:solidFill>
+            <a:srgbClr val="EAF3FF"/>
+          </a:solidFill>
+          <a:ln>
+            <a:noFill/>
+          </a:ln>
+          <a:effectLst/>
+        </p:spPr>
+        <p:style>
+          <a:lnRef idx="1">
+            <a:schemeClr val="accent1"/>
+          </a:lnRef>
+          <a:fillRef idx="3">
+            <a:schemeClr val="accent1"/>
+          </a:fillRef>
+          <a:effectRef idx="2">
+            <a:schemeClr val="accent1"/>
+          </a:effectRef>
+          <a:fontRef idx="minor">
+            <a:schemeClr val="lt1"/>
+          </a:fontRef>
+        </p:style>
+        <p:txBody>
+          <a:bodyPr rtlCol="0" anchor="ctr"/>
+          <a:lstStyle/>
+          <a:p/>
+        </p:txBody>
+      </p:sp>
+      <p:sp>
+        <p:nvSpPr>
+          <p:cNvPr id="11" name="Oval 10"/>
+          <p:cNvSpPr/>
+          <p:nvPr/>
+        </p:nvSpPr>
+        <p:spPr>
+          <a:xfrm>
+            <a:off x="6461607" y="1828800"/>
+            <a:ext cx="457200" cy="457200"/>
           </a:xfrm>
           <a:prstGeom prst="ellipse">
             <a:avLst/>
@@ -8030,7 +9483,7 @@
           <a:p>
             <a:pPr algn="ctr"/>
             <a:r>
-              <a:rPr sz="1400" b="1">
+              <a:rPr sz="1500" b="1">
                 <a:solidFill>
                   <a:srgbClr val="202122"/>
                 </a:solidFill>
@@ -8043,14 +9496,14 @@
       </p:sp>
       <p:sp>
         <p:nvSpPr>
-          <p:cNvPr id="9" name="TextBox 8"/>
+          <p:cNvPr id="12" name="TextBox 11"/>
           <p:cNvSpPr txBox="1"/>
           <p:nvPr/>
         </p:nvSpPr>
         <p:spPr>
           <a:xfrm>
-            <a:off x="1234440" y="2795778"/>
-            <a:ext cx="10408615" cy="1030986"/>
+            <a:off x="7055967" y="1801368"/>
+            <a:ext cx="4404207" cy="512064"/>
           </a:xfrm>
           <a:prstGeom prst="rect">
             <a:avLst/>
@@ -8058,43 +9511,109 @@
           <a:noFill/>
         </p:spPr>
         <p:txBody>
+          <a:bodyPr wrap="square" anchor="ctr" lIns="0" rIns="0" tIns="0" bIns="0"/>
+          <a:lstStyle/>
+          <a:p>
+            <a:pPr algn="l"/>
+            <a:r>
+              <a:rPr sz="1900" b="1" i="0">
+                <a:solidFill>
+                  <a:srgbClr val="03306E"/>
+                </a:solidFill>
+                <a:latin typeface="Calibri"/>
+              </a:rPr>
+              <a:t>FMEA</a:t>
+            </a:r>
+          </a:p>
+        </p:txBody>
+      </p:sp>
+      <p:sp>
+        <p:nvSpPr>
+          <p:cNvPr id="13" name="TextBox 12"/>
+          <p:cNvSpPr txBox="1"/>
+          <p:nvPr/>
+        </p:nvSpPr>
+        <p:spPr>
+          <a:xfrm>
+            <a:off x="6461607" y="2468880"/>
+            <a:ext cx="4952847" cy="1143000"/>
+          </a:xfrm>
+          <a:prstGeom prst="rect">
+            <a:avLst/>
+          </a:prstGeom>
+          <a:noFill/>
+        </p:spPr>
+        <p:txBody>
           <a:bodyPr wrap="square" anchor="t" lIns="0" rIns="0" tIns="0" bIns="0"/>
           <a:lstStyle/>
           <a:p>
             <a:pPr algn="l"/>
             <a:r>
-              <a:rPr sz="1800" b="0" i="0">
-                <a:solidFill>
-                  <a:srgbClr val="54595D"/>
-                </a:solidFill>
-                <a:latin typeface="Calibri"/>
-              </a:rPr>
-              <a:t>What is the aim of the five whys?</a:t>
-            </a:r>
-          </a:p>
-          <a:p>
-            <a:r>
-              <a:rPr sz="1800" b="1">
-                <a:solidFill>
-                  <a:srgbClr val="03306E"/>
-                </a:solidFill>
-                <a:latin typeface="Calibri"/>
-              </a:rPr>
-              <a:t>To find the underlying root cause rather than the symptom.</a:t>
-            </a:r>
-          </a:p>
-        </p:txBody>
-      </p:sp>
-      <p:sp>
-        <p:nvSpPr>
-          <p:cNvPr id="10" name="Oval 9"/>
+              <a:rPr sz="2000" b="0" i="0">
+                <a:solidFill>
+                  <a:srgbClr val="202122"/>
+                </a:solidFill>
+                <a:latin typeface="Calibri"/>
+              </a:rPr>
+              <a:t>Failure Mode and Effects Analysis lists every way a component could fail and the effect of each.</a:t>
+            </a:r>
+          </a:p>
+        </p:txBody>
+      </p:sp>
+      <p:sp>
+        <p:nvSpPr>
+          <p:cNvPr id="14" name="Rounded Rectangle 13"/>
           <p:cNvSpPr/>
           <p:nvPr/>
         </p:nvSpPr>
         <p:spPr>
           <a:xfrm>
-            <a:off x="548640" y="4009644"/>
-            <a:ext cx="411480" cy="411480"/>
+            <a:off x="548640" y="4023360"/>
+            <a:ext cx="5410047" cy="2148840"/>
+          </a:xfrm>
+          <a:prstGeom prst="roundRect">
+            <a:avLst>
+              <a:gd name="adj" fmla="val 6000"/>
+            </a:avLst>
+          </a:prstGeom>
+          <a:solidFill>
+            <a:srgbClr val="EAF3FF"/>
+          </a:solidFill>
+          <a:ln>
+            <a:noFill/>
+          </a:ln>
+          <a:effectLst/>
+        </p:spPr>
+        <p:style>
+          <a:lnRef idx="1">
+            <a:schemeClr val="accent1"/>
+          </a:lnRef>
+          <a:fillRef idx="3">
+            <a:schemeClr val="accent1"/>
+          </a:fillRef>
+          <a:effectRef idx="2">
+            <a:schemeClr val="accent1"/>
+          </a:effectRef>
+          <a:fontRef idx="minor">
+            <a:schemeClr val="lt1"/>
+          </a:fontRef>
+        </p:style>
+        <p:txBody>
+          <a:bodyPr rtlCol="0" anchor="ctr"/>
+          <a:lstStyle/>
+          <a:p/>
+        </p:txBody>
+      </p:sp>
+      <p:sp>
+        <p:nvSpPr>
+          <p:cNvPr id="15" name="Oval 14"/>
+          <p:cNvSpPr/>
+          <p:nvPr/>
+        </p:nvSpPr>
+        <p:spPr>
+          <a:xfrm>
+            <a:off x="777240" y="4251960"/>
+            <a:ext cx="457200" cy="457200"/>
           </a:xfrm>
           <a:prstGeom prst="ellipse">
             <a:avLst/>
@@ -8127,7 +9646,7 @@
           <a:p>
             <a:pPr algn="ctr"/>
             <a:r>
-              <a:rPr sz="1400" b="1">
+              <a:rPr sz="1500" b="1">
                 <a:solidFill>
                   <a:srgbClr val="202122"/>
                 </a:solidFill>
@@ -8140,14 +9659,14 @@
       </p:sp>
       <p:sp>
         <p:nvSpPr>
-          <p:cNvPr id="11" name="TextBox 10"/>
+          <p:cNvPr id="16" name="TextBox 15"/>
           <p:cNvSpPr txBox="1"/>
           <p:nvPr/>
         </p:nvSpPr>
         <p:spPr>
           <a:xfrm>
-            <a:off x="1234440" y="3991356"/>
-            <a:ext cx="10408615" cy="1030986"/>
+            <a:off x="1371600" y="4224528"/>
+            <a:ext cx="4404207" cy="512064"/>
           </a:xfrm>
           <a:prstGeom prst="rect">
             <a:avLst/>
@@ -8155,43 +9674,109 @@
           <a:noFill/>
         </p:spPr>
         <p:txBody>
+          <a:bodyPr wrap="square" anchor="ctr" lIns="0" rIns="0" tIns="0" bIns="0"/>
+          <a:lstStyle/>
+          <a:p>
+            <a:pPr algn="l"/>
+            <a:r>
+              <a:rPr sz="1900" b="1" i="0">
+                <a:solidFill>
+                  <a:srgbClr val="03306E"/>
+                </a:solidFill>
+                <a:latin typeface="Calibri"/>
+              </a:rPr>
+              <a:t>Event tree analysis</a:t>
+            </a:r>
+          </a:p>
+        </p:txBody>
+      </p:sp>
+      <p:sp>
+        <p:nvSpPr>
+          <p:cNvPr id="17" name="TextBox 16"/>
+          <p:cNvSpPr txBox="1"/>
+          <p:nvPr/>
+        </p:nvSpPr>
+        <p:spPr>
+          <a:xfrm>
+            <a:off x="777240" y="4892040"/>
+            <a:ext cx="4952847" cy="1143000"/>
+          </a:xfrm>
+          <a:prstGeom prst="rect">
+            <a:avLst/>
+          </a:prstGeom>
+          <a:noFill/>
+        </p:spPr>
+        <p:txBody>
           <a:bodyPr wrap="square" anchor="t" lIns="0" rIns="0" tIns="0" bIns="0"/>
           <a:lstStyle/>
           <a:p>
             <a:pPr algn="l"/>
             <a:r>
-              <a:rPr sz="1800" b="0" i="0">
-                <a:solidFill>
-                  <a:srgbClr val="54595D"/>
-                </a:solidFill>
-                <a:latin typeface="Calibri"/>
-              </a:rPr>
-              <a:t>What does FMEA stand for?</a:t>
-            </a:r>
-          </a:p>
-          <a:p>
-            <a:r>
-              <a:rPr sz="1800" b="1">
-                <a:solidFill>
-                  <a:srgbClr val="03306E"/>
-                </a:solidFill>
-                <a:latin typeface="Calibri"/>
-              </a:rPr>
-              <a:t>Failure Mode and Effects Analysis.</a:t>
-            </a:r>
-          </a:p>
-        </p:txBody>
-      </p:sp>
-      <p:sp>
-        <p:nvSpPr>
-          <p:cNvPr id="12" name="Oval 11"/>
+              <a:rPr sz="2000" b="0" i="0">
+                <a:solidFill>
+                  <a:srgbClr val="202122"/>
+                </a:solidFill>
+                <a:latin typeface="Calibri"/>
+              </a:rPr>
+              <a:t>Starts from one event and maps every outcome that could follow.</a:t>
+            </a:r>
+          </a:p>
+        </p:txBody>
+      </p:sp>
+      <p:sp>
+        <p:nvSpPr>
+          <p:cNvPr id="18" name="Rounded Rectangle 17"/>
           <p:cNvSpPr/>
           <p:nvPr/>
         </p:nvSpPr>
         <p:spPr>
           <a:xfrm>
-            <a:off x="548640" y="5205221"/>
-            <a:ext cx="411480" cy="411480"/>
+            <a:off x="6233007" y="4023360"/>
+            <a:ext cx="5410047" cy="2148840"/>
+          </a:xfrm>
+          <a:prstGeom prst="roundRect">
+            <a:avLst>
+              <a:gd name="adj" fmla="val 6000"/>
+            </a:avLst>
+          </a:prstGeom>
+          <a:solidFill>
+            <a:srgbClr val="EAF3FF"/>
+          </a:solidFill>
+          <a:ln>
+            <a:noFill/>
+          </a:ln>
+          <a:effectLst/>
+        </p:spPr>
+        <p:style>
+          <a:lnRef idx="1">
+            <a:schemeClr val="accent1"/>
+          </a:lnRef>
+          <a:fillRef idx="3">
+            <a:schemeClr val="accent1"/>
+          </a:fillRef>
+          <a:effectRef idx="2">
+            <a:schemeClr val="accent1"/>
+          </a:effectRef>
+          <a:fontRef idx="minor">
+            <a:schemeClr val="lt1"/>
+          </a:fontRef>
+        </p:style>
+        <p:txBody>
+          <a:bodyPr rtlCol="0" anchor="ctr"/>
+          <a:lstStyle/>
+          <a:p/>
+        </p:txBody>
+      </p:sp>
+      <p:sp>
+        <p:nvSpPr>
+          <p:cNvPr id="19" name="Oval 18"/>
+          <p:cNvSpPr/>
+          <p:nvPr/>
+        </p:nvSpPr>
+        <p:spPr>
+          <a:xfrm>
+            <a:off x="6461607" y="4251960"/>
+            <a:ext cx="457200" cy="457200"/>
           </a:xfrm>
           <a:prstGeom prst="ellipse">
             <a:avLst/>
@@ -8224,7 +9809,7 @@
           <a:p>
             <a:pPr algn="ctr"/>
             <a:r>
-              <a:rPr sz="1400" b="1">
+              <a:rPr sz="1500" b="1">
                 <a:solidFill>
                   <a:srgbClr val="202122"/>
                 </a:solidFill>
@@ -8237,14 +9822,14 @@
       </p:sp>
       <p:sp>
         <p:nvSpPr>
-          <p:cNvPr id="13" name="TextBox 12"/>
+          <p:cNvPr id="20" name="TextBox 19"/>
           <p:cNvSpPr txBox="1"/>
           <p:nvPr/>
         </p:nvSpPr>
         <p:spPr>
           <a:xfrm>
-            <a:off x="1234440" y="5186933"/>
-            <a:ext cx="10408615" cy="1030986"/>
+            <a:off x="7055967" y="4224528"/>
+            <a:ext cx="4404207" cy="512064"/>
           </a:xfrm>
           <a:prstGeom prst="rect">
             <a:avLst/>
@@ -8252,29 +9837,51 @@
           <a:noFill/>
         </p:spPr>
         <p:txBody>
+          <a:bodyPr wrap="square" anchor="ctr" lIns="0" rIns="0" tIns="0" bIns="0"/>
+          <a:lstStyle/>
+          <a:p>
+            <a:pPr algn="l"/>
+            <a:r>
+              <a:rPr sz="1900" b="1" i="0">
+                <a:solidFill>
+                  <a:srgbClr val="03306E"/>
+                </a:solidFill>
+                <a:latin typeface="Calibri"/>
+              </a:rPr>
+              <a:t>Then act</a:t>
+            </a:r>
+          </a:p>
+        </p:txBody>
+      </p:sp>
+      <p:sp>
+        <p:nvSpPr>
+          <p:cNvPr id="21" name="TextBox 20"/>
+          <p:cNvSpPr txBox="1"/>
+          <p:nvPr/>
+        </p:nvSpPr>
+        <p:spPr>
+          <a:xfrm>
+            <a:off x="6461607" y="4892040"/>
+            <a:ext cx="4952847" cy="1143000"/>
+          </a:xfrm>
+          <a:prstGeom prst="rect">
+            <a:avLst/>
+          </a:prstGeom>
+          <a:noFill/>
+        </p:spPr>
+        <p:txBody>
           <a:bodyPr wrap="square" anchor="t" lIns="0" rIns="0" tIns="0" bIns="0"/>
           <a:lstStyle/>
           <a:p>
             <a:pPr algn="l"/>
             <a:r>
-              <a:rPr sz="1800" b="0" i="0">
-                <a:solidFill>
-                  <a:srgbClr val="54595D"/>
-                </a:solidFill>
-                <a:latin typeface="Calibri"/>
-              </a:rPr>
-              <a:t>What is the last step of the problem-solving strategy?</a:t>
-            </a:r>
-          </a:p>
-          <a:p>
-            <a:r>
-              <a:rPr sz="1800" b="1">
-                <a:solidFill>
-                  <a:srgbClr val="03306E"/>
-                </a:solidFill>
-                <a:latin typeface="Calibri"/>
-              </a:rPr>
-              <a:t>Review the solution.</a:t>
+              <a:rPr sz="2000" b="0" i="0">
+                <a:solidFill>
+                  <a:srgbClr val="202122"/>
+                </a:solidFill>
+                <a:latin typeface="Calibri"/>
+              </a:rPr>
+              <a:t>Log it, close it, or escalate it to a manager, specialist or third party.</a:t>
             </a:r>
           </a:p>
         </p:txBody>
@@ -8366,7 +9973,7 @@
                 </a:solidFill>
                 <a:latin typeface="Cambria"/>
               </a:rPr>
-              <a:t>Activity: Root cause a bug</a:t>
+              <a:t>Quick check: Root cause analysis</a:t>
             </a:r>
           </a:p>
         </p:txBody>
@@ -8439,19 +10046,17 @@
       </p:sp>
       <p:sp>
         <p:nvSpPr>
-          <p:cNvPr id="6" name="Rounded Rectangle 5"/>
+          <p:cNvPr id="6" name="Oval 5"/>
           <p:cNvSpPr/>
           <p:nvPr/>
         </p:nvSpPr>
         <p:spPr>
           <a:xfrm>
-            <a:off x="548640" y="1508760"/>
-            <a:ext cx="2011680" cy="457200"/>
-          </a:xfrm>
-          <a:prstGeom prst="roundRect">
-            <a:avLst>
-              <a:gd name="adj" fmla="val 50000"/>
-            </a:avLst>
+            <a:off x="548640" y="1691640"/>
+            <a:ext cx="502920" cy="502920"/>
+          </a:xfrm>
+          <a:prstGeom prst="ellipse">
+            <a:avLst/>
           </a:prstGeom>
           <a:solidFill>
             <a:srgbClr val="F2B705"/>
@@ -8476,9 +10081,20 @@
           </a:fontRef>
         </p:style>
         <p:txBody>
-          <a:bodyPr rtlCol="0" anchor="ctr"/>
-          <a:lstStyle/>
-          <a:p/>
+          <a:bodyPr rtlCol="0" anchor="ctr" lIns="0" rIns="0" tIns="0" bIns="0"/>
+          <a:lstStyle/>
+          <a:p>
+            <a:pPr algn="ctr"/>
+            <a:r>
+              <a:rPr sz="1600" b="1">
+                <a:solidFill>
+                  <a:srgbClr val="202122"/>
+                </a:solidFill>
+                <a:latin typeface="Calibri"/>
+              </a:rPr>
+              <a:t>1</a:t>
+            </a:r>
+          </a:p>
         </p:txBody>
       </p:sp>
       <p:sp>
@@ -8489,8 +10105,8 @@
         </p:nvSpPr>
         <p:spPr>
           <a:xfrm>
-            <a:off x="548640" y="1508760"/>
-            <a:ext cx="2011680" cy="457200"/>
+            <a:off x="1371600" y="1645920"/>
+            <a:ext cx="10271455" cy="1188720"/>
           </a:xfrm>
           <a:prstGeom prst="rect">
             <a:avLst/>
@@ -8498,71 +10114,38 @@
           <a:noFill/>
         </p:spPr>
         <p:txBody>
-          <a:bodyPr wrap="square" anchor="ctr" lIns="0" rIns="0" tIns="0" bIns="0"/>
-          <a:lstStyle/>
-          <a:p>
-            <a:pPr algn="ctr"/>
-            <a:r>
-              <a:rPr sz="1400" b="1" i="0">
+          <a:bodyPr wrap="square" anchor="t" lIns="0" rIns="0" tIns="0" bIns="0"/>
+          <a:lstStyle/>
+          <a:p>
+            <a:pPr algn="l"/>
+            <a:r>
+              <a:rPr sz="2400" b="0" i="0">
                 <a:solidFill>
                   <a:srgbClr val="202122"/>
                 </a:solidFill>
                 <a:latin typeface="Calibri"/>
               </a:rPr>
-              <a:t>20 minutes</a:t>
-            </a:r>
-          </a:p>
-        </p:txBody>
-      </p:sp>
-      <p:sp>
-        <p:nvSpPr>
-          <p:cNvPr id="8" name="TextBox 7"/>
-          <p:cNvSpPr txBox="1"/>
-          <p:nvPr/>
-        </p:nvSpPr>
-        <p:spPr>
-          <a:xfrm>
-            <a:off x="2743200" y="1508760"/>
-            <a:ext cx="4754880" cy="457200"/>
-          </a:xfrm>
-          <a:prstGeom prst="rect">
-            <a:avLst/>
-          </a:prstGeom>
-          <a:noFill/>
-        </p:spPr>
-        <p:txBody>
-          <a:bodyPr wrap="square" anchor="ctr" lIns="0" rIns="0" tIns="0" bIns="0"/>
-          <a:lstStyle/>
-          <a:p>
-            <a:pPr algn="l"/>
-            <a:r>
-              <a:rPr sz="1400" b="0" i="1">
-                <a:solidFill>
-                  <a:srgbClr val="54595D"/>
-                </a:solidFill>
-                <a:latin typeface="Calibri"/>
-              </a:rPr>
-              <a:t>Small groups</a:t>
-            </a:r>
-          </a:p>
-        </p:txBody>
-      </p:sp>
-      <p:sp>
-        <p:nvSpPr>
-          <p:cNvPr id="9" name="Oval 8"/>
+              <a:t>What is the aim of the five whys?</a:t>
+            </a:r>
+          </a:p>
+        </p:txBody>
+      </p:sp>
+      <p:sp>
+        <p:nvSpPr>
+          <p:cNvPr id="8" name="Oval 7"/>
           <p:cNvSpPr/>
           <p:nvPr/>
         </p:nvSpPr>
         <p:spPr>
           <a:xfrm>
-            <a:off x="548640" y="2482596"/>
-            <a:ext cx="384048" cy="384048"/>
+            <a:off x="548640" y="3108960"/>
+            <a:ext cx="502920" cy="502920"/>
           </a:xfrm>
           <a:prstGeom prst="ellipse">
             <a:avLst/>
           </a:prstGeom>
           <a:solidFill>
-            <a:srgbClr val="0645AD"/>
+            <a:srgbClr val="F2B705"/>
           </a:solidFill>
           <a:ln>
             <a:noFill/>
@@ -8589,27 +10172,27 @@
           <a:p>
             <a:pPr algn="ctr"/>
             <a:r>
-              <a:rPr sz="1300" b="1">
-                <a:solidFill>
-                  <a:srgbClr val="FFFFFF"/>
-                </a:solidFill>
-                <a:latin typeface="Calibri"/>
-              </a:rPr>
-              <a:t>1</a:t>
-            </a:r>
-          </a:p>
-        </p:txBody>
-      </p:sp>
-      <p:sp>
-        <p:nvSpPr>
-          <p:cNvPr id="10" name="TextBox 9"/>
+              <a:rPr sz="1600" b="1">
+                <a:solidFill>
+                  <a:srgbClr val="202122"/>
+                </a:solidFill>
+                <a:latin typeface="Calibri"/>
+              </a:rPr>
+              <a:t>2</a:t>
+            </a:r>
+          </a:p>
+        </p:txBody>
+      </p:sp>
+      <p:sp>
+        <p:nvSpPr>
+          <p:cNvPr id="9" name="TextBox 8"/>
           <p:cNvSpPr txBox="1"/>
           <p:nvPr/>
         </p:nvSpPr>
         <p:spPr>
           <a:xfrm>
-            <a:off x="1143000" y="2240280"/>
-            <a:ext cx="5943600" cy="868680"/>
+            <a:off x="1371600" y="3063240"/>
+            <a:ext cx="10271455" cy="1188720"/>
           </a:xfrm>
           <a:prstGeom prst="rect">
             <a:avLst/>
@@ -8617,38 +10200,38 @@
           <a:noFill/>
         </p:spPr>
         <p:txBody>
-          <a:bodyPr wrap="square" anchor="ctr" lIns="0" rIns="0" tIns="0" bIns="0"/>
+          <a:bodyPr wrap="square" anchor="t" lIns="0" rIns="0" tIns="0" bIns="0"/>
           <a:lstStyle/>
           <a:p>
             <a:pPr algn="l"/>
             <a:r>
-              <a:rPr sz="1700" b="0" i="0">
+              <a:rPr sz="2400" b="0" i="0">
                 <a:solidFill>
                   <a:srgbClr val="202122"/>
                 </a:solidFill>
                 <a:latin typeface="Calibri"/>
               </a:rPr>
-              <a:t>Scenario: an online shop charges some customers twice.</a:t>
-            </a:r>
-          </a:p>
-        </p:txBody>
-      </p:sp>
-      <p:sp>
-        <p:nvSpPr>
-          <p:cNvPr id="11" name="Oval 10"/>
+              <a:t>What does FMEA list?</a:t>
+            </a:r>
+          </a:p>
+        </p:txBody>
+      </p:sp>
+      <p:sp>
+        <p:nvSpPr>
+          <p:cNvPr id="10" name="Oval 9"/>
           <p:cNvSpPr/>
           <p:nvPr/>
         </p:nvSpPr>
         <p:spPr>
           <a:xfrm>
-            <a:off x="548640" y="3461004"/>
-            <a:ext cx="384048" cy="384048"/>
+            <a:off x="548640" y="4526280"/>
+            <a:ext cx="502920" cy="502920"/>
           </a:xfrm>
           <a:prstGeom prst="ellipse">
             <a:avLst/>
           </a:prstGeom>
           <a:solidFill>
-            <a:srgbClr val="0645AD"/>
+            <a:srgbClr val="F2B705"/>
           </a:solidFill>
           <a:ln>
             <a:noFill/>
@@ -8675,13 +10258,46 @@
           <a:p>
             <a:pPr algn="ctr"/>
             <a:r>
-              <a:rPr sz="1300" b="1">
-                <a:solidFill>
-                  <a:srgbClr val="FFFFFF"/>
-                </a:solidFill>
-                <a:latin typeface="Calibri"/>
-              </a:rPr>
-              <a:t>2</a:t>
+              <a:rPr sz="1600" b="1">
+                <a:solidFill>
+                  <a:srgbClr val="202122"/>
+                </a:solidFill>
+                <a:latin typeface="Calibri"/>
+              </a:rPr>
+              <a:t>3</a:t>
+            </a:r>
+          </a:p>
+        </p:txBody>
+      </p:sp>
+      <p:sp>
+        <p:nvSpPr>
+          <p:cNvPr id="11" name="TextBox 10"/>
+          <p:cNvSpPr txBox="1"/>
+          <p:nvPr/>
+        </p:nvSpPr>
+        <p:spPr>
+          <a:xfrm>
+            <a:off x="1371600" y="4480560"/>
+            <a:ext cx="10271455" cy="1188720"/>
+          </a:xfrm>
+          <a:prstGeom prst="rect">
+            <a:avLst/>
+          </a:prstGeom>
+          <a:noFill/>
+        </p:spPr>
+        <p:txBody>
+          <a:bodyPr wrap="square" anchor="t" lIns="0" rIns="0" tIns="0" bIns="0"/>
+          <a:lstStyle/>
+          <a:p>
+            <a:pPr algn="l"/>
+            <a:r>
+              <a:rPr sz="2400" b="0" i="0">
+                <a:solidFill>
+                  <a:srgbClr val="202122"/>
+                </a:solidFill>
+                <a:latin typeface="Calibri"/>
+              </a:rPr>
+              <a:t>What happens to a root cause you can't fix yourself?</a:t>
             </a:r>
           </a:p>
         </p:txBody>
@@ -8694,8 +10310,8 @@
         </p:nvSpPr>
         <p:spPr>
           <a:xfrm>
-            <a:off x="1143000" y="3218688"/>
-            <a:ext cx="5943600" cy="868680"/>
+            <a:off x="548640" y="5852160"/>
+            <a:ext cx="11094415" cy="365760"/>
           </a:xfrm>
           <a:prstGeom prst="rect">
             <a:avLst/>
@@ -8703,353 +10319,18 @@
           <a:noFill/>
         </p:spPr>
         <p:txBody>
-          <a:bodyPr wrap="square" anchor="ctr" lIns="0" rIns="0" tIns="0" bIns="0"/>
+          <a:bodyPr wrap="square" anchor="t" lIns="0" rIns="0" tIns="0" bIns="0"/>
           <a:lstStyle/>
           <a:p>
             <a:pPr algn="l"/>
             <a:r>
-              <a:rPr sz="1700" b="0" i="0">
-                <a:solidFill>
-                  <a:srgbClr val="202122"/>
-                </a:solidFill>
-                <a:latin typeface="Calibri"/>
-              </a:rPr>
-              <a:t>Use the five whys to reach a believable root cause.</a:t>
-            </a:r>
-          </a:p>
-        </p:txBody>
-      </p:sp>
-      <p:sp>
-        <p:nvSpPr>
-          <p:cNvPr id="13" name="Oval 12"/>
-          <p:cNvSpPr/>
-          <p:nvPr/>
-        </p:nvSpPr>
-        <p:spPr>
-          <a:xfrm>
-            <a:off x="548640" y="4439412"/>
-            <a:ext cx="384048" cy="384048"/>
-          </a:xfrm>
-          <a:prstGeom prst="ellipse">
-            <a:avLst/>
-          </a:prstGeom>
-          <a:solidFill>
-            <a:srgbClr val="0645AD"/>
-          </a:solidFill>
-          <a:ln>
-            <a:noFill/>
-          </a:ln>
-          <a:effectLst/>
-        </p:spPr>
-        <p:style>
-          <a:lnRef idx="1">
-            <a:schemeClr val="accent1"/>
-          </a:lnRef>
-          <a:fillRef idx="3">
-            <a:schemeClr val="accent1"/>
-          </a:fillRef>
-          <a:effectRef idx="2">
-            <a:schemeClr val="accent1"/>
-          </a:effectRef>
-          <a:fontRef idx="minor">
-            <a:schemeClr val="lt1"/>
-          </a:fontRef>
-        </p:style>
-        <p:txBody>
-          <a:bodyPr rtlCol="0" anchor="ctr" lIns="0" rIns="0" tIns="0" bIns="0"/>
-          <a:lstStyle/>
-          <a:p>
-            <a:pPr algn="ctr"/>
-            <a:r>
-              <a:rPr sz="1300" b="1">
-                <a:solidFill>
-                  <a:srgbClr val="FFFFFF"/>
-                </a:solidFill>
-                <a:latin typeface="Calibri"/>
-              </a:rPr>
-              <a:t>3</a:t>
-            </a:r>
-          </a:p>
-        </p:txBody>
-      </p:sp>
-      <p:sp>
-        <p:nvSpPr>
-          <p:cNvPr id="14" name="TextBox 13"/>
-          <p:cNvSpPr txBox="1"/>
-          <p:nvPr/>
-        </p:nvSpPr>
-        <p:spPr>
-          <a:xfrm>
-            <a:off x="1143000" y="4197096"/>
-            <a:ext cx="5943600" cy="868680"/>
-          </a:xfrm>
-          <a:prstGeom prst="rect">
-            <a:avLst/>
-          </a:prstGeom>
-          <a:noFill/>
-        </p:spPr>
-        <p:txBody>
-          <a:bodyPr wrap="square" anchor="ctr" lIns="0" rIns="0" tIns="0" bIns="0"/>
-          <a:lstStyle/>
-          <a:p>
-            <a:pPr algn="l"/>
-            <a:r>
-              <a:rPr sz="1700" b="0" i="0">
-                <a:solidFill>
-                  <a:srgbClr val="202122"/>
-                </a:solidFill>
-                <a:latin typeface="Calibri"/>
-              </a:rPr>
-              <a:t>Decide whether to log, close or escalate it.</a:t>
-            </a:r>
-          </a:p>
-        </p:txBody>
-      </p:sp>
-      <p:sp>
-        <p:nvSpPr>
-          <p:cNvPr id="15" name="Oval 14"/>
-          <p:cNvSpPr/>
-          <p:nvPr/>
-        </p:nvSpPr>
-        <p:spPr>
-          <a:xfrm>
-            <a:off x="548640" y="5417820"/>
-            <a:ext cx="384048" cy="384048"/>
-          </a:xfrm>
-          <a:prstGeom prst="ellipse">
-            <a:avLst/>
-          </a:prstGeom>
-          <a:solidFill>
-            <a:srgbClr val="0645AD"/>
-          </a:solidFill>
-          <a:ln>
-            <a:noFill/>
-          </a:ln>
-          <a:effectLst/>
-        </p:spPr>
-        <p:style>
-          <a:lnRef idx="1">
-            <a:schemeClr val="accent1"/>
-          </a:lnRef>
-          <a:fillRef idx="3">
-            <a:schemeClr val="accent1"/>
-          </a:fillRef>
-          <a:effectRef idx="2">
-            <a:schemeClr val="accent1"/>
-          </a:effectRef>
-          <a:fontRef idx="minor">
-            <a:schemeClr val="lt1"/>
-          </a:fontRef>
-        </p:style>
-        <p:txBody>
-          <a:bodyPr rtlCol="0" anchor="ctr" lIns="0" rIns="0" tIns="0" bIns="0"/>
-          <a:lstStyle/>
-          <a:p>
-            <a:pPr algn="ctr"/>
-            <a:r>
-              <a:rPr sz="1300" b="1">
-                <a:solidFill>
-                  <a:srgbClr val="FFFFFF"/>
-                </a:solidFill>
-                <a:latin typeface="Calibri"/>
-              </a:rPr>
-              <a:t>4</a:t>
-            </a:r>
-          </a:p>
-        </p:txBody>
-      </p:sp>
-      <p:sp>
-        <p:nvSpPr>
-          <p:cNvPr id="16" name="TextBox 15"/>
-          <p:cNvSpPr txBox="1"/>
-          <p:nvPr/>
-        </p:nvSpPr>
-        <p:spPr>
-          <a:xfrm>
-            <a:off x="1143000" y="5175504"/>
-            <a:ext cx="5943600" cy="868680"/>
-          </a:xfrm>
-          <a:prstGeom prst="rect">
-            <a:avLst/>
-          </a:prstGeom>
-          <a:noFill/>
-        </p:spPr>
-        <p:txBody>
-          <a:bodyPr wrap="square" anchor="ctr" lIns="0" rIns="0" tIns="0" bIns="0"/>
-          <a:lstStyle/>
-          <a:p>
-            <a:pPr algn="l"/>
-            <a:r>
-              <a:rPr sz="1700" b="0" i="0">
-                <a:solidFill>
-                  <a:srgbClr val="202122"/>
-                </a:solidFill>
-                <a:latin typeface="Calibri"/>
-              </a:rPr>
-              <a:t>Plan the fix using the six-step strategy.</a:t>
-            </a:r>
-          </a:p>
-        </p:txBody>
-      </p:sp>
-      <p:sp>
-        <p:nvSpPr>
-          <p:cNvPr id="17" name="Rounded Rectangle 16"/>
-          <p:cNvSpPr/>
-          <p:nvPr/>
-        </p:nvSpPr>
-        <p:spPr>
-          <a:xfrm>
-            <a:off x="7772400" y="1508760"/>
-            <a:ext cx="3867912" cy="4572000"/>
-          </a:xfrm>
-          <a:prstGeom prst="roundRect">
-            <a:avLst>
-              <a:gd name="adj" fmla="val 8000"/>
-            </a:avLst>
-          </a:prstGeom>
-          <a:solidFill>
-            <a:srgbClr val="EAF3FF"/>
-          </a:solidFill>
-          <a:ln>
-            <a:noFill/>
-          </a:ln>
-          <a:effectLst/>
-        </p:spPr>
-        <p:style>
-          <a:lnRef idx="1">
-            <a:schemeClr val="accent1"/>
-          </a:lnRef>
-          <a:fillRef idx="3">
-            <a:schemeClr val="accent1"/>
-          </a:fillRef>
-          <a:effectRef idx="2">
-            <a:schemeClr val="accent1"/>
-          </a:effectRef>
-          <a:fontRef idx="minor">
-            <a:schemeClr val="lt1"/>
-          </a:fontRef>
-        </p:style>
-        <p:txBody>
-          <a:bodyPr rtlCol="0" anchor="ctr"/>
-          <a:lstStyle/>
-          <a:p/>
-        </p:txBody>
-      </p:sp>
-      <p:sp>
-        <p:nvSpPr>
-          <p:cNvPr id="18" name="TextBox 17"/>
-          <p:cNvSpPr txBox="1"/>
-          <p:nvPr/>
-        </p:nvSpPr>
-        <p:spPr>
-          <a:xfrm>
-            <a:off x="8046720" y="1737360"/>
-            <a:ext cx="3291840" cy="365760"/>
-          </a:xfrm>
-          <a:prstGeom prst="rect">
-            <a:avLst/>
-          </a:prstGeom>
-          <a:noFill/>
-        </p:spPr>
-        <p:txBody>
-          <a:bodyPr wrap="square" anchor="t" lIns="0" rIns="0" tIns="0" bIns="0"/>
-          <a:lstStyle/>
-          <a:p>
-            <a:pPr algn="l"/>
-            <a:r>
-              <a:rPr sz="1300" b="1" i="0">
-                <a:solidFill>
-                  <a:srgbClr val="0645AD"/>
-                </a:solidFill>
-                <a:latin typeface="Calibri"/>
-              </a:rPr>
-              <a:t>SUCCESS CRITERIA</a:t>
-            </a:r>
-          </a:p>
-        </p:txBody>
-      </p:sp>
-      <p:sp>
-        <p:nvSpPr>
-          <p:cNvPr id="19" name="TextBox 18"/>
-          <p:cNvSpPr txBox="1"/>
-          <p:nvPr/>
-        </p:nvSpPr>
-        <p:spPr>
-          <a:xfrm>
-            <a:off x="8046720" y="2240280"/>
-            <a:ext cx="3337560" cy="3657600"/>
-          </a:xfrm>
-          <a:prstGeom prst="rect">
-            <a:avLst/>
-          </a:prstGeom>
-          <a:noFill/>
-        </p:spPr>
-        <p:txBody>
-          <a:bodyPr wrap="square" lIns="0" rIns="0" tIns="0" bIns="0">
-            <a:spAutoFit/>
-          </a:bodyPr>
-          <a:lstStyle/>
-          <a:p>
-            <a:pPr marL="274320" indent="-274320">
-              <a:spcAft>
-                <a:spcPts val="810"/>
-              </a:spcAft>
-              <a:buClr>
-                <a:srgbClr val="0645AD"/>
-              </a:buClr>
-              <a:buFont typeface="Arial"/>
-              <a:buChar char="•"/>
-            </a:pPr>
-            <a:r>
-              <a:rPr sz="1800" b="0">
-                <a:solidFill>
-                  <a:srgbClr val="202122"/>
-                </a:solidFill>
-                <a:latin typeface="Calibri"/>
-              </a:rPr>
-              <a:t>Each 'why' follows from the last</a:t>
-            </a:r>
-          </a:p>
-          <a:p>
-            <a:pPr marL="274320" indent="-274320">
-              <a:spcAft>
-                <a:spcPts val="810"/>
-              </a:spcAft>
-              <a:buClr>
-                <a:srgbClr val="0645AD"/>
-              </a:buClr>
-              <a:buFont typeface="Arial"/>
-              <a:buChar char="•"/>
-            </a:pPr>
-            <a:r>
-              <a:rPr sz="1800" b="0">
-                <a:solidFill>
-                  <a:srgbClr val="202122"/>
-                </a:solidFill>
-                <a:latin typeface="Calibri"/>
-              </a:rPr>
-              <a:t>Root cause is a cause, not a symptom</a:t>
-            </a:r>
-          </a:p>
-          <a:p>
-            <a:pPr marL="274320" indent="-274320">
-              <a:spcAft>
-                <a:spcPts val="810"/>
-              </a:spcAft>
-              <a:buClr>
-                <a:srgbClr val="0645AD"/>
-              </a:buClr>
-              <a:buFont typeface="Arial"/>
-              <a:buChar char="•"/>
-            </a:pPr>
-            <a:r>
-              <a:rPr sz="1800" b="0">
-                <a:solidFill>
-                  <a:srgbClr val="202122"/>
-                </a:solidFill>
-                <a:latin typeface="Calibri"/>
-              </a:rPr>
-              <a:t>Plan covers testing and review</a:t>
+              <a:rPr sz="1300" b="0" i="1">
+                <a:solidFill>
+                  <a:srgbClr val="54595D"/>
+                </a:solidFill>
+                <a:latin typeface="Calibri"/>
+              </a:rPr>
+              <a:t>Answer on mini whiteboards or in your book. Answers are in the speaker notes.</a:t>
             </a:r>
           </a:p>
         </p:txBody>
@@ -9068,7 +10349,7 @@
     <p:bg>
       <p:bgPr>
         <a:solidFill>
-          <a:srgbClr val="03306E"/>
+          <a:srgbClr val="FFFFFF"/>
         </a:solidFill>
         <a:effectLst/>
       </p:bgPr>
@@ -9104,7 +10385,7 @@
             <a:r>
               <a:rPr sz="1100" b="1" i="0">
                 <a:solidFill>
-                  <a:srgbClr val="A9C8F0"/>
+                  <a:srgbClr val="54595D"/>
                 </a:solidFill>
                 <a:latin typeface="Calibri"/>
               </a:rPr>
@@ -9137,25 +10418,133 @@
             <a:r>
               <a:rPr sz="3200" b="1" i="0">
                 <a:solidFill>
-                  <a:srgbClr val="FFFFFF"/>
+                  <a:srgbClr val="03306E"/>
                 </a:solidFill>
                 <a:latin typeface="Cambria"/>
               </a:rPr>
-              <a:t>Exit ticket</a:t>
-            </a:r>
-          </a:p>
-        </p:txBody>
-      </p:sp>
-      <p:sp>
-        <p:nvSpPr>
-          <p:cNvPr id="4" name="Oval 3"/>
+              <a:t>The high-level problem-solving strategy</a:t>
+            </a:r>
+          </a:p>
+        </p:txBody>
+      </p:sp>
+      <p:sp>
+        <p:nvSpPr>
+          <p:cNvPr id="4" name="TextBox 3"/>
+          <p:cNvSpPr txBox="1"/>
+          <p:nvPr/>
+        </p:nvSpPr>
+        <p:spPr>
+          <a:xfrm>
+            <a:off x="548640" y="6446520"/>
+            <a:ext cx="8229600" cy="274320"/>
+          </a:xfrm>
+          <a:prstGeom prst="rect">
+            <a:avLst/>
+          </a:prstGeom>
+          <a:noFill/>
+        </p:spPr>
+        <p:txBody>
+          <a:bodyPr wrap="square" anchor="t" lIns="0" rIns="0" tIns="0" bIns="0"/>
+          <a:lstStyle/>
+          <a:p>
+            <a:pPr algn="l"/>
+            <a:r>
+              <a:rPr sz="1000" b="0" i="0">
+                <a:solidFill>
+                  <a:srgbClr val="54595D"/>
+                </a:solidFill>
+                <a:latin typeface="Calibri"/>
+              </a:rPr>
+              <a:t>Digital Software Development T Level  ·  Problem-Solving Strategies</a:t>
+            </a:r>
+          </a:p>
+        </p:txBody>
+      </p:sp>
+      <p:sp>
+        <p:nvSpPr>
+          <p:cNvPr id="5" name="TextBox 4"/>
+          <p:cNvSpPr txBox="1"/>
+          <p:nvPr/>
+        </p:nvSpPr>
+        <p:spPr>
+          <a:xfrm>
+            <a:off x="10728655" y="6446520"/>
+            <a:ext cx="914400" cy="274320"/>
+          </a:xfrm>
+          <a:prstGeom prst="rect">
+            <a:avLst/>
+          </a:prstGeom>
+          <a:noFill/>
+        </p:spPr>
+        <p:txBody>
+          <a:bodyPr wrap="square" anchor="t" lIns="0" rIns="0" tIns="0" bIns="0"/>
+          <a:lstStyle/>
+          <a:p>
+            <a:pPr algn="r"/>
+            <a:r>
+              <a:rPr sz="1000" b="0" i="0">
+                <a:solidFill>
+                  <a:srgbClr val="54595D"/>
+                </a:solidFill>
+                <a:latin typeface="Calibri"/>
+              </a:rPr>
+              <a:t>9</a:t>
+            </a:r>
+          </a:p>
+        </p:txBody>
+      </p:sp>
+      <p:sp>
+        <p:nvSpPr>
+          <p:cNvPr id="6" name="Rectangle 5"/>
           <p:cNvSpPr/>
           <p:nvPr/>
         </p:nvSpPr>
         <p:spPr>
           <a:xfrm>
-            <a:off x="548640" y="1737360"/>
-            <a:ext cx="502920" cy="502920"/>
+            <a:off x="1416024" y="2686812"/>
+            <a:ext cx="9359646" cy="36576"/>
+          </a:xfrm>
+          <a:prstGeom prst="rect">
+            <a:avLst/>
+          </a:prstGeom>
+          <a:solidFill>
+            <a:srgbClr val="A9C8F0"/>
+          </a:solidFill>
+          <a:ln>
+            <a:noFill/>
+          </a:ln>
+          <a:effectLst/>
+        </p:spPr>
+        <p:style>
+          <a:lnRef idx="1">
+            <a:schemeClr val="accent1"/>
+          </a:lnRef>
+          <a:fillRef idx="3">
+            <a:schemeClr val="accent1"/>
+          </a:fillRef>
+          <a:effectRef idx="2">
+            <a:schemeClr val="accent1"/>
+          </a:effectRef>
+          <a:fontRef idx="minor">
+            <a:schemeClr val="lt1"/>
+          </a:fontRef>
+        </p:style>
+        <p:txBody>
+          <a:bodyPr rtlCol="0" anchor="ctr"/>
+          <a:lstStyle/>
+          <a:p/>
+        </p:txBody>
+      </p:sp>
+      <p:sp>
+        <p:nvSpPr>
+          <p:cNvPr id="7" name="Oval 6"/>
+          <p:cNvSpPr/>
+          <p:nvPr/>
+        </p:nvSpPr>
+        <p:spPr>
+          <a:xfrm>
+            <a:off x="1095984" y="2385060"/>
+            <a:ext cx="640080" cy="640080"/>
           </a:xfrm>
           <a:prstGeom prst="ellipse">
             <a:avLst/>
@@ -9188,7 +10577,7 @@
           <a:p>
             <a:pPr algn="ctr"/>
             <a:r>
-              <a:rPr sz="1700" b="1">
+              <a:rPr sz="2000" b="1">
                 <a:solidFill>
                   <a:srgbClr val="202122"/>
                 </a:solidFill>
@@ -9201,14 +10590,14 @@
       </p:sp>
       <p:sp>
         <p:nvSpPr>
-          <p:cNvPr id="5" name="TextBox 4"/>
+          <p:cNvPr id="8" name="TextBox 7"/>
           <p:cNvSpPr txBox="1"/>
           <p:nvPr/>
         </p:nvSpPr>
         <p:spPr>
           <a:xfrm>
-            <a:off x="1325880" y="1645920"/>
-            <a:ext cx="6583680" cy="822960"/>
+            <a:off x="548640" y="3162300"/>
+            <a:ext cx="1734769" cy="731520"/>
           </a:xfrm>
           <a:prstGeom prst="rect">
             <a:avLst/>
@@ -9216,32 +10605,109 @@
           <a:noFill/>
         </p:spPr>
         <p:txBody>
-          <a:bodyPr wrap="square" anchor="ctr" lIns="0" rIns="0" tIns="0" bIns="0"/>
+          <a:bodyPr wrap="square" anchor="t" lIns="0" rIns="0" tIns="0" bIns="0"/>
+          <a:lstStyle/>
+          <a:p>
+            <a:pPr algn="ctr"/>
+            <a:r>
+              <a:rPr sz="1700" b="1" i="0">
+                <a:solidFill>
+                  <a:srgbClr val="03306E"/>
+                </a:solidFill>
+                <a:latin typeface="Calibri"/>
+              </a:rPr>
+              <a:t>Define</a:t>
+            </a:r>
+          </a:p>
+        </p:txBody>
+      </p:sp>
+      <p:sp>
+        <p:nvSpPr>
+          <p:cNvPr id="9" name="Rounded Rectangle 8"/>
+          <p:cNvSpPr/>
+          <p:nvPr/>
+        </p:nvSpPr>
+        <p:spPr>
+          <a:xfrm>
+            <a:off x="548640" y="3939540"/>
+            <a:ext cx="1734769" cy="1447800"/>
+          </a:xfrm>
+          <a:prstGeom prst="roundRect">
+            <a:avLst>
+              <a:gd name="adj" fmla="val 6000"/>
+            </a:avLst>
+          </a:prstGeom>
+          <a:solidFill>
+            <a:srgbClr val="EAF3FF"/>
+          </a:solidFill>
+          <a:ln>
+            <a:noFill/>
+          </a:ln>
+          <a:effectLst/>
+        </p:spPr>
+        <p:style>
+          <a:lnRef idx="1">
+            <a:schemeClr val="accent1"/>
+          </a:lnRef>
+          <a:fillRef idx="3">
+            <a:schemeClr val="accent1"/>
+          </a:fillRef>
+          <a:effectRef idx="2">
+            <a:schemeClr val="accent1"/>
+          </a:effectRef>
+          <a:fontRef idx="minor">
+            <a:schemeClr val="lt1"/>
+          </a:fontRef>
+        </p:style>
+        <p:txBody>
+          <a:bodyPr rtlCol="0" anchor="ctr"/>
+          <a:lstStyle/>
+          <a:p/>
+        </p:txBody>
+      </p:sp>
+      <p:sp>
+        <p:nvSpPr>
+          <p:cNvPr id="10" name="TextBox 9"/>
+          <p:cNvSpPr txBox="1"/>
+          <p:nvPr/>
+        </p:nvSpPr>
+        <p:spPr>
+          <a:xfrm>
+            <a:off x="685800" y="4076700"/>
+            <a:ext cx="1460449" cy="1173480"/>
+          </a:xfrm>
+          <a:prstGeom prst="rect">
+            <a:avLst/>
+          </a:prstGeom>
+          <a:noFill/>
+        </p:spPr>
+        <p:txBody>
+          <a:bodyPr wrap="square" anchor="t" lIns="0" rIns="0" tIns="0" bIns="0"/>
           <a:lstStyle/>
           <a:p>
             <a:pPr algn="l"/>
             <a:r>
-              <a:rPr sz="2000" b="0" i="0">
-                <a:solidFill>
-                  <a:srgbClr val="FFFFFF"/>
-                </a:solidFill>
-                <a:latin typeface="Calibri"/>
-              </a:rPr>
-              <a:t>When would you choose bottom-up over top-down?</a:t>
-            </a:r>
-          </a:p>
-        </p:txBody>
-      </p:sp>
-      <p:sp>
-        <p:nvSpPr>
-          <p:cNvPr id="6" name="Oval 5"/>
+              <a:rPr sz="1700" b="0" i="0">
+                <a:solidFill>
+                  <a:srgbClr val="202122"/>
+                </a:solidFill>
+                <a:latin typeface="Calibri"/>
+              </a:rPr>
+              <a:t>State exactly what the problem is.</a:t>
+            </a:r>
+          </a:p>
+        </p:txBody>
+      </p:sp>
+      <p:sp>
+        <p:nvSpPr>
+          <p:cNvPr id="11" name="Oval 10"/>
           <p:cNvSpPr/>
           <p:nvPr/>
         </p:nvSpPr>
         <p:spPr>
           <a:xfrm>
-            <a:off x="548640" y="2697480"/>
-            <a:ext cx="502920" cy="502920"/>
+            <a:off x="2967913" y="2385060"/>
+            <a:ext cx="640080" cy="640080"/>
           </a:xfrm>
           <a:prstGeom prst="ellipse">
             <a:avLst/>
@@ -9274,7 +10740,7 @@
           <a:p>
             <a:pPr algn="ctr"/>
             <a:r>
-              <a:rPr sz="1700" b="1">
+              <a:rPr sz="2000" b="1">
                 <a:solidFill>
                   <a:srgbClr val="202122"/>
                 </a:solidFill>
@@ -9287,14 +10753,14 @@
       </p:sp>
       <p:sp>
         <p:nvSpPr>
-          <p:cNvPr id="7" name="TextBox 6"/>
+          <p:cNvPr id="12" name="TextBox 11"/>
           <p:cNvSpPr txBox="1"/>
           <p:nvPr/>
         </p:nvSpPr>
         <p:spPr>
           <a:xfrm>
-            <a:off x="1325880" y="2606040"/>
-            <a:ext cx="6583680" cy="822960"/>
+            <a:off x="2420569" y="3162300"/>
+            <a:ext cx="1734769" cy="731520"/>
           </a:xfrm>
           <a:prstGeom prst="rect">
             <a:avLst/>
@@ -9302,32 +10768,109 @@
           <a:noFill/>
         </p:spPr>
         <p:txBody>
-          <a:bodyPr wrap="square" anchor="ctr" lIns="0" rIns="0" tIns="0" bIns="0"/>
+          <a:bodyPr wrap="square" anchor="t" lIns="0" rIns="0" tIns="0" bIns="0"/>
+          <a:lstStyle/>
+          <a:p>
+            <a:pPr algn="ctr"/>
+            <a:r>
+              <a:rPr sz="1700" b="1" i="0">
+                <a:solidFill>
+                  <a:srgbClr val="03306E"/>
+                </a:solidFill>
+                <a:latin typeface="Calibri"/>
+              </a:rPr>
+              <a:t>Gather</a:t>
+            </a:r>
+          </a:p>
+        </p:txBody>
+      </p:sp>
+      <p:sp>
+        <p:nvSpPr>
+          <p:cNvPr id="13" name="Rounded Rectangle 12"/>
+          <p:cNvSpPr/>
+          <p:nvPr/>
+        </p:nvSpPr>
+        <p:spPr>
+          <a:xfrm>
+            <a:off x="2420569" y="3939540"/>
+            <a:ext cx="1734769" cy="1447800"/>
+          </a:xfrm>
+          <a:prstGeom prst="roundRect">
+            <a:avLst>
+              <a:gd name="adj" fmla="val 6000"/>
+            </a:avLst>
+          </a:prstGeom>
+          <a:solidFill>
+            <a:srgbClr val="EAF3FF"/>
+          </a:solidFill>
+          <a:ln>
+            <a:noFill/>
+          </a:ln>
+          <a:effectLst/>
+        </p:spPr>
+        <p:style>
+          <a:lnRef idx="1">
+            <a:schemeClr val="accent1"/>
+          </a:lnRef>
+          <a:fillRef idx="3">
+            <a:schemeClr val="accent1"/>
+          </a:fillRef>
+          <a:effectRef idx="2">
+            <a:schemeClr val="accent1"/>
+          </a:effectRef>
+          <a:fontRef idx="minor">
+            <a:schemeClr val="lt1"/>
+          </a:fontRef>
+        </p:style>
+        <p:txBody>
+          <a:bodyPr rtlCol="0" anchor="ctr"/>
+          <a:lstStyle/>
+          <a:p/>
+        </p:txBody>
+      </p:sp>
+      <p:sp>
+        <p:nvSpPr>
+          <p:cNvPr id="14" name="TextBox 13"/>
+          <p:cNvSpPr txBox="1"/>
+          <p:nvPr/>
+        </p:nvSpPr>
+        <p:spPr>
+          <a:xfrm>
+            <a:off x="2557729" y="4076700"/>
+            <a:ext cx="1460449" cy="1173480"/>
+          </a:xfrm>
+          <a:prstGeom prst="rect">
+            <a:avLst/>
+          </a:prstGeom>
+          <a:noFill/>
+        </p:spPr>
+        <p:txBody>
+          <a:bodyPr wrap="square" anchor="t" lIns="0" rIns="0" tIns="0" bIns="0"/>
           <a:lstStyle/>
           <a:p>
             <a:pPr algn="l"/>
             <a:r>
-              <a:rPr sz="2000" b="0" i="0">
-                <a:solidFill>
-                  <a:srgbClr val="FFFFFF"/>
-                </a:solidFill>
-                <a:latin typeface="Calibri"/>
-              </a:rPr>
-              <a:t>Why does fixing a symptom not solve the problem?</a:t>
-            </a:r>
-          </a:p>
-        </p:txBody>
-      </p:sp>
-      <p:sp>
-        <p:nvSpPr>
-          <p:cNvPr id="8" name="Oval 7"/>
+              <a:rPr sz="1700" b="0" i="0">
+                <a:solidFill>
+                  <a:srgbClr val="202122"/>
+                </a:solidFill>
+                <a:latin typeface="Calibri"/>
+              </a:rPr>
+              <a:t>Collect information, error logs, user reports.</a:t>
+            </a:r>
+          </a:p>
+        </p:txBody>
+      </p:sp>
+      <p:sp>
+        <p:nvSpPr>
+          <p:cNvPr id="15" name="Oval 14"/>
           <p:cNvSpPr/>
           <p:nvPr/>
         </p:nvSpPr>
         <p:spPr>
           <a:xfrm>
-            <a:off x="548640" y="3657600"/>
-            <a:ext cx="502920" cy="502920"/>
+            <a:off x="4839843" y="2385060"/>
+            <a:ext cx="640080" cy="640080"/>
           </a:xfrm>
           <a:prstGeom prst="ellipse">
             <a:avLst/>
@@ -9360,7 +10903,7 @@
           <a:p>
             <a:pPr algn="ctr"/>
             <a:r>
-              <a:rPr sz="1700" b="1">
+              <a:rPr sz="2000" b="1">
                 <a:solidFill>
                   <a:srgbClr val="202122"/>
                 </a:solidFill>
@@ -9373,14 +10916,14 @@
       </p:sp>
       <p:sp>
         <p:nvSpPr>
-          <p:cNvPr id="9" name="TextBox 8"/>
+          <p:cNvPr id="16" name="TextBox 15"/>
           <p:cNvSpPr txBox="1"/>
           <p:nvPr/>
         </p:nvSpPr>
         <p:spPr>
           <a:xfrm>
-            <a:off x="1325880" y="3566160"/>
-            <a:ext cx="6583680" cy="822960"/>
+            <a:off x="4292498" y="3162300"/>
+            <a:ext cx="1734769" cy="731520"/>
           </a:xfrm>
           <a:prstGeom prst="rect">
             <a:avLst/>
@@ -9388,40 +10931,40 @@
           <a:noFill/>
         </p:spPr>
         <p:txBody>
-          <a:bodyPr wrap="square" anchor="ctr" lIns="0" rIns="0" tIns="0" bIns="0"/>
-          <a:lstStyle/>
-          <a:p>
-            <a:pPr algn="l"/>
-            <a:r>
-              <a:rPr sz="2000" b="0" i="0">
-                <a:solidFill>
-                  <a:srgbClr val="FFFFFF"/>
-                </a:solidFill>
-                <a:latin typeface="Calibri"/>
-              </a:rPr>
-              <a:t>Why must a fix be reviewed?</a:t>
-            </a:r>
-          </a:p>
-        </p:txBody>
-      </p:sp>
-      <p:sp>
-        <p:nvSpPr>
-          <p:cNvPr id="10" name="Rounded Rectangle 9"/>
+          <a:bodyPr wrap="square" anchor="t" lIns="0" rIns="0" tIns="0" bIns="0"/>
+          <a:lstStyle/>
+          <a:p>
+            <a:pPr algn="ctr"/>
+            <a:r>
+              <a:rPr sz="1700" b="1" i="0">
+                <a:solidFill>
+                  <a:srgbClr val="03306E"/>
+                </a:solidFill>
+                <a:latin typeface="Calibri"/>
+              </a:rPr>
+              <a:t>Analyse</a:t>
+            </a:r>
+          </a:p>
+        </p:txBody>
+      </p:sp>
+      <p:sp>
+        <p:nvSpPr>
+          <p:cNvPr id="17" name="Rounded Rectangle 16"/>
           <p:cNvSpPr/>
           <p:nvPr/>
         </p:nvSpPr>
         <p:spPr>
           <a:xfrm>
-            <a:off x="8229600" y="1645920"/>
-            <a:ext cx="3410712" cy="2926080"/>
+            <a:off x="4292498" y="3939540"/>
+            <a:ext cx="1734769" cy="1447800"/>
           </a:xfrm>
           <a:prstGeom prst="roundRect">
             <a:avLst>
-              <a:gd name="adj" fmla="val 8000"/>
+              <a:gd name="adj" fmla="val 6000"/>
             </a:avLst>
           </a:prstGeom>
           <a:solidFill>
-            <a:srgbClr val="0645AD"/>
+            <a:srgbClr val="EAF3FF"/>
           </a:solidFill>
           <a:ln>
             <a:noFill/>
@@ -9450,14 +10993,14 @@
       </p:sp>
       <p:sp>
         <p:nvSpPr>
-          <p:cNvPr id="11" name="TextBox 10"/>
+          <p:cNvPr id="18" name="TextBox 17"/>
           <p:cNvSpPr txBox="1"/>
           <p:nvPr/>
         </p:nvSpPr>
         <p:spPr>
           <a:xfrm>
-            <a:off x="8503920" y="1874519"/>
-            <a:ext cx="2926080" cy="365760"/>
+            <a:off x="4429658" y="4076700"/>
+            <a:ext cx="1460449" cy="1173480"/>
           </a:xfrm>
           <a:prstGeom prst="rect">
             <a:avLst/>
@@ -9470,27 +11013,80 @@
           <a:p>
             <a:pPr algn="l"/>
             <a:r>
-              <a:rPr sz="1300" b="1" i="0">
-                <a:solidFill>
-                  <a:srgbClr val="A9C8F0"/>
-                </a:solidFill>
-                <a:latin typeface="Calibri"/>
-              </a:rPr>
-              <a:t>REVISE THIS TOPIC</a:t>
-            </a:r>
-          </a:p>
-        </p:txBody>
-      </p:sp>
-      <p:sp>
-        <p:nvSpPr>
-          <p:cNvPr id="12" name="TextBox 11"/>
+              <a:rPr sz="1700" b="0" i="0">
+                <a:solidFill>
+                  <a:srgbClr val="202122"/>
+                </a:solidFill>
+                <a:latin typeface="Calibri"/>
+              </a:rPr>
+              <a:t>Look for the cause and patterns.</a:t>
+            </a:r>
+          </a:p>
+        </p:txBody>
+      </p:sp>
+      <p:sp>
+        <p:nvSpPr>
+          <p:cNvPr id="19" name="Oval 18"/>
+          <p:cNvSpPr/>
+          <p:nvPr/>
+        </p:nvSpPr>
+        <p:spPr>
+          <a:xfrm>
+            <a:off x="6711772" y="2385060"/>
+            <a:ext cx="640080" cy="640080"/>
+          </a:xfrm>
+          <a:prstGeom prst="ellipse">
+            <a:avLst/>
+          </a:prstGeom>
+          <a:solidFill>
+            <a:srgbClr val="F2B705"/>
+          </a:solidFill>
+          <a:ln>
+            <a:noFill/>
+          </a:ln>
+          <a:effectLst/>
+        </p:spPr>
+        <p:style>
+          <a:lnRef idx="1">
+            <a:schemeClr val="accent1"/>
+          </a:lnRef>
+          <a:fillRef idx="3">
+            <a:schemeClr val="accent1"/>
+          </a:fillRef>
+          <a:effectRef idx="2">
+            <a:schemeClr val="accent1"/>
+          </a:effectRef>
+          <a:fontRef idx="minor">
+            <a:schemeClr val="lt1"/>
+          </a:fontRef>
+        </p:style>
+        <p:txBody>
+          <a:bodyPr rtlCol="0" anchor="ctr" lIns="0" rIns="0" tIns="0" bIns="0"/>
+          <a:lstStyle/>
+          <a:p>
+            <a:pPr algn="ctr"/>
+            <a:r>
+              <a:rPr sz="2000" b="1">
+                <a:solidFill>
+                  <a:srgbClr val="202122"/>
+                </a:solidFill>
+                <a:latin typeface="Calibri"/>
+              </a:rPr>
+              <a:t>4</a:t>
+            </a:r>
+          </a:p>
+        </p:txBody>
+      </p:sp>
+      <p:sp>
+        <p:nvSpPr>
+          <p:cNvPr id="20" name="TextBox 19"/>
           <p:cNvSpPr txBox="1"/>
           <p:nvPr/>
         </p:nvSpPr>
         <p:spPr>
           <a:xfrm>
-            <a:off x="8503920" y="2286000"/>
-            <a:ext cx="2926080" cy="548640"/>
+            <a:off x="6164427" y="3162300"/>
+            <a:ext cx="1734769" cy="731520"/>
           </a:xfrm>
           <a:prstGeom prst="rect">
             <a:avLst/>
@@ -9501,29 +11097,159 @@
           <a:bodyPr wrap="square" anchor="t" lIns="0" rIns="0" tIns="0" bIns="0"/>
           <a:lstStyle/>
           <a:p>
+            <a:pPr algn="ctr"/>
+            <a:r>
+              <a:rPr sz="1700" b="1" i="0">
+                <a:solidFill>
+                  <a:srgbClr val="03306E"/>
+                </a:solidFill>
+                <a:latin typeface="Calibri"/>
+              </a:rPr>
+              <a:t>Plan</a:t>
+            </a:r>
+          </a:p>
+        </p:txBody>
+      </p:sp>
+      <p:sp>
+        <p:nvSpPr>
+          <p:cNvPr id="21" name="Rounded Rectangle 20"/>
+          <p:cNvSpPr/>
+          <p:nvPr/>
+        </p:nvSpPr>
+        <p:spPr>
+          <a:xfrm>
+            <a:off x="6164427" y="3939540"/>
+            <a:ext cx="1734769" cy="1447800"/>
+          </a:xfrm>
+          <a:prstGeom prst="roundRect">
+            <a:avLst>
+              <a:gd name="adj" fmla="val 6000"/>
+            </a:avLst>
+          </a:prstGeom>
+          <a:solidFill>
+            <a:srgbClr val="EAF3FF"/>
+          </a:solidFill>
+          <a:ln>
+            <a:noFill/>
+          </a:ln>
+          <a:effectLst/>
+        </p:spPr>
+        <p:style>
+          <a:lnRef idx="1">
+            <a:schemeClr val="accent1"/>
+          </a:lnRef>
+          <a:fillRef idx="3">
+            <a:schemeClr val="accent1"/>
+          </a:fillRef>
+          <a:effectRef idx="2">
+            <a:schemeClr val="accent1"/>
+          </a:effectRef>
+          <a:fontRef idx="minor">
+            <a:schemeClr val="lt1"/>
+          </a:fontRef>
+        </p:style>
+        <p:txBody>
+          <a:bodyPr rtlCol="0" anchor="ctr"/>
+          <a:lstStyle/>
+          <a:p/>
+        </p:txBody>
+      </p:sp>
+      <p:sp>
+        <p:nvSpPr>
+          <p:cNvPr id="22" name="TextBox 21"/>
+          <p:cNvSpPr txBox="1"/>
+          <p:nvPr/>
+        </p:nvSpPr>
+        <p:spPr>
+          <a:xfrm>
+            <a:off x="6301587" y="4076700"/>
+            <a:ext cx="1460449" cy="1173480"/>
+          </a:xfrm>
+          <a:prstGeom prst="rect">
+            <a:avLst/>
+          </a:prstGeom>
+          <a:noFill/>
+        </p:spPr>
+        <p:txBody>
+          <a:bodyPr wrap="square" anchor="t" lIns="0" rIns="0" tIns="0" bIns="0"/>
+          <a:lstStyle/>
+          <a:p>
             <a:pPr algn="l"/>
             <a:r>
-              <a:rPr sz="1400" b="0" i="0">
-                <a:solidFill>
-                  <a:srgbClr val="FFFFFF"/>
-                </a:solidFill>
-                <a:latin typeface="Calibri"/>
-              </a:rPr>
-              <a:t>Revision notes for this lesson are on the study wiki:</a:t>
-            </a:r>
-          </a:p>
-        </p:txBody>
-      </p:sp>
-      <p:sp>
-        <p:nvSpPr>
-          <p:cNvPr id="13" name="TextBox 12"/>
+              <a:rPr sz="1700" b="0" i="0">
+                <a:solidFill>
+                  <a:srgbClr val="202122"/>
+                </a:solidFill>
+                <a:latin typeface="Calibri"/>
+              </a:rPr>
+              <a:t>Decide on a plan of action.</a:t>
+            </a:r>
+          </a:p>
+        </p:txBody>
+      </p:sp>
+      <p:sp>
+        <p:nvSpPr>
+          <p:cNvPr id="23" name="Oval 22"/>
+          <p:cNvSpPr/>
+          <p:nvPr/>
+        </p:nvSpPr>
+        <p:spPr>
+          <a:xfrm>
+            <a:off x="8583701" y="2385060"/>
+            <a:ext cx="640080" cy="640080"/>
+          </a:xfrm>
+          <a:prstGeom prst="ellipse">
+            <a:avLst/>
+          </a:prstGeom>
+          <a:solidFill>
+            <a:srgbClr val="F2B705"/>
+          </a:solidFill>
+          <a:ln>
+            <a:noFill/>
+          </a:ln>
+          <a:effectLst/>
+        </p:spPr>
+        <p:style>
+          <a:lnRef idx="1">
+            <a:schemeClr val="accent1"/>
+          </a:lnRef>
+          <a:fillRef idx="3">
+            <a:schemeClr val="accent1"/>
+          </a:fillRef>
+          <a:effectRef idx="2">
+            <a:schemeClr val="accent1"/>
+          </a:effectRef>
+          <a:fontRef idx="minor">
+            <a:schemeClr val="lt1"/>
+          </a:fontRef>
+        </p:style>
+        <p:txBody>
+          <a:bodyPr rtlCol="0" anchor="ctr" lIns="0" rIns="0" tIns="0" bIns="0"/>
+          <a:lstStyle/>
+          <a:p>
+            <a:pPr algn="ctr"/>
+            <a:r>
+              <a:rPr sz="2000" b="1">
+                <a:solidFill>
+                  <a:srgbClr val="202122"/>
+                </a:solidFill>
+                <a:latin typeface="Calibri"/>
+              </a:rPr>
+              <a:t>5</a:t>
+            </a:r>
+          </a:p>
+        </p:txBody>
+      </p:sp>
+      <p:sp>
+        <p:nvSpPr>
+          <p:cNvPr id="24" name="TextBox 23"/>
           <p:cNvSpPr txBox="1"/>
           <p:nvPr/>
         </p:nvSpPr>
         <p:spPr>
           <a:xfrm>
-            <a:off x="8503920" y="2926080"/>
-            <a:ext cx="2926080" cy="1463040"/>
+            <a:off x="8036356" y="3162300"/>
+            <a:ext cx="1734769" cy="731520"/>
           </a:xfrm>
           <a:prstGeom prst="rect">
             <a:avLst/>
@@ -9534,29 +11260,159 @@
           <a:bodyPr wrap="square" anchor="t" lIns="0" rIns="0" tIns="0" bIns="0"/>
           <a:lstStyle/>
           <a:p>
+            <a:pPr algn="ctr"/>
+            <a:r>
+              <a:rPr sz="1700" b="1" i="0">
+                <a:solidFill>
+                  <a:srgbClr val="03306E"/>
+                </a:solidFill>
+                <a:latin typeface="Calibri"/>
+              </a:rPr>
+              <a:t>Implement</a:t>
+            </a:r>
+          </a:p>
+        </p:txBody>
+      </p:sp>
+      <p:sp>
+        <p:nvSpPr>
+          <p:cNvPr id="25" name="Rounded Rectangle 24"/>
+          <p:cNvSpPr/>
+          <p:nvPr/>
+        </p:nvSpPr>
+        <p:spPr>
+          <a:xfrm>
+            <a:off x="8036356" y="3939540"/>
+            <a:ext cx="1734769" cy="1447800"/>
+          </a:xfrm>
+          <a:prstGeom prst="roundRect">
+            <a:avLst>
+              <a:gd name="adj" fmla="val 6000"/>
+            </a:avLst>
+          </a:prstGeom>
+          <a:solidFill>
+            <a:srgbClr val="EAF3FF"/>
+          </a:solidFill>
+          <a:ln>
+            <a:noFill/>
+          </a:ln>
+          <a:effectLst/>
+        </p:spPr>
+        <p:style>
+          <a:lnRef idx="1">
+            <a:schemeClr val="accent1"/>
+          </a:lnRef>
+          <a:fillRef idx="3">
+            <a:schemeClr val="accent1"/>
+          </a:fillRef>
+          <a:effectRef idx="2">
+            <a:schemeClr val="accent1"/>
+          </a:effectRef>
+          <a:fontRef idx="minor">
+            <a:schemeClr val="lt1"/>
+          </a:fontRef>
+        </p:style>
+        <p:txBody>
+          <a:bodyPr rtlCol="0" anchor="ctr"/>
+          <a:lstStyle/>
+          <a:p/>
+        </p:txBody>
+      </p:sp>
+      <p:sp>
+        <p:nvSpPr>
+          <p:cNvPr id="26" name="TextBox 25"/>
+          <p:cNvSpPr txBox="1"/>
+          <p:nvPr/>
+        </p:nvSpPr>
+        <p:spPr>
+          <a:xfrm>
+            <a:off x="8173516" y="4076700"/>
+            <a:ext cx="1460449" cy="1173480"/>
+          </a:xfrm>
+          <a:prstGeom prst="rect">
+            <a:avLst/>
+          </a:prstGeom>
+          <a:noFill/>
+        </p:spPr>
+        <p:txBody>
+          <a:bodyPr wrap="square" anchor="t" lIns="0" rIns="0" tIns="0" bIns="0"/>
+          <a:lstStyle/>
+          <a:p>
             <a:pPr algn="l"/>
             <a:r>
-              <a:rPr sz="2000" b="1" i="0">
-                <a:solidFill>
-                  <a:srgbClr val="FFFFFF"/>
-                </a:solidFill>
-                <a:latin typeface="Cambria"/>
-              </a:rPr>
-              <a:t>Core Paper 1: Problem Solving, Programming, Emerging Issues and Legislation</a:t>
-            </a:r>
-          </a:p>
-        </p:txBody>
-      </p:sp>
-      <p:sp>
-        <p:nvSpPr>
-          <p:cNvPr id="14" name="TextBox 13"/>
+              <a:rPr sz="1700" b="0" i="0">
+                <a:solidFill>
+                  <a:srgbClr val="202122"/>
+                </a:solidFill>
+                <a:latin typeface="Calibri"/>
+              </a:rPr>
+              <a:t>Write and apply the fix.</a:t>
+            </a:r>
+          </a:p>
+        </p:txBody>
+      </p:sp>
+      <p:sp>
+        <p:nvSpPr>
+          <p:cNvPr id="27" name="Oval 26"/>
+          <p:cNvSpPr/>
+          <p:nvPr/>
+        </p:nvSpPr>
+        <p:spPr>
+          <a:xfrm>
+            <a:off x="10455630" y="2385060"/>
+            <a:ext cx="640080" cy="640080"/>
+          </a:xfrm>
+          <a:prstGeom prst="ellipse">
+            <a:avLst/>
+          </a:prstGeom>
+          <a:solidFill>
+            <a:srgbClr val="F2B705"/>
+          </a:solidFill>
+          <a:ln>
+            <a:noFill/>
+          </a:ln>
+          <a:effectLst/>
+        </p:spPr>
+        <p:style>
+          <a:lnRef idx="1">
+            <a:schemeClr val="accent1"/>
+          </a:lnRef>
+          <a:fillRef idx="3">
+            <a:schemeClr val="accent1"/>
+          </a:fillRef>
+          <a:effectRef idx="2">
+            <a:schemeClr val="accent1"/>
+          </a:effectRef>
+          <a:fontRef idx="minor">
+            <a:schemeClr val="lt1"/>
+          </a:fontRef>
+        </p:style>
+        <p:txBody>
+          <a:bodyPr rtlCol="0" anchor="ctr" lIns="0" rIns="0" tIns="0" bIns="0"/>
+          <a:lstStyle/>
+          <a:p>
+            <a:pPr algn="ctr"/>
+            <a:r>
+              <a:rPr sz="2000" b="1">
+                <a:solidFill>
+                  <a:srgbClr val="202122"/>
+                </a:solidFill>
+                <a:latin typeface="Calibri"/>
+              </a:rPr>
+              <a:t>6</a:t>
+            </a:r>
+          </a:p>
+        </p:txBody>
+      </p:sp>
+      <p:sp>
+        <p:nvSpPr>
+          <p:cNvPr id="28" name="TextBox 27"/>
           <p:cNvSpPr txBox="1"/>
           <p:nvPr/>
         </p:nvSpPr>
         <p:spPr>
           <a:xfrm>
-            <a:off x="548640" y="5669280"/>
-            <a:ext cx="11094415" cy="548640"/>
+            <a:off x="9908286" y="3162300"/>
+            <a:ext cx="1734769" cy="731520"/>
           </a:xfrm>
           <a:prstGeom prst="rect">
             <a:avLst/>
@@ -9567,15 +11423,92 @@
           <a:bodyPr wrap="square" anchor="t" lIns="0" rIns="0" tIns="0" bIns="0"/>
           <a:lstStyle/>
           <a:p>
+            <a:pPr algn="ctr"/>
+            <a:r>
+              <a:rPr sz="1700" b="1" i="0">
+                <a:solidFill>
+                  <a:srgbClr val="03306E"/>
+                </a:solidFill>
+                <a:latin typeface="Calibri"/>
+              </a:rPr>
+              <a:t>Review</a:t>
+            </a:r>
+          </a:p>
+        </p:txBody>
+      </p:sp>
+      <p:sp>
+        <p:nvSpPr>
+          <p:cNvPr id="29" name="Rounded Rectangle 28"/>
+          <p:cNvSpPr/>
+          <p:nvPr/>
+        </p:nvSpPr>
+        <p:spPr>
+          <a:xfrm>
+            <a:off x="9908286" y="3939540"/>
+            <a:ext cx="1734769" cy="1447800"/>
+          </a:xfrm>
+          <a:prstGeom prst="roundRect">
+            <a:avLst>
+              <a:gd name="adj" fmla="val 6000"/>
+            </a:avLst>
+          </a:prstGeom>
+          <a:solidFill>
+            <a:srgbClr val="EAF3FF"/>
+          </a:solidFill>
+          <a:ln>
+            <a:noFill/>
+          </a:ln>
+          <a:effectLst/>
+        </p:spPr>
+        <p:style>
+          <a:lnRef idx="1">
+            <a:schemeClr val="accent1"/>
+          </a:lnRef>
+          <a:fillRef idx="3">
+            <a:schemeClr val="accent1"/>
+          </a:fillRef>
+          <a:effectRef idx="2">
+            <a:schemeClr val="accent1"/>
+          </a:effectRef>
+          <a:fontRef idx="minor">
+            <a:schemeClr val="lt1"/>
+          </a:fontRef>
+        </p:style>
+        <p:txBody>
+          <a:bodyPr rtlCol="0" anchor="ctr"/>
+          <a:lstStyle/>
+          <a:p/>
+        </p:txBody>
+      </p:sp>
+      <p:sp>
+        <p:nvSpPr>
+          <p:cNvPr id="30" name="TextBox 29"/>
+          <p:cNvSpPr txBox="1"/>
+          <p:nvPr/>
+        </p:nvSpPr>
+        <p:spPr>
+          <a:xfrm>
+            <a:off x="10045446" y="4076700"/>
+            <a:ext cx="1460449" cy="1173480"/>
+          </a:xfrm>
+          <a:prstGeom prst="rect">
+            <a:avLst/>
+          </a:prstGeom>
+          <a:noFill/>
+        </p:spPr>
+        <p:txBody>
+          <a:bodyPr wrap="square" anchor="t" lIns="0" rIns="0" tIns="0" bIns="0"/>
+          <a:lstStyle/>
+          <a:p>
             <a:pPr algn="l"/>
             <a:r>
-              <a:rPr sz="1200" b="0" i="0">
-                <a:solidFill>
-                  <a:srgbClr val="A9C8F0"/>
-                </a:solidFill>
-                <a:latin typeface="Calibri"/>
-              </a:rPr>
-              <a:t>https://lana6478.github.io/T-level-Digital-Software-Development/#/01-core-component/01-core-paper-1.md</a:t>
+              <a:rPr sz="1700" b="0" i="0">
+                <a:solidFill>
+                  <a:srgbClr val="202122"/>
+                </a:solidFill>
+                <a:latin typeface="Calibri"/>
+              </a:rPr>
+              <a:t>Test that it works and nothing else broke.</a:t>
             </a:r>
           </a:p>
         </p:txBody>
